--- a/public/wedding-mentor-files/S1_Posicionamento.pptx
+++ b/public/wedding-mentor-files/S1_Posicionamento.pptx
@@ -2726,7 +2726,7 @@
     <p:bg>
       <p:bgPr>
         <a:solidFill>
-          <a:srgbClr val="0B1D33"/>
+          <a:srgbClr val="F8F6F3"/>
         </a:solidFill>
       </p:bgPr>
     </p:bg>
@@ -2744,60 +2744,40 @@
           <a:chExt cx="0" cy="0"/>
         </a:xfrm>
       </p:grpSpPr>
-      <p:sp>
-        <p:nvSpPr>
-          <p:cNvPr id="2" name="Shape 0"/>
-          <p:cNvSpPr/>
-          <p:nvPr/>
-        </p:nvSpPr>
-        <p:spPr>
-          <a:xfrm>
-            <a:off x="8046720" y="-1645920"/>
-            <a:ext cx="5943600" cy="5943600"/>
-          </a:xfrm>
-          <a:prstGeom prst="ellipse">
-            <a:avLst/>
-          </a:prstGeom>
-          <a:solidFill>
-            <a:srgbClr val="4A9EFF">
-              <a:alpha val="14000"/>
-            </a:srgbClr>
-          </a:solidFill>
-          <a:ln/>
-        </p:spPr>
-      </p:sp>
-      <p:sp>
-        <p:nvSpPr>
-          <p:cNvPr id="3" name="Shape 1"/>
-          <p:cNvSpPr/>
-          <p:nvPr/>
-        </p:nvSpPr>
-        <p:spPr>
-          <a:xfrm>
-            <a:off x="-1828800" y="4389120"/>
-            <a:ext cx="5029200" cy="5029200"/>
-          </a:xfrm>
-          <a:prstGeom prst="ellipse">
-            <a:avLst/>
-          </a:prstGeom>
-          <a:solidFill>
-            <a:srgbClr val="C9A961">
-              <a:alpha val="10000"/>
-            </a:srgbClr>
-          </a:solidFill>
-          <a:ln/>
-        </p:spPr>
-      </p:sp>
-      <p:sp>
-        <p:nvSpPr>
-          <p:cNvPr id="4" name="Text 2"/>
-          <p:cNvSpPr/>
-          <p:nvPr/>
-        </p:nvSpPr>
-        <p:spPr>
-          <a:xfrm>
-            <a:off x="640080" y="548640"/>
-            <a:ext cx="7315200" cy="365760"/>
+      <p:pic>
+        <p:nvPicPr>
+          <p:cNvPr id="2" name="Image 0" descr="preencoded.png">    </p:cNvPr>
+          <p:cNvPicPr>
+            <a:picLocks noChangeAspect="1"/>
+          </p:cNvPicPr>
+          <p:nvPr/>
+        </p:nvPicPr>
+        <p:blipFill>
+          <a:blip r:embed="rId1"/>
+          <a:stretch>
+            <a:fillRect/>
+          </a:stretch>
+        </p:blipFill>
+        <p:spPr>
+          <a:xfrm>
+            <a:off x="603504" y="457200"/>
+            <a:ext cx="1371600" cy="1415143"/>
+          </a:xfrm>
+          <a:prstGeom prst="rect">
+            <a:avLst/>
+          </a:prstGeom>
+        </p:spPr>
+      </p:pic>
+      <p:sp>
+        <p:nvSpPr>
+          <p:cNvPr id="3" name="Text 0"/>
+          <p:cNvSpPr/>
+          <p:nvPr/>
+        </p:nvSpPr>
+        <p:spPr>
+          <a:xfrm>
+            <a:off x="640080" y="2331720"/>
+            <a:ext cx="5486400" cy="457200"/>
           </a:xfrm>
           <a:prstGeom prst="rect">
             <a:avLst/>
@@ -2813,53 +2793,14 @@
               <a:buNone/>
             </a:pPr>
             <a:r>
-              <a:rPr lang="en-US" sz="1300" b="1" spc="500" kern="0" dirty="0">
-                <a:solidFill>
-                  <a:srgbClr val="9FB2C9"/>
+              <a:rPr lang="en-US" sz="1500" b="1" spc="600" kern="0" dirty="0">
+                <a:solidFill>
+                  <a:srgbClr val="B1937E"/>
                 </a:solidFill>
                 <a:latin typeface="Calibri" pitchFamily="34" charset="0"/>
                 <a:ea typeface="Calibri" pitchFamily="34" charset="-122"/>
                 <a:cs typeface="Calibri" pitchFamily="34" charset="-120"/>
               </a:rPr>
-              <a:t>MENTORIA · RL</a:t>
-            </a:r>
-            <a:endParaRPr lang="en-US" sz="1300" dirty="0"/>
-          </a:p>
-        </p:txBody>
-      </p:sp>
-      <p:sp>
-        <p:nvSpPr>
-          <p:cNvPr id="5" name="Text 3"/>
-          <p:cNvSpPr/>
-          <p:nvPr/>
-        </p:nvSpPr>
-        <p:spPr>
-          <a:xfrm>
-            <a:off x="640080" y="2331720"/>
-            <a:ext cx="5486400" cy="457200"/>
-          </a:xfrm>
-          <a:prstGeom prst="rect">
-            <a:avLst/>
-          </a:prstGeom>
-          <a:noFill/>
-          <a:ln/>
-        </p:spPr>
-        <p:txBody>
-          <a:bodyPr wrap="square" lIns="0" tIns="0" rIns="0" bIns="0" rtlCol="0" anchor="ctr"/>
-          <a:lstStyle/>
-          <a:p>
-            <a:pPr indent="0" marL="0">
-              <a:buNone/>
-            </a:pPr>
-            <a:r>
-              <a:rPr lang="en-US" sz="1500" b="1" spc="600" kern="0" dirty="0">
-                <a:solidFill>
-                  <a:srgbClr val="C9A961"/>
-                </a:solidFill>
-                <a:latin typeface="Calibri" pitchFamily="34" charset="0"/>
-                <a:ea typeface="Calibri" pitchFamily="34" charset="-122"/>
-                <a:cs typeface="Calibri" pitchFamily="34" charset="-120"/>
-              </a:rPr>
               <a:t>SESSÃO 01</a:t>
             </a:r>
             <a:endParaRPr lang="en-US" sz="1500" dirty="0"/>
@@ -2868,7 +2809,7 @@
       </p:sp>
       <p:sp>
         <p:nvSpPr>
-          <p:cNvPr id="6" name="Text 4"/>
+          <p:cNvPr id="4" name="Text 1"/>
           <p:cNvSpPr/>
           <p:nvPr/>
         </p:nvSpPr>
@@ -2894,17 +2835,17 @@
               <a:buNone/>
             </a:pPr>
             <a:r>
-              <a:rPr lang="en-US" sz="5200" b="1" dirty="0">
-                <a:solidFill>
-                  <a:srgbClr val="EAF1FA"/>
-                </a:solidFill>
-                <a:latin typeface="Bookman Old Style" pitchFamily="34" charset="0"/>
-                <a:ea typeface="Bookman Old Style" pitchFamily="34" charset="-122"/>
-                <a:cs typeface="Bookman Old Style" pitchFamily="34" charset="-120"/>
+              <a:rPr lang="en-US" sz="4400" b="1" dirty="0">
+                <a:solidFill>
+                  <a:srgbClr val="33302B"/>
+                </a:solidFill>
+                <a:latin typeface="Georgia" pitchFamily="34" charset="0"/>
+                <a:ea typeface="Georgia" pitchFamily="34" charset="-122"/>
+                <a:cs typeface="Georgia" pitchFamily="34" charset="-120"/>
               </a:rPr>
               <a:t>Posicionamento e a</a:t>
             </a:r>
-            <a:endParaRPr lang="en-US" sz="5200" dirty="0"/>
+            <a:endParaRPr lang="en-US" sz="4400" dirty="0"/>
           </a:p>
           <a:p>
             <a:pPr indent="0" marL="0">
@@ -2914,23 +2855,23 @@
               <a:buNone/>
             </a:pPr>
             <a:r>
-              <a:rPr lang="en-US" sz="5200" b="1" dirty="0">
-                <a:solidFill>
-                  <a:srgbClr val="EAF1FA"/>
-                </a:solidFill>
-                <a:latin typeface="Bookman Old Style" pitchFamily="34" charset="0"/>
-                <a:ea typeface="Bookman Old Style" pitchFamily="34" charset="-122"/>
-                <a:cs typeface="Bookman Old Style" pitchFamily="34" charset="-120"/>
+              <a:rPr lang="en-US" sz="4400" b="1" dirty="0">
+                <a:solidFill>
+                  <a:srgbClr val="33302B"/>
+                </a:solidFill>
+                <a:latin typeface="Georgia" pitchFamily="34" charset="0"/>
+                <a:ea typeface="Georgia" pitchFamily="34" charset="-122"/>
+                <a:cs typeface="Georgia" pitchFamily="34" charset="-120"/>
               </a:rPr>
               <a:t>Matemática dos 100K</a:t>
             </a:r>
-            <a:endParaRPr lang="en-US" sz="5200" dirty="0"/>
-          </a:p>
-        </p:txBody>
-      </p:sp>
-      <p:sp>
-        <p:nvSpPr>
-          <p:cNvPr id="7" name="Text 5"/>
+            <a:endParaRPr lang="en-US" sz="4400" dirty="0"/>
+          </a:p>
+        </p:txBody>
+      </p:sp>
+      <p:sp>
+        <p:nvSpPr>
+          <p:cNvPr id="5" name="Text 2"/>
           <p:cNvSpPr/>
           <p:nvPr/>
         </p:nvSpPr>
@@ -2955,7 +2896,7 @@
             <a:r>
               <a:rPr lang="en-US" sz="1700" dirty="0">
                 <a:solidFill>
-                  <a:srgbClr val="9FB2C9"/>
+                  <a:srgbClr val="8A7E72"/>
                 </a:solidFill>
                 <a:latin typeface="Calibri" pitchFamily="34" charset="0"/>
                 <a:ea typeface="Calibri" pitchFamily="34" charset="-122"/>
@@ -2969,7 +2910,7 @@
       </p:sp>
       <p:sp>
         <p:nvSpPr>
-          <p:cNvPr id="8" name="Text 6"/>
+          <p:cNvPr id="6" name="Text 3"/>
           <p:cNvSpPr/>
           <p:nvPr/>
         </p:nvSpPr>
@@ -2994,11 +2935,11 @@
             <a:r>
               <a:rPr lang="en-US" sz="15000" b="1" dirty="0">
                 <a:solidFill>
-                  <a:srgbClr val="16314F"/>
-                </a:solidFill>
-                <a:latin typeface="Bookman Old Style" pitchFamily="34" charset="0"/>
-                <a:ea typeface="Bookman Old Style" pitchFamily="34" charset="-122"/>
-                <a:cs typeface="Bookman Old Style" pitchFamily="34" charset="-120"/>
+                  <a:srgbClr val="EADFD0"/>
+                </a:solidFill>
+                <a:latin typeface="Georgia" pitchFamily="34" charset="0"/>
+                <a:ea typeface="Georgia" pitchFamily="34" charset="-122"/>
+                <a:cs typeface="Georgia" pitchFamily="34" charset="-120"/>
               </a:rPr>
               <a:t>100K</a:t>
             </a:r>
@@ -3008,7 +2949,7 @@
       </p:sp>
       <p:sp>
         <p:nvSpPr>
-          <p:cNvPr id="9" name="Shape 7"/>
+          <p:cNvPr id="7" name="Shape 4"/>
           <p:cNvSpPr/>
           <p:nvPr/>
         </p:nvSpPr>
@@ -3023,7 +2964,7 @@
           <a:noFill/>
           <a:ln w="31750">
             <a:solidFill>
-              <a:srgbClr val="C9A961"/>
+              <a:srgbClr val="B1937E"/>
             </a:solidFill>
             <a:prstDash val="solid"/>
           </a:ln>
@@ -3043,7 +2984,7 @@
     <p:bg>
       <p:bgPr>
         <a:solidFill>
-          <a:srgbClr val="0B1D33"/>
+          <a:srgbClr val="F8F6F3"/>
         </a:solidFill>
       </p:bgPr>
     </p:bg>
@@ -3063,51 +3004,7 @@
       </p:grpSpPr>
       <p:sp>
         <p:nvSpPr>
-          <p:cNvPr id="2" name="Shape 0"/>
-          <p:cNvSpPr/>
-          <p:nvPr/>
-        </p:nvSpPr>
-        <p:spPr>
-          <a:xfrm>
-            <a:off x="7772400" y="-1371600"/>
-            <a:ext cx="5486400" cy="5486400"/>
-          </a:xfrm>
-          <a:prstGeom prst="ellipse">
-            <a:avLst/>
-          </a:prstGeom>
-          <a:solidFill>
-            <a:srgbClr val="4A9EFF">
-              <a:alpha val="10000"/>
-            </a:srgbClr>
-          </a:solidFill>
-          <a:ln/>
-        </p:spPr>
-      </p:sp>
-      <p:sp>
-        <p:nvSpPr>
-          <p:cNvPr id="3" name="Shape 1"/>
-          <p:cNvSpPr/>
-          <p:nvPr/>
-        </p:nvSpPr>
-        <p:spPr>
-          <a:xfrm>
-            <a:off x="-1371600" y="4114800"/>
-            <a:ext cx="4572000" cy="4572000"/>
-          </a:xfrm>
-          <a:prstGeom prst="ellipse">
-            <a:avLst/>
-          </a:prstGeom>
-          <a:solidFill>
-            <a:srgbClr val="C9A961">
-              <a:alpha val="8000"/>
-            </a:srgbClr>
-          </a:solidFill>
-          <a:ln/>
-        </p:spPr>
-      </p:sp>
-      <p:sp>
-        <p:nvSpPr>
-          <p:cNvPr id="4" name="Text 2"/>
+          <p:cNvPr id="2" name="Text 0"/>
           <p:cNvSpPr/>
           <p:nvPr/>
         </p:nvSpPr>
@@ -3132,11 +3029,11 @@
             <a:r>
               <a:rPr lang="en-US" sz="15000" b="1" dirty="0">
                 <a:solidFill>
-                  <a:srgbClr val="16314F"/>
-                </a:solidFill>
-                <a:latin typeface="Bookman Old Style" pitchFamily="34" charset="0"/>
-                <a:ea typeface="Bookman Old Style" pitchFamily="34" charset="-122"/>
-                <a:cs typeface="Bookman Old Style" pitchFamily="34" charset="-120"/>
+                  <a:srgbClr val="EADFD0"/>
+                </a:solidFill>
+                <a:latin typeface="Georgia" pitchFamily="34" charset="0"/>
+                <a:ea typeface="Georgia" pitchFamily="34" charset="-122"/>
+                <a:cs typeface="Georgia" pitchFamily="34" charset="-120"/>
               </a:rPr>
               <a:t>B</a:t>
             </a:r>
@@ -3146,7 +3043,7 @@
       </p:sp>
       <p:sp>
         <p:nvSpPr>
-          <p:cNvPr id="5" name="Text 3"/>
+          <p:cNvPr id="3" name="Text 1"/>
           <p:cNvSpPr/>
           <p:nvPr/>
         </p:nvSpPr>
@@ -3171,7 +3068,7 @@
             <a:r>
               <a:rPr lang="en-US" sz="1300" b="1" spc="400" kern="0" dirty="0">
                 <a:solidFill>
-                  <a:srgbClr val="C9A961"/>
+                  <a:srgbClr val="B1937E"/>
                 </a:solidFill>
                 <a:latin typeface="Calibri" pitchFamily="34" charset="0"/>
                 <a:ea typeface="Calibri" pitchFamily="34" charset="-122"/>
@@ -3185,7 +3082,7 @@
       </p:sp>
       <p:sp>
         <p:nvSpPr>
-          <p:cNvPr id="6" name="Text 4"/>
+          <p:cNvPr id="4" name="Text 2"/>
           <p:cNvSpPr/>
           <p:nvPr/>
         </p:nvSpPr>
@@ -3208,23 +3105,23 @@
               <a:buNone/>
             </a:pPr>
             <a:r>
-              <a:rPr lang="en-US" sz="4600" b="1" dirty="0">
-                <a:solidFill>
-                  <a:srgbClr val="EAF1FA"/>
-                </a:solidFill>
-                <a:latin typeface="Bookman Old Style" pitchFamily="34" charset="0"/>
-                <a:ea typeface="Bookman Old Style" pitchFamily="34" charset="-122"/>
-                <a:cs typeface="Bookman Old Style" pitchFamily="34" charset="-120"/>
+              <a:rPr lang="en-US" sz="4000" b="1" dirty="0">
+                <a:solidFill>
+                  <a:srgbClr val="33302B"/>
+                </a:solidFill>
+                <a:latin typeface="Georgia" pitchFamily="34" charset="0"/>
+                <a:ea typeface="Georgia" pitchFamily="34" charset="-122"/>
+                <a:cs typeface="Georgia" pitchFamily="34" charset="-120"/>
               </a:rPr>
               <a:t>Posicionamento</a:t>
             </a:r>
-            <a:endParaRPr lang="en-US" sz="4600" dirty="0"/>
-          </a:p>
-        </p:txBody>
-      </p:sp>
-      <p:sp>
-        <p:nvSpPr>
-          <p:cNvPr id="7" name="Text 5"/>
+            <a:endParaRPr lang="en-US" sz="4000" dirty="0"/>
+          </a:p>
+        </p:txBody>
+      </p:sp>
+      <p:sp>
+        <p:nvSpPr>
+          <p:cNvPr id="5" name="Text 3"/>
           <p:cNvSpPr/>
           <p:nvPr/>
         </p:nvSpPr>
@@ -3249,7 +3146,7 @@
             <a:r>
               <a:rPr lang="en-US" sz="1600" dirty="0">
                 <a:solidFill>
-                  <a:srgbClr val="9FB2C9"/>
+                  <a:srgbClr val="8A7E72"/>
                 </a:solidFill>
                 <a:latin typeface="Calibri" pitchFamily="34" charset="0"/>
                 <a:ea typeface="Calibri" pitchFamily="34" charset="-122"/>
@@ -3263,7 +3160,7 @@
       </p:sp>
       <p:sp>
         <p:nvSpPr>
-          <p:cNvPr id="8" name="Shape 6"/>
+          <p:cNvPr id="6" name="Shape 4"/>
           <p:cNvSpPr/>
           <p:nvPr/>
         </p:nvSpPr>
@@ -3278,7 +3175,7 @@
           <a:noFill/>
           <a:ln w="9525">
             <a:solidFill>
-              <a:srgbClr val="5C708A">
+              <a:srgbClr val="A89A86">
                 <a:alpha val="60000"/>
               </a:srgbClr>
             </a:solidFill>
@@ -3288,7 +3185,7 @@
       </p:sp>
       <p:sp>
         <p:nvSpPr>
-          <p:cNvPr id="9" name="Text 7"/>
+          <p:cNvPr id="7" name="Text 5"/>
           <p:cNvSpPr/>
           <p:nvPr/>
         </p:nvSpPr>
@@ -3313,7 +3210,7 @@
             <a:r>
               <a:rPr lang="en-US" sz="900" dirty="0">
                 <a:solidFill>
-                  <a:srgbClr val="5C708A"/>
+                  <a:srgbClr val="A89A86"/>
                 </a:solidFill>
                 <a:latin typeface="Calibri" pitchFamily="34" charset="0"/>
                 <a:ea typeface="Calibri" pitchFamily="34" charset="-122"/>
@@ -3327,7 +3224,7 @@
       </p:sp>
       <p:sp>
         <p:nvSpPr>
-          <p:cNvPr id="10" name="Text 8"/>
+          <p:cNvPr id="8" name="Text 6"/>
           <p:cNvSpPr/>
           <p:nvPr/>
         </p:nvSpPr>
@@ -3352,7 +3249,7 @@
             <a:r>
               <a:rPr lang="en-US" sz="900" dirty="0">
                 <a:solidFill>
-                  <a:srgbClr val="5C708A"/>
+                  <a:srgbClr val="A89A86"/>
                 </a:solidFill>
                 <a:latin typeface="Calibri" pitchFamily="34" charset="0"/>
                 <a:ea typeface="Calibri" pitchFamily="34" charset="-122"/>
@@ -3378,7 +3275,7 @@
     <p:bg>
       <p:bgPr>
         <a:solidFill>
-          <a:srgbClr val="0B1D33"/>
+          <a:srgbClr val="F8F6F3"/>
         </a:solidFill>
       </p:bgPr>
     </p:bg>
@@ -3423,7 +3320,7 @@
             <a:r>
               <a:rPr lang="en-US" sz="1200" b="1" spc="300" kern="0" dirty="0">
                 <a:solidFill>
-                  <a:srgbClr val="4A9EFF"/>
+                  <a:srgbClr val="9A7B66"/>
                 </a:solidFill>
                 <a:latin typeface="Calibri" pitchFamily="34" charset="0"/>
                 <a:ea typeface="Calibri" pitchFamily="34" charset="-122"/>
@@ -3465,11 +3362,11 @@
             <a:r>
               <a:rPr lang="en-US" sz="3400" b="1" dirty="0">
                 <a:solidFill>
-                  <a:srgbClr val="EAF1FA"/>
-                </a:solidFill>
-                <a:latin typeface="Bookman Old Style" pitchFamily="34" charset="0"/>
-                <a:ea typeface="Bookman Old Style" pitchFamily="34" charset="-122"/>
-                <a:cs typeface="Bookman Old Style" pitchFamily="34" charset="-120"/>
+                  <a:srgbClr val="33302B"/>
+                </a:solidFill>
+                <a:latin typeface="Georgia" pitchFamily="34" charset="0"/>
+                <a:ea typeface="Georgia" pitchFamily="34" charset="-122"/>
+                <a:cs typeface="Georgia" pitchFamily="34" charset="-120"/>
               </a:rPr>
               <a:t>Um posicionamento para todos</a:t>
             </a:r>
@@ -3485,11 +3382,11 @@
             <a:r>
               <a:rPr lang="en-US" sz="3400" b="1" dirty="0">
                 <a:solidFill>
-                  <a:srgbClr val="EAF1FA"/>
-                </a:solidFill>
-                <a:latin typeface="Bookman Old Style" pitchFamily="34" charset="0"/>
-                <a:ea typeface="Bookman Old Style" pitchFamily="34" charset="-122"/>
-                <a:cs typeface="Bookman Old Style" pitchFamily="34" charset="-120"/>
+                  <a:srgbClr val="33302B"/>
+                </a:solidFill>
+                <a:latin typeface="Georgia" pitchFamily="34" charset="0"/>
+                <a:ea typeface="Georgia" pitchFamily="34" charset="-122"/>
+                <a:cs typeface="Georgia" pitchFamily="34" charset="-120"/>
               </a:rPr>
               <a:t>é um posicionamento para ninguém</a:t>
             </a:r>
@@ -3514,13 +3411,18 @@
             </a:avLst>
           </a:prstGeom>
           <a:solidFill>
-            <a:srgbClr val="13283F"/>
+            <a:srgbClr val="FFFFFF"/>
           </a:solidFill>
-          <a:ln/>
+          <a:ln w="12700">
+            <a:solidFill>
+              <a:srgbClr val="E3D9CC"/>
+            </a:solidFill>
+            <a:prstDash val="solid"/>
+          </a:ln>
           <a:effectLst>
-            <a:outerShdw sx="100000" sy="100000" kx="0" ky="0" algn="bl" rotWithShape="0" blurRad="127000" dist="38100" dir="5400000">
-              <a:srgbClr val="000000">
-                <a:alpha val="28000"/>
+            <a:outerShdw sx="100000" sy="100000" kx="0" ky="0" algn="bl" rotWithShape="0" blurRad="114300" dist="38100" dir="5400000">
+              <a:srgbClr val="7A6A55">
+                <a:alpha val="12000"/>
               </a:srgbClr>
             </a:outerShdw>
           </a:effectLst>
@@ -3541,9 +3443,14 @@
             <a:avLst/>
           </a:prstGeom>
           <a:solidFill>
-            <a:srgbClr val="16314F"/>
+            <a:srgbClr val="EADFD0"/>
           </a:solidFill>
-          <a:ln/>
+          <a:ln w="9525">
+            <a:solidFill>
+              <a:srgbClr val="E3D9CC"/>
+            </a:solidFill>
+            <a:prstDash val="solid"/>
+          </a:ln>
         </p:spPr>
       </p:sp>
       <p:pic>
@@ -3597,11 +3504,11 @@
             <a:r>
               <a:rPr lang="en-US" sz="2100" b="1" dirty="0">
                 <a:solidFill>
-                  <a:srgbClr val="9FB2C9"/>
-                </a:solidFill>
-                <a:latin typeface="Bookman Old Style" pitchFamily="34" charset="0"/>
-                <a:ea typeface="Bookman Old Style" pitchFamily="34" charset="-122"/>
-                <a:cs typeface="Bookman Old Style" pitchFamily="34" charset="-120"/>
+                  <a:srgbClr val="8A7E72"/>
+                </a:solidFill>
+                <a:latin typeface="Georgia" pitchFamily="34" charset="0"/>
+                <a:ea typeface="Georgia" pitchFamily="34" charset="-122"/>
+                <a:cs typeface="Georgia" pitchFamily="34" charset="-120"/>
               </a:rPr>
               <a:t>“Fotografo casamentos”</a:t>
             </a:r>
@@ -3636,7 +3543,7 @@
             <a:r>
               <a:rPr lang="en-US" sz="1500" dirty="0">
                 <a:solidFill>
-                  <a:srgbClr val="9FB2C9"/>
+                  <a:srgbClr val="8A7E72"/>
                 </a:solidFill>
                 <a:latin typeface="Calibri" pitchFamily="34" charset="0"/>
                 <a:ea typeface="Calibri" pitchFamily="34" charset="-122"/>
@@ -3665,18 +3572,18 @@
             </a:avLst>
           </a:prstGeom>
           <a:solidFill>
-            <a:srgbClr val="16314F"/>
+            <a:srgbClr val="EADFD0"/>
           </a:solidFill>
           <a:ln w="19050">
             <a:solidFill>
-              <a:srgbClr val="C9A961"/>
+              <a:srgbClr val="B1937E"/>
             </a:solidFill>
             <a:prstDash val="solid"/>
           </a:ln>
           <a:effectLst>
-            <a:outerShdw sx="100000" sy="100000" kx="0" ky="0" algn="bl" rotWithShape="0" blurRad="127000" dist="38100" dir="5400000">
-              <a:srgbClr val="000000">
-                <a:alpha val="28000"/>
+            <a:outerShdw sx="100000" sy="100000" kx="0" ky="0" algn="bl" rotWithShape="0" blurRad="114300" dist="38100" dir="5400000">
+              <a:srgbClr val="7A6A55">
+                <a:alpha val="12000"/>
               </a:srgbClr>
             </a:outerShdw>
           </a:effectLst>
@@ -3697,9 +3604,14 @@
             <a:avLst/>
           </a:prstGeom>
           <a:solidFill>
-            <a:srgbClr val="102844"/>
+            <a:srgbClr val="EFE7DE"/>
           </a:solidFill>
-          <a:ln/>
+          <a:ln w="9525">
+            <a:solidFill>
+              <a:srgbClr val="E3D9CC"/>
+            </a:solidFill>
+            <a:prstDash val="solid"/>
+          </a:ln>
         </p:spPr>
       </p:sp>
       <p:pic>
@@ -3756,11 +3668,11 @@
             <a:r>
               <a:rPr lang="en-US" sz="2100" b="1" dirty="0">
                 <a:solidFill>
-                  <a:srgbClr val="C9A961"/>
-                </a:solidFill>
-                <a:latin typeface="Bookman Old Style" pitchFamily="34" charset="0"/>
-                <a:ea typeface="Bookman Old Style" pitchFamily="34" charset="-122"/>
-                <a:cs typeface="Bookman Old Style" pitchFamily="34" charset="-120"/>
+                  <a:srgbClr val="B1937E"/>
+                </a:solidFill>
+                <a:latin typeface="Georgia" pitchFamily="34" charset="0"/>
+                <a:ea typeface="Georgia" pitchFamily="34" charset="-122"/>
+                <a:cs typeface="Georgia" pitchFamily="34" charset="-120"/>
               </a:rPr>
               <a:t>“Capturo casamentos</a:t>
             </a:r>
@@ -3776,11 +3688,11 @@
             <a:r>
               <a:rPr lang="en-US" sz="2100" b="1" dirty="0">
                 <a:solidFill>
-                  <a:srgbClr val="C9A961"/>
-                </a:solidFill>
-                <a:latin typeface="Bookman Old Style" pitchFamily="34" charset="0"/>
-                <a:ea typeface="Bookman Old Style" pitchFamily="34" charset="-122"/>
-                <a:cs typeface="Bookman Old Style" pitchFamily="34" charset="-120"/>
+                  <a:srgbClr val="B1937E"/>
+                </a:solidFill>
+                <a:latin typeface="Georgia" pitchFamily="34" charset="0"/>
+                <a:ea typeface="Georgia" pitchFamily="34" charset="-122"/>
+                <a:cs typeface="Georgia" pitchFamily="34" charset="-120"/>
               </a:rPr>
               <a:t>autênticos e sem poses”</a:t>
             </a:r>
@@ -3815,7 +3727,7 @@
             <a:r>
               <a:rPr lang="en-US" sz="1500" dirty="0">
                 <a:solidFill>
-                  <a:srgbClr val="EAF1FA"/>
+                  <a:srgbClr val="33302B"/>
                 </a:solidFill>
                 <a:latin typeface="Calibri" pitchFamily="34" charset="0"/>
                 <a:ea typeface="Calibri" pitchFamily="34" charset="-122"/>
@@ -3844,7 +3756,7 @@
           <a:noFill/>
           <a:ln w="9525">
             <a:solidFill>
-              <a:srgbClr val="5C708A">
+              <a:srgbClr val="A89A86">
                 <a:alpha val="60000"/>
               </a:srgbClr>
             </a:solidFill>
@@ -3879,7 +3791,7 @@
             <a:r>
               <a:rPr lang="en-US" sz="900" dirty="0">
                 <a:solidFill>
-                  <a:srgbClr val="5C708A"/>
+                  <a:srgbClr val="A89A86"/>
                 </a:solidFill>
                 <a:latin typeface="Calibri" pitchFamily="34" charset="0"/>
                 <a:ea typeface="Calibri" pitchFamily="34" charset="-122"/>
@@ -3918,7 +3830,7 @@
             <a:r>
               <a:rPr lang="en-US" sz="900" dirty="0">
                 <a:solidFill>
-                  <a:srgbClr val="5C708A"/>
+                  <a:srgbClr val="A89A86"/>
                 </a:solidFill>
                 <a:latin typeface="Calibri" pitchFamily="34" charset="0"/>
                 <a:ea typeface="Calibri" pitchFamily="34" charset="-122"/>
@@ -3944,7 +3856,7 @@
     <p:bg>
       <p:bgPr>
         <a:solidFill>
-          <a:srgbClr val="0B1D33"/>
+          <a:srgbClr val="F8F6F3"/>
         </a:solidFill>
       </p:bgPr>
     </p:bg>
@@ -3989,7 +3901,7 @@
             <a:r>
               <a:rPr lang="en-US" sz="1200" b="1" spc="300" kern="0" dirty="0">
                 <a:solidFill>
-                  <a:srgbClr val="4A9EFF"/>
+                  <a:srgbClr val="9A7B66"/>
                 </a:solidFill>
                 <a:latin typeface="Calibri" pitchFamily="34" charset="0"/>
                 <a:ea typeface="Calibri" pitchFamily="34" charset="-122"/>
@@ -4028,11 +3940,11 @@
             <a:r>
               <a:rPr lang="en-US" sz="3400" b="1" dirty="0">
                 <a:solidFill>
-                  <a:srgbClr val="EAF1FA"/>
-                </a:solidFill>
-                <a:latin typeface="Bookman Old Style" pitchFamily="34" charset="0"/>
-                <a:ea typeface="Bookman Old Style" pitchFamily="34" charset="-122"/>
-                <a:cs typeface="Bookman Old Style" pitchFamily="34" charset="-120"/>
+                  <a:srgbClr val="33302B"/>
+                </a:solidFill>
+                <a:latin typeface="Georgia" pitchFamily="34" charset="0"/>
+                <a:ea typeface="Georgia" pitchFamily="34" charset="-122"/>
+                <a:cs typeface="Georgia" pitchFamily="34" charset="-120"/>
               </a:rPr>
               <a:t>Definir o casal ideal</a:t>
             </a:r>
@@ -4067,7 +3979,7 @@
             <a:r>
               <a:rPr lang="en-US" sz="1600" dirty="0">
                 <a:solidFill>
-                  <a:srgbClr val="9FB2C9"/>
+                  <a:srgbClr val="8A7E72"/>
                 </a:solidFill>
                 <a:latin typeface="Calibri" pitchFamily="34" charset="0"/>
                 <a:ea typeface="Calibri" pitchFamily="34" charset="-122"/>
@@ -4096,13 +4008,18 @@
             </a:avLst>
           </a:prstGeom>
           <a:solidFill>
-            <a:srgbClr val="13283F"/>
+            <a:srgbClr val="FFFFFF"/>
           </a:solidFill>
-          <a:ln/>
+          <a:ln w="12700">
+            <a:solidFill>
+              <a:srgbClr val="E3D9CC"/>
+            </a:solidFill>
+            <a:prstDash val="solid"/>
+          </a:ln>
           <a:effectLst>
-            <a:outerShdw sx="100000" sy="100000" kx="0" ky="0" algn="bl" rotWithShape="0" blurRad="127000" dist="38100" dir="5400000">
-              <a:srgbClr val="000000">
-                <a:alpha val="28000"/>
+            <a:outerShdw sx="100000" sy="100000" kx="0" ky="0" algn="bl" rotWithShape="0" blurRad="114300" dist="38100" dir="5400000">
+              <a:srgbClr val="7A6A55">
+                <a:alpha val="12000"/>
               </a:srgbClr>
             </a:outerShdw>
           </a:effectLst>
@@ -4123,9 +4040,14 @@
             <a:avLst/>
           </a:prstGeom>
           <a:solidFill>
-            <a:srgbClr val="16314F"/>
+            <a:srgbClr val="EADFD0"/>
           </a:solidFill>
-          <a:ln/>
+          <a:ln w="9525">
+            <a:solidFill>
+              <a:srgbClr val="E3D9CC"/>
+            </a:solidFill>
+            <a:prstDash val="solid"/>
+          </a:ln>
         </p:spPr>
       </p:sp>
       <p:pic>
@@ -4179,11 +4101,11 @@
             <a:r>
               <a:rPr lang="en-US" sz="1900" b="1" dirty="0">
                 <a:solidFill>
-                  <a:srgbClr val="C9A961"/>
-                </a:solidFill>
-                <a:latin typeface="Bookman Old Style" pitchFamily="34" charset="0"/>
-                <a:ea typeface="Bookman Old Style" pitchFamily="34" charset="-122"/>
-                <a:cs typeface="Bookman Old Style" pitchFamily="34" charset="-120"/>
+                  <a:srgbClr val="B1937E"/>
+                </a:solidFill>
+                <a:latin typeface="Georgia" pitchFamily="34" charset="0"/>
+                <a:ea typeface="Georgia" pitchFamily="34" charset="-122"/>
+                <a:cs typeface="Georgia" pitchFamily="34" charset="-120"/>
               </a:rPr>
               <a:t>Quem são?</a:t>
             </a:r>
@@ -4218,7 +4140,7 @@
             <a:r>
               <a:rPr lang="en-US" sz="1400" dirty="0">
                 <a:solidFill>
-                  <a:srgbClr val="9FB2C9"/>
+                  <a:srgbClr val="8A7E72"/>
                 </a:solidFill>
                 <a:latin typeface="Calibri" pitchFamily="34" charset="0"/>
                 <a:ea typeface="Calibri" pitchFamily="34" charset="-122"/>
@@ -4247,13 +4169,18 @@
             </a:avLst>
           </a:prstGeom>
           <a:solidFill>
-            <a:srgbClr val="13283F"/>
+            <a:srgbClr val="FFFFFF"/>
           </a:solidFill>
-          <a:ln/>
+          <a:ln w="12700">
+            <a:solidFill>
+              <a:srgbClr val="E3D9CC"/>
+            </a:solidFill>
+            <a:prstDash val="solid"/>
+          </a:ln>
           <a:effectLst>
-            <a:outerShdw sx="100000" sy="100000" kx="0" ky="0" algn="bl" rotWithShape="0" blurRad="127000" dist="38100" dir="5400000">
-              <a:srgbClr val="000000">
-                <a:alpha val="28000"/>
+            <a:outerShdw sx="100000" sy="100000" kx="0" ky="0" algn="bl" rotWithShape="0" blurRad="114300" dist="38100" dir="5400000">
+              <a:srgbClr val="7A6A55">
+                <a:alpha val="12000"/>
               </a:srgbClr>
             </a:outerShdw>
           </a:effectLst>
@@ -4274,9 +4201,14 @@
             <a:avLst/>
           </a:prstGeom>
           <a:solidFill>
-            <a:srgbClr val="16314F"/>
+            <a:srgbClr val="EADFD0"/>
           </a:solidFill>
-          <a:ln/>
+          <a:ln w="9525">
+            <a:solidFill>
+              <a:srgbClr val="E3D9CC"/>
+            </a:solidFill>
+            <a:prstDash val="solid"/>
+          </a:ln>
         </p:spPr>
       </p:sp>
       <p:pic>
@@ -4330,11 +4262,11 @@
             <a:r>
               <a:rPr lang="en-US" sz="1900" b="1" dirty="0">
                 <a:solidFill>
-                  <a:srgbClr val="C9A961"/>
-                </a:solidFill>
-                <a:latin typeface="Bookman Old Style" pitchFamily="34" charset="0"/>
-                <a:ea typeface="Bookman Old Style" pitchFamily="34" charset="-122"/>
-                <a:cs typeface="Bookman Old Style" pitchFamily="34" charset="-120"/>
+                  <a:srgbClr val="B1937E"/>
+                </a:solidFill>
+                <a:latin typeface="Georgia" pitchFamily="34" charset="0"/>
+                <a:ea typeface="Georgia" pitchFamily="34" charset="-122"/>
+                <a:cs typeface="Georgia" pitchFamily="34" charset="-120"/>
               </a:rPr>
               <a:t>O que valorizam?</a:t>
             </a:r>
@@ -4369,7 +4301,7 @@
             <a:r>
               <a:rPr lang="en-US" sz="1400" dirty="0">
                 <a:solidFill>
-                  <a:srgbClr val="9FB2C9"/>
+                  <a:srgbClr val="8A7E72"/>
                 </a:solidFill>
                 <a:latin typeface="Calibri" pitchFamily="34" charset="0"/>
                 <a:ea typeface="Calibri" pitchFamily="34" charset="-122"/>
@@ -4398,13 +4330,18 @@
             </a:avLst>
           </a:prstGeom>
           <a:solidFill>
-            <a:srgbClr val="13283F"/>
+            <a:srgbClr val="FFFFFF"/>
           </a:solidFill>
-          <a:ln/>
+          <a:ln w="12700">
+            <a:solidFill>
+              <a:srgbClr val="E3D9CC"/>
+            </a:solidFill>
+            <a:prstDash val="solid"/>
+          </a:ln>
           <a:effectLst>
-            <a:outerShdw sx="100000" sy="100000" kx="0" ky="0" algn="bl" rotWithShape="0" blurRad="127000" dist="38100" dir="5400000">
-              <a:srgbClr val="000000">
-                <a:alpha val="28000"/>
+            <a:outerShdw sx="100000" sy="100000" kx="0" ky="0" algn="bl" rotWithShape="0" blurRad="114300" dist="38100" dir="5400000">
+              <a:srgbClr val="7A6A55">
+                <a:alpha val="12000"/>
               </a:srgbClr>
             </a:outerShdw>
           </a:effectLst>
@@ -4425,9 +4362,14 @@
             <a:avLst/>
           </a:prstGeom>
           <a:solidFill>
-            <a:srgbClr val="16314F"/>
+            <a:srgbClr val="EADFD0"/>
           </a:solidFill>
-          <a:ln/>
+          <a:ln w="9525">
+            <a:solidFill>
+              <a:srgbClr val="E3D9CC"/>
+            </a:solidFill>
+            <a:prstDash val="solid"/>
+          </a:ln>
         </p:spPr>
       </p:sp>
       <p:pic>
@@ -4481,11 +4423,11 @@
             <a:r>
               <a:rPr lang="en-US" sz="1900" b="1" dirty="0">
                 <a:solidFill>
-                  <a:srgbClr val="C9A961"/>
-                </a:solidFill>
-                <a:latin typeface="Bookman Old Style" pitchFamily="34" charset="0"/>
-                <a:ea typeface="Bookman Old Style" pitchFamily="34" charset="-122"/>
-                <a:cs typeface="Bookman Old Style" pitchFamily="34" charset="-120"/>
+                  <a:srgbClr val="B1937E"/>
+                </a:solidFill>
+                <a:latin typeface="Georgia" pitchFamily="34" charset="0"/>
+                <a:ea typeface="Georgia" pitchFamily="34" charset="-122"/>
+                <a:cs typeface="Georgia" pitchFamily="34" charset="-120"/>
               </a:rPr>
               <a:t>O que os assusta?</a:t>
             </a:r>
@@ -4520,7 +4462,7 @@
             <a:r>
               <a:rPr lang="en-US" sz="1400" dirty="0">
                 <a:solidFill>
-                  <a:srgbClr val="9FB2C9"/>
+                  <a:srgbClr val="8A7E72"/>
                 </a:solidFill>
                 <a:latin typeface="Calibri" pitchFamily="34" charset="0"/>
                 <a:ea typeface="Calibri" pitchFamily="34" charset="-122"/>
@@ -4549,13 +4491,18 @@
             </a:avLst>
           </a:prstGeom>
           <a:solidFill>
-            <a:srgbClr val="13283F"/>
+            <a:srgbClr val="FFFFFF"/>
           </a:solidFill>
-          <a:ln/>
+          <a:ln w="12700">
+            <a:solidFill>
+              <a:srgbClr val="E3D9CC"/>
+            </a:solidFill>
+            <a:prstDash val="solid"/>
+          </a:ln>
           <a:effectLst>
-            <a:outerShdw sx="100000" sy="100000" kx="0" ky="0" algn="bl" rotWithShape="0" blurRad="127000" dist="38100" dir="5400000">
-              <a:srgbClr val="000000">
-                <a:alpha val="28000"/>
+            <a:outerShdw sx="100000" sy="100000" kx="0" ky="0" algn="bl" rotWithShape="0" blurRad="114300" dist="38100" dir="5400000">
+              <a:srgbClr val="7A6A55">
+                <a:alpha val="12000"/>
               </a:srgbClr>
             </a:outerShdw>
           </a:effectLst>
@@ -4576,9 +4523,14 @@
             <a:avLst/>
           </a:prstGeom>
           <a:solidFill>
-            <a:srgbClr val="16314F"/>
+            <a:srgbClr val="EADFD0"/>
           </a:solidFill>
-          <a:ln/>
+          <a:ln w="9525">
+            <a:solidFill>
+              <a:srgbClr val="E3D9CC"/>
+            </a:solidFill>
+            <a:prstDash val="solid"/>
+          </a:ln>
         </p:spPr>
       </p:sp>
       <p:pic>
@@ -4632,11 +4584,11 @@
             <a:r>
               <a:rPr lang="en-US" sz="1900" b="1" dirty="0">
                 <a:solidFill>
-                  <a:srgbClr val="C9A961"/>
-                </a:solidFill>
-                <a:latin typeface="Bookman Old Style" pitchFamily="34" charset="0"/>
-                <a:ea typeface="Bookman Old Style" pitchFamily="34" charset="-122"/>
-                <a:cs typeface="Bookman Old Style" pitchFamily="34" charset="-120"/>
+                  <a:srgbClr val="B1937E"/>
+                </a:solidFill>
+                <a:latin typeface="Georgia" pitchFamily="34" charset="0"/>
+                <a:ea typeface="Georgia" pitchFamily="34" charset="-122"/>
+                <a:cs typeface="Georgia" pitchFamily="34" charset="-120"/>
               </a:rPr>
               <a:t>O que procuram em ti?</a:t>
             </a:r>
@@ -4671,7 +4623,7 @@
             <a:r>
               <a:rPr lang="en-US" sz="1400" dirty="0">
                 <a:solidFill>
-                  <a:srgbClr val="9FB2C9"/>
+                  <a:srgbClr val="8A7E72"/>
                 </a:solidFill>
                 <a:latin typeface="Calibri" pitchFamily="34" charset="0"/>
                 <a:ea typeface="Calibri" pitchFamily="34" charset="-122"/>
@@ -4700,7 +4652,7 @@
           <a:noFill/>
           <a:ln w="9525">
             <a:solidFill>
-              <a:srgbClr val="5C708A">
+              <a:srgbClr val="A89A86">
                 <a:alpha val="60000"/>
               </a:srgbClr>
             </a:solidFill>
@@ -4735,7 +4687,7 @@
             <a:r>
               <a:rPr lang="en-US" sz="900" dirty="0">
                 <a:solidFill>
-                  <a:srgbClr val="5C708A"/>
+                  <a:srgbClr val="A89A86"/>
                 </a:solidFill>
                 <a:latin typeface="Calibri" pitchFamily="34" charset="0"/>
                 <a:ea typeface="Calibri" pitchFamily="34" charset="-122"/>
@@ -4774,7 +4726,7 @@
             <a:r>
               <a:rPr lang="en-US" sz="900" dirty="0">
                 <a:solidFill>
-                  <a:srgbClr val="5C708A"/>
+                  <a:srgbClr val="A89A86"/>
                 </a:solidFill>
                 <a:latin typeface="Calibri" pitchFamily="34" charset="0"/>
                 <a:ea typeface="Calibri" pitchFamily="34" charset="-122"/>
@@ -4800,7 +4752,7 @@
     <p:bg>
       <p:bgPr>
         <a:solidFill>
-          <a:srgbClr val="102844"/>
+          <a:srgbClr val="EFE7DE"/>
         </a:solidFill>
       </p:bgPr>
     </p:bg>
@@ -4845,7 +4797,7 @@
             <a:r>
               <a:rPr lang="en-US" sz="1200" b="1" spc="300" kern="0" dirty="0">
                 <a:solidFill>
-                  <a:srgbClr val="C9A961"/>
+                  <a:srgbClr val="B1937E"/>
                 </a:solidFill>
                 <a:latin typeface="Calibri" pitchFamily="34" charset="0"/>
                 <a:ea typeface="Calibri" pitchFamily="34" charset="-122"/>
@@ -4884,11 +4836,11 @@
             <a:r>
               <a:rPr lang="en-US" sz="3400" b="1" dirty="0">
                 <a:solidFill>
-                  <a:srgbClr val="EAF1FA"/>
-                </a:solidFill>
-                <a:latin typeface="Bookman Old Style" pitchFamily="34" charset="0"/>
-                <a:ea typeface="Bookman Old Style" pitchFamily="34" charset="-122"/>
-                <a:cs typeface="Bookman Old Style" pitchFamily="34" charset="-120"/>
+                  <a:srgbClr val="33302B"/>
+                </a:solidFill>
+                <a:latin typeface="Georgia" pitchFamily="34" charset="0"/>
+                <a:ea typeface="Georgia" pitchFamily="34" charset="-122"/>
+                <a:cs typeface="Georgia" pitchFamily="34" charset="-120"/>
               </a:rPr>
               <a:t>A Sofia &amp; o Miguel</a:t>
             </a:r>
@@ -4913,13 +4865,18 @@
             </a:avLst>
           </a:prstGeom>
           <a:solidFill>
-            <a:srgbClr val="13283F"/>
+            <a:srgbClr val="FFFFFF"/>
           </a:solidFill>
-          <a:ln/>
+          <a:ln w="12700">
+            <a:solidFill>
+              <a:srgbClr val="E3D9CC"/>
+            </a:solidFill>
+            <a:prstDash val="solid"/>
+          </a:ln>
           <a:effectLst>
-            <a:outerShdw sx="100000" sy="100000" kx="0" ky="0" algn="bl" rotWithShape="0" blurRad="127000" dist="38100" dir="5400000">
-              <a:srgbClr val="000000">
-                <a:alpha val="28000"/>
+            <a:outerShdw sx="100000" sy="100000" kx="0" ky="0" algn="bl" rotWithShape="0" blurRad="114300" dist="38100" dir="5400000">
+              <a:srgbClr val="7A6A55">
+                <a:alpha val="12000"/>
               </a:srgbClr>
             </a:outerShdw>
           </a:effectLst>
@@ -4940,9 +4897,14 @@
             <a:avLst/>
           </a:prstGeom>
           <a:solidFill>
-            <a:srgbClr val="16314F"/>
+            <a:srgbClr val="EADFD0"/>
           </a:solidFill>
-          <a:ln/>
+          <a:ln w="9525">
+            <a:solidFill>
+              <a:srgbClr val="E3D9CC"/>
+            </a:solidFill>
+            <a:prstDash val="solid"/>
+          </a:ln>
         </p:spPr>
       </p:sp>
       <p:pic>
@@ -4996,7 +4958,7 @@
             <a:r>
               <a:rPr lang="en-US" sz="1200" b="1" spc="200" kern="0" dirty="0">
                 <a:solidFill>
-                  <a:srgbClr val="C9A961"/>
+                  <a:srgbClr val="B1937E"/>
                 </a:solidFill>
                 <a:latin typeface="Calibri" pitchFamily="34" charset="0"/>
                 <a:ea typeface="Calibri" pitchFamily="34" charset="-122"/>
@@ -5035,7 +4997,7 @@
             <a:r>
               <a:rPr lang="en-US" sz="1400" dirty="0">
                 <a:solidFill>
-                  <a:srgbClr val="EAF1FA"/>
+                  <a:srgbClr val="33302B"/>
                 </a:solidFill>
                 <a:latin typeface="Calibri" pitchFamily="34" charset="0"/>
                 <a:ea typeface="Calibri" pitchFamily="34" charset="-122"/>
@@ -5074,7 +5036,7 @@
             <a:r>
               <a:rPr lang="en-US" sz="1200" b="1" spc="200" kern="0" dirty="0">
                 <a:solidFill>
-                  <a:srgbClr val="C9A961"/>
+                  <a:srgbClr val="B1937E"/>
                 </a:solidFill>
                 <a:latin typeface="Calibri" pitchFamily="34" charset="0"/>
                 <a:ea typeface="Calibri" pitchFamily="34" charset="-122"/>
@@ -5113,7 +5075,7 @@
             <a:r>
               <a:rPr lang="en-US" sz="1400" dirty="0">
                 <a:solidFill>
-                  <a:srgbClr val="EAF1FA"/>
+                  <a:srgbClr val="33302B"/>
                 </a:solidFill>
                 <a:latin typeface="Calibri" pitchFamily="34" charset="0"/>
                 <a:ea typeface="Calibri" pitchFamily="34" charset="-122"/>
@@ -5152,7 +5114,7 @@
             <a:r>
               <a:rPr lang="en-US" sz="1200" b="1" spc="200" kern="0" dirty="0">
                 <a:solidFill>
-                  <a:srgbClr val="C9A961"/>
+                  <a:srgbClr val="B1937E"/>
                 </a:solidFill>
                 <a:latin typeface="Calibri" pitchFamily="34" charset="0"/>
                 <a:ea typeface="Calibri" pitchFamily="34" charset="-122"/>
@@ -5191,7 +5153,7 @@
             <a:r>
               <a:rPr lang="en-US" sz="1400" dirty="0">
                 <a:solidFill>
-                  <a:srgbClr val="EAF1FA"/>
+                  <a:srgbClr val="33302B"/>
                 </a:solidFill>
                 <a:latin typeface="Calibri" pitchFamily="34" charset="0"/>
                 <a:ea typeface="Calibri" pitchFamily="34" charset="-122"/>
@@ -5230,7 +5192,7 @@
             <a:r>
               <a:rPr lang="en-US" sz="1200" b="1" spc="200" kern="0" dirty="0">
                 <a:solidFill>
-                  <a:srgbClr val="C9A961"/>
+                  <a:srgbClr val="B1937E"/>
                 </a:solidFill>
                 <a:latin typeface="Calibri" pitchFamily="34" charset="0"/>
                 <a:ea typeface="Calibri" pitchFamily="34" charset="-122"/>
@@ -5269,7 +5231,7 @@
             <a:r>
               <a:rPr lang="en-US" sz="1400" dirty="0">
                 <a:solidFill>
-                  <a:srgbClr val="EAF1FA"/>
+                  <a:srgbClr val="33302B"/>
                 </a:solidFill>
                 <a:latin typeface="Calibri" pitchFamily="34" charset="0"/>
                 <a:ea typeface="Calibri" pitchFamily="34" charset="-122"/>
@@ -5298,7 +5260,7 @@
           <a:noFill/>
           <a:ln w="9525">
             <a:solidFill>
-              <a:srgbClr val="5C708A">
+              <a:srgbClr val="A89A86">
                 <a:alpha val="60000"/>
               </a:srgbClr>
             </a:solidFill>
@@ -5333,7 +5295,7 @@
             <a:r>
               <a:rPr lang="en-US" sz="900" dirty="0">
                 <a:solidFill>
-                  <a:srgbClr val="5C708A"/>
+                  <a:srgbClr val="A89A86"/>
                 </a:solidFill>
                 <a:latin typeface="Calibri" pitchFamily="34" charset="0"/>
                 <a:ea typeface="Calibri" pitchFamily="34" charset="-122"/>
@@ -5372,7 +5334,7 @@
             <a:r>
               <a:rPr lang="en-US" sz="900" dirty="0">
                 <a:solidFill>
-                  <a:srgbClr val="5C708A"/>
+                  <a:srgbClr val="A89A86"/>
                 </a:solidFill>
                 <a:latin typeface="Calibri" pitchFamily="34" charset="0"/>
                 <a:ea typeface="Calibri" pitchFamily="34" charset="-122"/>
@@ -5398,7 +5360,7 @@
     <p:bg>
       <p:bgPr>
         <a:solidFill>
-          <a:srgbClr val="0B1D33"/>
+          <a:srgbClr val="F8F6F3"/>
         </a:solidFill>
       </p:bgPr>
     </p:bg>
@@ -5443,7 +5405,7 @@
             <a:r>
               <a:rPr lang="en-US" sz="1200" b="1" spc="300" kern="0" dirty="0">
                 <a:solidFill>
-                  <a:srgbClr val="4A9EFF"/>
+                  <a:srgbClr val="9A7B66"/>
                 </a:solidFill>
                 <a:latin typeface="Calibri" pitchFamily="34" charset="0"/>
                 <a:ea typeface="Calibri" pitchFamily="34" charset="-122"/>
@@ -5482,11 +5444,11 @@
             <a:r>
               <a:rPr lang="en-US" sz="3200" b="1" dirty="0">
                 <a:solidFill>
-                  <a:srgbClr val="EAF1FA"/>
-                </a:solidFill>
-                <a:latin typeface="Bookman Old Style" pitchFamily="34" charset="0"/>
-                <a:ea typeface="Bookman Old Style" pitchFamily="34" charset="-122"/>
-                <a:cs typeface="Bookman Old Style" pitchFamily="34" charset="-120"/>
+                  <a:srgbClr val="33302B"/>
+                </a:solidFill>
+                <a:latin typeface="Georgia" pitchFamily="34" charset="0"/>
+                <a:ea typeface="Georgia" pitchFamily="34" charset="-122"/>
+                <a:cs typeface="Georgia" pitchFamily="34" charset="-120"/>
               </a:rPr>
               <a:t>Três elementos, uma só identidade</a:t>
             </a:r>
@@ -5511,13 +5473,18 @@
             </a:avLst>
           </a:prstGeom>
           <a:solidFill>
-            <a:srgbClr val="13283F"/>
+            <a:srgbClr val="FFFFFF"/>
           </a:solidFill>
-          <a:ln/>
+          <a:ln w="12700">
+            <a:solidFill>
+              <a:srgbClr val="E3D9CC"/>
+            </a:solidFill>
+            <a:prstDash val="solid"/>
+          </a:ln>
           <a:effectLst>
-            <a:outerShdw sx="100000" sy="100000" kx="0" ky="0" algn="bl" rotWithShape="0" blurRad="127000" dist="38100" dir="5400000">
-              <a:srgbClr val="000000">
-                <a:alpha val="28000"/>
+            <a:outerShdw sx="100000" sy="100000" kx="0" ky="0" algn="bl" rotWithShape="0" blurRad="114300" dist="38100" dir="5400000">
+              <a:srgbClr val="7A6A55">
+                <a:alpha val="12000"/>
               </a:srgbClr>
             </a:outerShdw>
           </a:effectLst>
@@ -5538,9 +5505,14 @@
             <a:avLst/>
           </a:prstGeom>
           <a:solidFill>
-            <a:srgbClr val="16314F"/>
+            <a:srgbClr val="EADFD0"/>
           </a:solidFill>
-          <a:ln/>
+          <a:ln w="9525">
+            <a:solidFill>
+              <a:srgbClr val="E3D9CC"/>
+            </a:solidFill>
+            <a:prstDash val="solid"/>
+          </a:ln>
         </p:spPr>
       </p:sp>
       <p:pic>
@@ -5594,11 +5566,11 @@
             <a:r>
               <a:rPr lang="en-US" sz="1700" b="1" dirty="0">
                 <a:solidFill>
-                  <a:srgbClr val="C9A961"/>
-                </a:solidFill>
-                <a:latin typeface="Bookman Old Style" pitchFamily="34" charset="0"/>
-                <a:ea typeface="Bookman Old Style" pitchFamily="34" charset="-122"/>
-                <a:cs typeface="Bookman Old Style" pitchFamily="34" charset="-120"/>
+                  <a:srgbClr val="B1937E"/>
+                </a:solidFill>
+                <a:latin typeface="Georgia" pitchFamily="34" charset="0"/>
+                <a:ea typeface="Georgia" pitchFamily="34" charset="-122"/>
+                <a:cs typeface="Georgia" pitchFamily="34" charset="-120"/>
               </a:rPr>
               <a:t>PARA QUEM</a:t>
             </a:r>
@@ -5633,7 +5605,7 @@
             <a:r>
               <a:rPr lang="en-US" sz="1400" dirty="0">
                 <a:solidFill>
-                  <a:srgbClr val="9FB2C9"/>
+                  <a:srgbClr val="8A7E72"/>
                 </a:solidFill>
                 <a:latin typeface="Calibri" pitchFamily="34" charset="0"/>
                 <a:ea typeface="Calibri" pitchFamily="34" charset="-122"/>
@@ -5662,13 +5634,18 @@
             </a:avLst>
           </a:prstGeom>
           <a:solidFill>
-            <a:srgbClr val="13283F"/>
+            <a:srgbClr val="FFFFFF"/>
           </a:solidFill>
-          <a:ln/>
+          <a:ln w="12700">
+            <a:solidFill>
+              <a:srgbClr val="E3D9CC"/>
+            </a:solidFill>
+            <a:prstDash val="solid"/>
+          </a:ln>
           <a:effectLst>
-            <a:outerShdw sx="100000" sy="100000" kx="0" ky="0" algn="bl" rotWithShape="0" blurRad="127000" dist="38100" dir="5400000">
-              <a:srgbClr val="000000">
-                <a:alpha val="28000"/>
+            <a:outerShdw sx="100000" sy="100000" kx="0" ky="0" algn="bl" rotWithShape="0" blurRad="114300" dist="38100" dir="5400000">
+              <a:srgbClr val="7A6A55">
+                <a:alpha val="12000"/>
               </a:srgbClr>
             </a:outerShdw>
           </a:effectLst>
@@ -5689,9 +5666,14 @@
             <a:avLst/>
           </a:prstGeom>
           <a:solidFill>
-            <a:srgbClr val="16314F"/>
+            <a:srgbClr val="EADFD0"/>
           </a:solidFill>
-          <a:ln/>
+          <a:ln w="9525">
+            <a:solidFill>
+              <a:srgbClr val="E3D9CC"/>
+            </a:solidFill>
+            <a:prstDash val="solid"/>
+          </a:ln>
         </p:spPr>
       </p:sp>
       <p:pic>
@@ -5745,11 +5727,11 @@
             <a:r>
               <a:rPr lang="en-US" sz="1700" b="1" dirty="0">
                 <a:solidFill>
-                  <a:srgbClr val="C9A961"/>
-                </a:solidFill>
-                <a:latin typeface="Bookman Old Style" pitchFamily="34" charset="0"/>
-                <a:ea typeface="Bookman Old Style" pitchFamily="34" charset="-122"/>
-                <a:cs typeface="Bookman Old Style" pitchFamily="34" charset="-120"/>
+                  <a:srgbClr val="B1937E"/>
+                </a:solidFill>
+                <a:latin typeface="Georgia" pitchFamily="34" charset="0"/>
+                <a:ea typeface="Georgia" pitchFamily="34" charset="-122"/>
+                <a:cs typeface="Georgia" pitchFamily="34" charset="-120"/>
               </a:rPr>
               <a:t>O QUE TENS DE DIFERENTE</a:t>
             </a:r>
@@ -5784,7 +5766,7 @@
             <a:r>
               <a:rPr lang="en-US" sz="1400" dirty="0">
                 <a:solidFill>
-                  <a:srgbClr val="9FB2C9"/>
+                  <a:srgbClr val="8A7E72"/>
                 </a:solidFill>
                 <a:latin typeface="Calibri" pitchFamily="34" charset="0"/>
                 <a:ea typeface="Calibri" pitchFamily="34" charset="-122"/>
@@ -5813,13 +5795,18 @@
             </a:avLst>
           </a:prstGeom>
           <a:solidFill>
-            <a:srgbClr val="13283F"/>
+            <a:srgbClr val="FFFFFF"/>
           </a:solidFill>
-          <a:ln/>
+          <a:ln w="12700">
+            <a:solidFill>
+              <a:srgbClr val="E3D9CC"/>
+            </a:solidFill>
+            <a:prstDash val="solid"/>
+          </a:ln>
           <a:effectLst>
-            <a:outerShdw sx="100000" sy="100000" kx="0" ky="0" algn="bl" rotWithShape="0" blurRad="127000" dist="38100" dir="5400000">
-              <a:srgbClr val="000000">
-                <a:alpha val="28000"/>
+            <a:outerShdw sx="100000" sy="100000" kx="0" ky="0" algn="bl" rotWithShape="0" blurRad="114300" dist="38100" dir="5400000">
+              <a:srgbClr val="7A6A55">
+                <a:alpha val="12000"/>
               </a:srgbClr>
             </a:outerShdw>
           </a:effectLst>
@@ -5840,9 +5827,14 @@
             <a:avLst/>
           </a:prstGeom>
           <a:solidFill>
-            <a:srgbClr val="16314F"/>
+            <a:srgbClr val="EADFD0"/>
           </a:solidFill>
-          <a:ln/>
+          <a:ln w="9525">
+            <a:solidFill>
+              <a:srgbClr val="E3D9CC"/>
+            </a:solidFill>
+            <a:prstDash val="solid"/>
+          </a:ln>
         </p:spPr>
       </p:sp>
       <p:pic>
@@ -5896,11 +5888,11 @@
             <a:r>
               <a:rPr lang="en-US" sz="1700" b="1" dirty="0">
                 <a:solidFill>
-                  <a:srgbClr val="C9A961"/>
-                </a:solidFill>
-                <a:latin typeface="Bookman Old Style" pitchFamily="34" charset="0"/>
-                <a:ea typeface="Bookman Old Style" pitchFamily="34" charset="-122"/>
-                <a:cs typeface="Bookman Old Style" pitchFamily="34" charset="-120"/>
+                  <a:srgbClr val="B1937E"/>
+                </a:solidFill>
+                <a:latin typeface="Georgia" pitchFamily="34" charset="0"/>
+                <a:ea typeface="Georgia" pitchFamily="34" charset="-122"/>
+                <a:cs typeface="Georgia" pitchFamily="34" charset="-120"/>
               </a:rPr>
               <a:t>QUE TRANSFORMAÇÃO</a:t>
             </a:r>
@@ -5935,7 +5927,7 @@
             <a:r>
               <a:rPr lang="en-US" sz="1400" dirty="0">
                 <a:solidFill>
-                  <a:srgbClr val="9FB2C9"/>
+                  <a:srgbClr val="8A7E72"/>
                 </a:solidFill>
                 <a:latin typeface="Calibri" pitchFamily="34" charset="0"/>
                 <a:ea typeface="Calibri" pitchFamily="34" charset="-122"/>
@@ -5964,7 +5956,7 @@
           <a:noFill/>
           <a:ln w="9525">
             <a:solidFill>
-              <a:srgbClr val="5C708A">
+              <a:srgbClr val="A89A86">
                 <a:alpha val="60000"/>
               </a:srgbClr>
             </a:solidFill>
@@ -5999,7 +5991,7 @@
             <a:r>
               <a:rPr lang="en-US" sz="900" dirty="0">
                 <a:solidFill>
-                  <a:srgbClr val="5C708A"/>
+                  <a:srgbClr val="A89A86"/>
                 </a:solidFill>
                 <a:latin typeface="Calibri" pitchFamily="34" charset="0"/>
                 <a:ea typeface="Calibri" pitchFamily="34" charset="-122"/>
@@ -6038,7 +6030,7 @@
             <a:r>
               <a:rPr lang="en-US" sz="900" dirty="0">
                 <a:solidFill>
-                  <a:srgbClr val="5C708A"/>
+                  <a:srgbClr val="A89A86"/>
                 </a:solidFill>
                 <a:latin typeface="Calibri" pitchFamily="34" charset="0"/>
                 <a:ea typeface="Calibri" pitchFamily="34" charset="-122"/>
@@ -6064,7 +6056,7 @@
     <p:bg>
       <p:bgPr>
         <a:solidFill>
-          <a:srgbClr val="0B1D33"/>
+          <a:srgbClr val="F8F6F3"/>
         </a:solidFill>
       </p:bgPr>
     </p:bg>
@@ -6109,7 +6101,7 @@
             <a:r>
               <a:rPr lang="en-US" sz="1200" b="1" spc="300" kern="0" dirty="0">
                 <a:solidFill>
-                  <a:srgbClr val="4A9EFF"/>
+                  <a:srgbClr val="9A7B66"/>
                 </a:solidFill>
                 <a:latin typeface="Calibri" pitchFamily="34" charset="0"/>
                 <a:ea typeface="Calibri" pitchFamily="34" charset="-122"/>
@@ -6148,11 +6140,11 @@
             <a:r>
               <a:rPr lang="en-US" sz="3600" b="1" dirty="0">
                 <a:solidFill>
-                  <a:srgbClr val="EAF1FA"/>
-                </a:solidFill>
-                <a:latin typeface="Bookman Old Style" pitchFamily="34" charset="0"/>
-                <a:ea typeface="Bookman Old Style" pitchFamily="34" charset="-122"/>
-                <a:cs typeface="Bookman Old Style" pitchFamily="34" charset="-120"/>
+                  <a:srgbClr val="33302B"/>
+                </a:solidFill>
+                <a:latin typeface="Georgia" pitchFamily="34" charset="0"/>
+                <a:ea typeface="Georgia" pitchFamily="34" charset="-122"/>
+                <a:cs typeface="Georgia" pitchFamily="34" charset="-120"/>
               </a:rPr>
               <a:t>A fórmula</a:t>
             </a:r>
@@ -6177,20 +6169,20 @@
             </a:avLst>
           </a:prstGeom>
           <a:solidFill>
-            <a:srgbClr val="102844"/>
+            <a:srgbClr val="EFE7DE"/>
           </a:solidFill>
           <a:ln w="15240">
             <a:solidFill>
-              <a:srgbClr val="4A9EFF">
+              <a:srgbClr val="9A7B66">
                 <a:alpha val="80000"/>
               </a:srgbClr>
             </a:solidFill>
             <a:prstDash val="solid"/>
           </a:ln>
           <a:effectLst>
-            <a:outerShdw sx="100000" sy="100000" kx="0" ky="0" algn="bl" rotWithShape="0" blurRad="127000" dist="38100" dir="5400000">
-              <a:srgbClr val="000000">
-                <a:alpha val="28000"/>
+            <a:outerShdw sx="100000" sy="100000" kx="0" ky="0" algn="bl" rotWithShape="0" blurRad="114300" dist="38100" dir="5400000">
+              <a:srgbClr val="7A6A55">
+                <a:alpha val="12000"/>
               </a:srgbClr>
             </a:outerShdw>
           </a:effectLst>
@@ -6223,11 +6215,11 @@
             <a:r>
               <a:rPr lang="en-US" sz="2600" dirty="0">
                 <a:solidFill>
-                  <a:srgbClr val="9FB2C9"/>
-                </a:solidFill>
-                <a:latin typeface="Bookman Old Style" pitchFamily="34" charset="0"/>
-                <a:ea typeface="Bookman Old Style" pitchFamily="34" charset="-122"/>
-                <a:cs typeface="Bookman Old Style" pitchFamily="34" charset="-120"/>
+                  <a:srgbClr val="8A7E72"/>
+                </a:solidFill>
+                <a:latin typeface="Georgia" pitchFamily="34" charset="0"/>
+                <a:ea typeface="Georgia" pitchFamily="34" charset="-122"/>
+                <a:cs typeface="Georgia" pitchFamily="34" charset="-120"/>
               </a:rPr>
               <a:t>Ajudo </a:t>
             </a:r>
@@ -6237,11 +6229,11 @@
             <a:r>
               <a:rPr lang="en-US" sz="2600" b="1" dirty="0">
                 <a:solidFill>
-                  <a:srgbClr val="4A9EFF"/>
-                </a:solidFill>
-                <a:latin typeface="Bookman Old Style" pitchFamily="34" charset="0"/>
-                <a:ea typeface="Bookman Old Style" pitchFamily="34" charset="-122"/>
-                <a:cs typeface="Bookman Old Style" pitchFamily="34" charset="-120"/>
+                  <a:srgbClr val="9A7B66"/>
+                </a:solidFill>
+                <a:latin typeface="Georgia" pitchFamily="34" charset="0"/>
+                <a:ea typeface="Georgia" pitchFamily="34" charset="-122"/>
+                <a:cs typeface="Georgia" pitchFamily="34" charset="-120"/>
               </a:rPr>
               <a:t>[casal ideal]</a:t>
             </a:r>
@@ -6251,11 +6243,11 @@
             <a:r>
               <a:rPr lang="en-US" sz="2600" dirty="0">
                 <a:solidFill>
-                  <a:srgbClr val="9FB2C9"/>
-                </a:solidFill>
-                <a:latin typeface="Bookman Old Style" pitchFamily="34" charset="0"/>
-                <a:ea typeface="Bookman Old Style" pitchFamily="34" charset="-122"/>
-                <a:cs typeface="Bookman Old Style" pitchFamily="34" charset="-120"/>
+                  <a:srgbClr val="8A7E72"/>
+                </a:solidFill>
+                <a:latin typeface="Georgia" pitchFamily="34" charset="0"/>
+                <a:ea typeface="Georgia" pitchFamily="34" charset="-122"/>
+                <a:cs typeface="Georgia" pitchFamily="34" charset="-120"/>
               </a:rPr>
               <a:t> a </a:t>
             </a:r>
@@ -6265,11 +6257,11 @@
             <a:r>
               <a:rPr lang="en-US" sz="2600" b="1" dirty="0">
                 <a:solidFill>
-                  <a:srgbClr val="C9A961"/>
-                </a:solidFill>
-                <a:latin typeface="Bookman Old Style" pitchFamily="34" charset="0"/>
-                <a:ea typeface="Bookman Old Style" pitchFamily="34" charset="-122"/>
-                <a:cs typeface="Bookman Old Style" pitchFamily="34" charset="-120"/>
+                  <a:srgbClr val="B1937E"/>
+                </a:solidFill>
+                <a:latin typeface="Georgia" pitchFamily="34" charset="0"/>
+                <a:ea typeface="Georgia" pitchFamily="34" charset="-122"/>
+                <a:cs typeface="Georgia" pitchFamily="34" charset="-120"/>
               </a:rPr>
               <a:t>[transformação]</a:t>
             </a:r>
@@ -6279,11 +6271,11 @@
             <a:r>
               <a:rPr lang="en-US" sz="2600" dirty="0">
                 <a:solidFill>
-                  <a:srgbClr val="9FB2C9"/>
-                </a:solidFill>
-                <a:latin typeface="Bookman Old Style" pitchFamily="34" charset="0"/>
-                <a:ea typeface="Bookman Old Style" pitchFamily="34" charset="-122"/>
-                <a:cs typeface="Bookman Old Style" pitchFamily="34" charset="-120"/>
+                  <a:srgbClr val="8A7E72"/>
+                </a:solidFill>
+                <a:latin typeface="Georgia" pitchFamily="34" charset="0"/>
+                <a:ea typeface="Georgia" pitchFamily="34" charset="-122"/>
+                <a:cs typeface="Georgia" pitchFamily="34" charset="-120"/>
               </a:rPr>
               <a:t> através de </a:t>
             </a:r>
@@ -6293,11 +6285,11 @@
             <a:r>
               <a:rPr lang="en-US" sz="2600" b="1" dirty="0">
                 <a:solidFill>
-                  <a:srgbClr val="4A9EFF"/>
-                </a:solidFill>
-                <a:latin typeface="Bookman Old Style" pitchFamily="34" charset="0"/>
-                <a:ea typeface="Bookman Old Style" pitchFamily="34" charset="-122"/>
-                <a:cs typeface="Bookman Old Style" pitchFamily="34" charset="-120"/>
+                  <a:srgbClr val="9A7B66"/>
+                </a:solidFill>
+                <a:latin typeface="Georgia" pitchFamily="34" charset="0"/>
+                <a:ea typeface="Georgia" pitchFamily="34" charset="-122"/>
+                <a:cs typeface="Georgia" pitchFamily="34" charset="-120"/>
               </a:rPr>
               <a:t>[o teu diferencial]</a:t>
             </a:r>
@@ -6307,11 +6299,11 @@
             <a:r>
               <a:rPr lang="en-US" sz="2600" dirty="0">
                 <a:solidFill>
-                  <a:srgbClr val="9FB2C9"/>
-                </a:solidFill>
-                <a:latin typeface="Bookman Old Style" pitchFamily="34" charset="0"/>
-                <a:ea typeface="Bookman Old Style" pitchFamily="34" charset="-122"/>
-                <a:cs typeface="Bookman Old Style" pitchFamily="34" charset="-120"/>
+                  <a:srgbClr val="8A7E72"/>
+                </a:solidFill>
+                <a:latin typeface="Georgia" pitchFamily="34" charset="0"/>
+                <a:ea typeface="Georgia" pitchFamily="34" charset="-122"/>
+                <a:cs typeface="Georgia" pitchFamily="34" charset="-120"/>
               </a:rPr>
               <a:t>.</a:t>
             </a:r>
@@ -6346,7 +6338,7 @@
             <a:r>
               <a:rPr lang="en-US" sz="1400" b="1" spc="200" kern="0" dirty="0">
                 <a:solidFill>
-                  <a:srgbClr val="C9A961"/>
+                  <a:srgbClr val="B1937E"/>
                 </a:solidFill>
                 <a:latin typeface="Calibri" pitchFamily="34" charset="0"/>
                 <a:ea typeface="Calibri" pitchFamily="34" charset="-122"/>
@@ -6375,13 +6367,18 @@
             </a:avLst>
           </a:prstGeom>
           <a:solidFill>
-            <a:srgbClr val="13283F"/>
+            <a:srgbClr val="FFFFFF"/>
           </a:solidFill>
-          <a:ln/>
+          <a:ln w="12700">
+            <a:solidFill>
+              <a:srgbClr val="E3D9CC"/>
+            </a:solidFill>
+            <a:prstDash val="solid"/>
+          </a:ln>
           <a:effectLst>
-            <a:outerShdw sx="100000" sy="100000" kx="0" ky="0" algn="bl" rotWithShape="0" blurRad="127000" dist="38100" dir="5400000">
-              <a:srgbClr val="000000">
-                <a:alpha val="28000"/>
+            <a:outerShdw sx="100000" sy="100000" kx="0" ky="0" algn="bl" rotWithShape="0" blurRad="114300" dist="38100" dir="5400000">
+              <a:srgbClr val="7A6A55">
+                <a:alpha val="12000"/>
               </a:srgbClr>
             </a:outerShdw>
           </a:effectLst>
@@ -6402,9 +6399,14 @@
             <a:avLst/>
           </a:prstGeom>
           <a:solidFill>
-            <a:srgbClr val="16314F"/>
+            <a:srgbClr val="EADFD0"/>
           </a:solidFill>
-          <a:ln/>
+          <a:ln w="9525">
+            <a:solidFill>
+              <a:srgbClr val="E3D9CC"/>
+            </a:solidFill>
+            <a:prstDash val="solid"/>
+          </a:ln>
         </p:spPr>
       </p:sp>
       <p:pic>
@@ -6458,11 +6460,11 @@
             <a:r>
               <a:rPr lang="en-US" sz="1800" i="1" dirty="0">
                 <a:solidFill>
-                  <a:srgbClr val="EAF1FA"/>
-                </a:solidFill>
-                <a:latin typeface="Bookman Old Style" pitchFamily="34" charset="0"/>
-                <a:ea typeface="Bookman Old Style" pitchFamily="34" charset="-122"/>
-                <a:cs typeface="Bookman Old Style" pitchFamily="34" charset="-120"/>
+                  <a:srgbClr val="33302B"/>
+                </a:solidFill>
+                <a:latin typeface="Georgia" pitchFamily="34" charset="0"/>
+                <a:ea typeface="Georgia" pitchFamily="34" charset="-122"/>
+                <a:cs typeface="Georgia" pitchFamily="34" charset="-120"/>
               </a:rPr>
               <a:t>“Ajudo casais que valorizam autenticidade a reviver o seu dia tal como o sentiram, através de uma fotografia documental e sem poses.”</a:t>
             </a:r>
@@ -6487,7 +6489,7 @@
           <a:noFill/>
           <a:ln w="9525">
             <a:solidFill>
-              <a:srgbClr val="5C708A">
+              <a:srgbClr val="A89A86">
                 <a:alpha val="60000"/>
               </a:srgbClr>
             </a:solidFill>
@@ -6522,7 +6524,7 @@
             <a:r>
               <a:rPr lang="en-US" sz="900" dirty="0">
                 <a:solidFill>
-                  <a:srgbClr val="5C708A"/>
+                  <a:srgbClr val="A89A86"/>
                 </a:solidFill>
                 <a:latin typeface="Calibri" pitchFamily="34" charset="0"/>
                 <a:ea typeface="Calibri" pitchFamily="34" charset="-122"/>
@@ -6561,7 +6563,7 @@
             <a:r>
               <a:rPr lang="en-US" sz="900" dirty="0">
                 <a:solidFill>
-                  <a:srgbClr val="5C708A"/>
+                  <a:srgbClr val="A89A86"/>
                 </a:solidFill>
                 <a:latin typeface="Calibri" pitchFamily="34" charset="0"/>
                 <a:ea typeface="Calibri" pitchFamily="34" charset="-122"/>
@@ -6587,7 +6589,7 @@
     <p:bg>
       <p:bgPr>
         <a:solidFill>
-          <a:srgbClr val="0B1D33"/>
+          <a:srgbClr val="F8F6F3"/>
         </a:solidFill>
       </p:bgPr>
     </p:bg>
@@ -6632,7 +6634,7 @@
             <a:r>
               <a:rPr lang="en-US" sz="1200" b="1" spc="300" kern="0" dirty="0">
                 <a:solidFill>
-                  <a:srgbClr val="4A9EFF"/>
+                  <a:srgbClr val="9A7B66"/>
                 </a:solidFill>
                 <a:latin typeface="Calibri" pitchFamily="34" charset="0"/>
                 <a:ea typeface="Calibri" pitchFamily="34" charset="-122"/>
@@ -6671,11 +6673,11 @@
             <a:r>
               <a:rPr lang="en-US" sz="3200" b="1" dirty="0">
                 <a:solidFill>
-                  <a:srgbClr val="EAF1FA"/>
-                </a:solidFill>
-                <a:latin typeface="Bookman Old Style" pitchFamily="34" charset="0"/>
-                <a:ea typeface="Bookman Old Style" pitchFamily="34" charset="-122"/>
-                <a:cs typeface="Bookman Old Style" pitchFamily="34" charset="-120"/>
+                  <a:srgbClr val="33302B"/>
+                </a:solidFill>
+                <a:latin typeface="Georgia" pitchFamily="34" charset="0"/>
+                <a:ea typeface="Georgia" pitchFamily="34" charset="-122"/>
+                <a:cs typeface="Georgia" pitchFamily="34" charset="-120"/>
               </a:rPr>
               <a:t>Genérico vs. Posicionado</a:t>
             </a:r>
@@ -6700,20 +6702,20 @@
             </a:avLst>
           </a:prstGeom>
           <a:solidFill>
-            <a:srgbClr val="13283F"/>
+            <a:srgbClr val="FFFFFF"/>
           </a:solidFill>
           <a:ln w="9525">
             <a:solidFill>
-              <a:srgbClr val="5C708A">
+              <a:srgbClr val="A89A86">
                 <a:alpha val="50000"/>
               </a:srgbClr>
             </a:solidFill>
             <a:prstDash val="solid"/>
           </a:ln>
           <a:effectLst>
-            <a:outerShdw sx="100000" sy="100000" kx="0" ky="0" algn="bl" rotWithShape="0" blurRad="127000" dist="38100" dir="5400000">
-              <a:srgbClr val="000000">
-                <a:alpha val="28000"/>
+            <a:outerShdw sx="100000" sy="100000" kx="0" ky="0" algn="bl" rotWithShape="0" blurRad="114300" dist="38100" dir="5400000">
+              <a:srgbClr val="7A6A55">
+                <a:alpha val="12000"/>
               </a:srgbClr>
             </a:outerShdw>
           </a:effectLst>
@@ -6746,7 +6748,7 @@
             <a:r>
               <a:rPr lang="en-US" sz="1500" i="1" dirty="0">
                 <a:solidFill>
-                  <a:srgbClr val="9FB2C9"/>
+                  <a:srgbClr val="8A7E72"/>
                 </a:solidFill>
                 <a:latin typeface="Calibri" pitchFamily="34" charset="0"/>
                 <a:ea typeface="Calibri" pitchFamily="34" charset="-122"/>
@@ -6799,20 +6801,20 @@
             </a:avLst>
           </a:prstGeom>
           <a:solidFill>
-            <a:srgbClr val="16314F"/>
+            <a:srgbClr val="EADFD0"/>
           </a:solidFill>
           <a:ln w="12700">
             <a:solidFill>
-              <a:srgbClr val="C9A961">
+              <a:srgbClr val="B1937E">
                 <a:alpha val="90000"/>
               </a:srgbClr>
             </a:solidFill>
             <a:prstDash val="solid"/>
           </a:ln>
           <a:effectLst>
-            <a:outerShdw sx="100000" sy="100000" kx="0" ky="0" algn="bl" rotWithShape="0" blurRad="127000" dist="38100" dir="5400000">
-              <a:srgbClr val="000000">
-                <a:alpha val="28000"/>
+            <a:outerShdw sx="100000" sy="100000" kx="0" ky="0" algn="bl" rotWithShape="0" blurRad="114300" dist="38100" dir="5400000">
+              <a:srgbClr val="7A6A55">
+                <a:alpha val="12000"/>
               </a:srgbClr>
             </a:outerShdw>
           </a:effectLst>
@@ -6845,7 +6847,7 @@
             <a:r>
               <a:rPr lang="en-US" sz="1500" b="1" dirty="0">
                 <a:solidFill>
-                  <a:srgbClr val="EAF1FA"/>
+                  <a:srgbClr val="33302B"/>
                 </a:solidFill>
                 <a:latin typeface="Calibri" pitchFamily="34" charset="0"/>
                 <a:ea typeface="Calibri" pitchFamily="34" charset="-122"/>
@@ -6874,20 +6876,20 @@
             </a:avLst>
           </a:prstGeom>
           <a:solidFill>
-            <a:srgbClr val="13283F"/>
+            <a:srgbClr val="FFFFFF"/>
           </a:solidFill>
           <a:ln w="9525">
             <a:solidFill>
-              <a:srgbClr val="5C708A">
+              <a:srgbClr val="A89A86">
                 <a:alpha val="50000"/>
               </a:srgbClr>
             </a:solidFill>
             <a:prstDash val="solid"/>
           </a:ln>
           <a:effectLst>
-            <a:outerShdw sx="100000" sy="100000" kx="0" ky="0" algn="bl" rotWithShape="0" blurRad="127000" dist="38100" dir="5400000">
-              <a:srgbClr val="000000">
-                <a:alpha val="28000"/>
+            <a:outerShdw sx="100000" sy="100000" kx="0" ky="0" algn="bl" rotWithShape="0" blurRad="114300" dist="38100" dir="5400000">
+              <a:srgbClr val="7A6A55">
+                <a:alpha val="12000"/>
               </a:srgbClr>
             </a:outerShdw>
           </a:effectLst>
@@ -6920,7 +6922,7 @@
             <a:r>
               <a:rPr lang="en-US" sz="1500" i="1" dirty="0">
                 <a:solidFill>
-                  <a:srgbClr val="9FB2C9"/>
+                  <a:srgbClr val="8A7E72"/>
                 </a:solidFill>
                 <a:latin typeface="Calibri" pitchFamily="34" charset="0"/>
                 <a:ea typeface="Calibri" pitchFamily="34" charset="-122"/>
@@ -6973,20 +6975,20 @@
             </a:avLst>
           </a:prstGeom>
           <a:solidFill>
-            <a:srgbClr val="16314F"/>
+            <a:srgbClr val="EADFD0"/>
           </a:solidFill>
           <a:ln w="12700">
             <a:solidFill>
-              <a:srgbClr val="C9A961">
+              <a:srgbClr val="B1937E">
                 <a:alpha val="90000"/>
               </a:srgbClr>
             </a:solidFill>
             <a:prstDash val="solid"/>
           </a:ln>
           <a:effectLst>
-            <a:outerShdw sx="100000" sy="100000" kx="0" ky="0" algn="bl" rotWithShape="0" blurRad="127000" dist="38100" dir="5400000">
-              <a:srgbClr val="000000">
-                <a:alpha val="28000"/>
+            <a:outerShdw sx="100000" sy="100000" kx="0" ky="0" algn="bl" rotWithShape="0" blurRad="114300" dist="38100" dir="5400000">
+              <a:srgbClr val="7A6A55">
+                <a:alpha val="12000"/>
               </a:srgbClr>
             </a:outerShdw>
           </a:effectLst>
@@ -7019,7 +7021,7 @@
             <a:r>
               <a:rPr lang="en-US" sz="1500" b="1" dirty="0">
                 <a:solidFill>
-                  <a:srgbClr val="EAF1FA"/>
+                  <a:srgbClr val="33302B"/>
                 </a:solidFill>
                 <a:latin typeface="Calibri" pitchFamily="34" charset="0"/>
                 <a:ea typeface="Calibri" pitchFamily="34" charset="-122"/>
@@ -7048,20 +7050,20 @@
             </a:avLst>
           </a:prstGeom>
           <a:solidFill>
-            <a:srgbClr val="13283F"/>
+            <a:srgbClr val="FFFFFF"/>
           </a:solidFill>
           <a:ln w="9525">
             <a:solidFill>
-              <a:srgbClr val="5C708A">
+              <a:srgbClr val="A89A86">
                 <a:alpha val="50000"/>
               </a:srgbClr>
             </a:solidFill>
             <a:prstDash val="solid"/>
           </a:ln>
           <a:effectLst>
-            <a:outerShdw sx="100000" sy="100000" kx="0" ky="0" algn="bl" rotWithShape="0" blurRad="127000" dist="38100" dir="5400000">
-              <a:srgbClr val="000000">
-                <a:alpha val="28000"/>
+            <a:outerShdw sx="100000" sy="100000" kx="0" ky="0" algn="bl" rotWithShape="0" blurRad="114300" dist="38100" dir="5400000">
+              <a:srgbClr val="7A6A55">
+                <a:alpha val="12000"/>
               </a:srgbClr>
             </a:outerShdw>
           </a:effectLst>
@@ -7094,7 +7096,7 @@
             <a:r>
               <a:rPr lang="en-US" sz="1500" i="1" dirty="0">
                 <a:solidFill>
-                  <a:srgbClr val="9FB2C9"/>
+                  <a:srgbClr val="8A7E72"/>
                 </a:solidFill>
                 <a:latin typeface="Calibri" pitchFamily="34" charset="0"/>
                 <a:ea typeface="Calibri" pitchFamily="34" charset="-122"/>
@@ -7147,20 +7149,20 @@
             </a:avLst>
           </a:prstGeom>
           <a:solidFill>
-            <a:srgbClr val="16314F"/>
+            <a:srgbClr val="EADFD0"/>
           </a:solidFill>
           <a:ln w="12700">
             <a:solidFill>
-              <a:srgbClr val="C9A961">
+              <a:srgbClr val="B1937E">
                 <a:alpha val="90000"/>
               </a:srgbClr>
             </a:solidFill>
             <a:prstDash val="solid"/>
           </a:ln>
           <a:effectLst>
-            <a:outerShdw sx="100000" sy="100000" kx="0" ky="0" algn="bl" rotWithShape="0" blurRad="127000" dist="38100" dir="5400000">
-              <a:srgbClr val="000000">
-                <a:alpha val="28000"/>
+            <a:outerShdw sx="100000" sy="100000" kx="0" ky="0" algn="bl" rotWithShape="0" blurRad="114300" dist="38100" dir="5400000">
+              <a:srgbClr val="7A6A55">
+                <a:alpha val="12000"/>
               </a:srgbClr>
             </a:outerShdw>
           </a:effectLst>
@@ -7193,7 +7195,7 @@
             <a:r>
               <a:rPr lang="en-US" sz="1500" b="1" dirty="0">
                 <a:solidFill>
-                  <a:srgbClr val="EAF1FA"/>
+                  <a:srgbClr val="33302B"/>
                 </a:solidFill>
                 <a:latin typeface="Calibri" pitchFamily="34" charset="0"/>
                 <a:ea typeface="Calibri" pitchFamily="34" charset="-122"/>
@@ -7222,7 +7224,7 @@
           <a:noFill/>
           <a:ln w="9525">
             <a:solidFill>
-              <a:srgbClr val="5C708A">
+              <a:srgbClr val="A89A86">
                 <a:alpha val="60000"/>
               </a:srgbClr>
             </a:solidFill>
@@ -7257,7 +7259,7 @@
             <a:r>
               <a:rPr lang="en-US" sz="900" dirty="0">
                 <a:solidFill>
-                  <a:srgbClr val="5C708A"/>
+                  <a:srgbClr val="A89A86"/>
                 </a:solidFill>
                 <a:latin typeface="Calibri" pitchFamily="34" charset="0"/>
                 <a:ea typeface="Calibri" pitchFamily="34" charset="-122"/>
@@ -7296,7 +7298,7 @@
             <a:r>
               <a:rPr lang="en-US" sz="900" dirty="0">
                 <a:solidFill>
-                  <a:srgbClr val="5C708A"/>
+                  <a:srgbClr val="A89A86"/>
                 </a:solidFill>
                 <a:latin typeface="Calibri" pitchFamily="34" charset="0"/>
                 <a:ea typeface="Calibri" pitchFamily="34" charset="-122"/>
@@ -7322,7 +7324,7 @@
     <p:bg>
       <p:bgPr>
         <a:solidFill>
-          <a:srgbClr val="0B1D33"/>
+          <a:srgbClr val="F8F6F3"/>
         </a:solidFill>
       </p:bgPr>
     </p:bg>
@@ -7367,7 +7369,7 @@
             <a:r>
               <a:rPr lang="en-US" sz="1200" b="1" spc="300" kern="0" dirty="0">
                 <a:solidFill>
-                  <a:srgbClr val="4A9EFF"/>
+                  <a:srgbClr val="9A7B66"/>
                 </a:solidFill>
                 <a:latin typeface="Calibri" pitchFamily="34" charset="0"/>
                 <a:ea typeface="Calibri" pitchFamily="34" charset="-122"/>
@@ -7406,11 +7408,11 @@
             <a:r>
               <a:rPr lang="en-US" sz="3000" b="1" dirty="0">
                 <a:solidFill>
-                  <a:srgbClr val="EAF1FA"/>
-                </a:solidFill>
-                <a:latin typeface="Bookman Old Style" pitchFamily="34" charset="0"/>
-                <a:ea typeface="Bookman Old Style" pitchFamily="34" charset="-122"/>
-                <a:cs typeface="Bookman Old Style" pitchFamily="34" charset="-120"/>
+                  <a:srgbClr val="33302B"/>
+                </a:solidFill>
+                <a:latin typeface="Georgia" pitchFamily="34" charset="0"/>
+                <a:ea typeface="Georgia" pitchFamily="34" charset="-122"/>
+                <a:cs typeface="Georgia" pitchFamily="34" charset="-120"/>
               </a:rPr>
               <a:t>O posicionamento é o que justifica o preço</a:t>
             </a:r>
@@ -7435,13 +7437,18 @@
             </a:avLst>
           </a:prstGeom>
           <a:solidFill>
-            <a:srgbClr val="13283F"/>
+            <a:srgbClr val="FFFFFF"/>
           </a:solidFill>
-          <a:ln/>
+          <a:ln w="12700">
+            <a:solidFill>
+              <a:srgbClr val="E3D9CC"/>
+            </a:solidFill>
+            <a:prstDash val="solid"/>
+          </a:ln>
           <a:effectLst>
-            <a:outerShdw sx="100000" sy="100000" kx="0" ky="0" algn="bl" rotWithShape="0" blurRad="127000" dist="38100" dir="5400000">
-              <a:srgbClr val="000000">
-                <a:alpha val="28000"/>
+            <a:outerShdw sx="100000" sy="100000" kx="0" ky="0" algn="bl" rotWithShape="0" blurRad="114300" dist="38100" dir="5400000">
+              <a:srgbClr val="7A6A55">
+                <a:alpha val="12000"/>
               </a:srgbClr>
             </a:outerShdw>
           </a:effectLst>
@@ -7462,9 +7469,14 @@
             <a:avLst/>
           </a:prstGeom>
           <a:solidFill>
-            <a:srgbClr val="16314F"/>
+            <a:srgbClr val="EADFD0"/>
           </a:solidFill>
-          <a:ln/>
+          <a:ln w="9525">
+            <a:solidFill>
+              <a:srgbClr val="E3D9CC"/>
+            </a:solidFill>
+            <a:prstDash val="solid"/>
+          </a:ln>
         </p:spPr>
       </p:sp>
       <p:pic>
@@ -7518,11 +7530,11 @@
             <a:r>
               <a:rPr lang="en-US" sz="1700" b="1" dirty="0">
                 <a:solidFill>
-                  <a:srgbClr val="EAF1FA"/>
-                </a:solidFill>
-                <a:latin typeface="Bookman Old Style" pitchFamily="34" charset="0"/>
-                <a:ea typeface="Bookman Old Style" pitchFamily="34" charset="-122"/>
-                <a:cs typeface="Bookman Old Style" pitchFamily="34" charset="-120"/>
+                  <a:srgbClr val="33302B"/>
+                </a:solidFill>
+                <a:latin typeface="Georgia" pitchFamily="34" charset="0"/>
+                <a:ea typeface="Georgia" pitchFamily="34" charset="-122"/>
+                <a:cs typeface="Georgia" pitchFamily="34" charset="-120"/>
               </a:rPr>
               <a:t>Posicionas-te</a:t>
             </a:r>
@@ -7557,7 +7569,7 @@
             <a:r>
               <a:rPr lang="en-US" sz="1300" dirty="0">
                 <a:solidFill>
-                  <a:srgbClr val="9FB2C9"/>
+                  <a:srgbClr val="8A7E72"/>
                 </a:solidFill>
                 <a:latin typeface="Calibri" pitchFamily="34" charset="0"/>
                 <a:ea typeface="Calibri" pitchFamily="34" charset="-122"/>
@@ -7610,13 +7622,18 @@
             </a:avLst>
           </a:prstGeom>
           <a:solidFill>
-            <a:srgbClr val="13283F"/>
+            <a:srgbClr val="FFFFFF"/>
           </a:solidFill>
-          <a:ln/>
+          <a:ln w="12700">
+            <a:solidFill>
+              <a:srgbClr val="E3D9CC"/>
+            </a:solidFill>
+            <a:prstDash val="solid"/>
+          </a:ln>
           <a:effectLst>
-            <a:outerShdw sx="100000" sy="100000" kx="0" ky="0" algn="bl" rotWithShape="0" blurRad="127000" dist="38100" dir="5400000">
-              <a:srgbClr val="000000">
-                <a:alpha val="28000"/>
+            <a:outerShdw sx="100000" sy="100000" kx="0" ky="0" algn="bl" rotWithShape="0" blurRad="114300" dist="38100" dir="5400000">
+              <a:srgbClr val="7A6A55">
+                <a:alpha val="12000"/>
               </a:srgbClr>
             </a:outerShdw>
           </a:effectLst>
@@ -7637,9 +7654,14 @@
             <a:avLst/>
           </a:prstGeom>
           <a:solidFill>
-            <a:srgbClr val="16314F"/>
+            <a:srgbClr val="EADFD0"/>
           </a:solidFill>
-          <a:ln/>
+          <a:ln w="9525">
+            <a:solidFill>
+              <a:srgbClr val="E3D9CC"/>
+            </a:solidFill>
+            <a:prstDash val="solid"/>
+          </a:ln>
         </p:spPr>
       </p:sp>
       <p:pic>
@@ -7693,11 +7715,11 @@
             <a:r>
               <a:rPr lang="en-US" sz="1700" b="1" dirty="0">
                 <a:solidFill>
-                  <a:srgbClr val="EAF1FA"/>
-                </a:solidFill>
-                <a:latin typeface="Bookman Old Style" pitchFamily="34" charset="0"/>
-                <a:ea typeface="Bookman Old Style" pitchFamily="34" charset="-122"/>
-                <a:cs typeface="Bookman Old Style" pitchFamily="34" charset="-120"/>
+                  <a:srgbClr val="33302B"/>
+                </a:solidFill>
+                <a:latin typeface="Georgia" pitchFamily="34" charset="0"/>
+                <a:ea typeface="Georgia" pitchFamily="34" charset="-122"/>
+                <a:cs typeface="Georgia" pitchFamily="34" charset="-120"/>
               </a:rPr>
               <a:t>Atrais o casal certo</a:t>
             </a:r>
@@ -7732,7 +7754,7 @@
             <a:r>
               <a:rPr lang="en-US" sz="1300" dirty="0">
                 <a:solidFill>
-                  <a:srgbClr val="9FB2C9"/>
+                  <a:srgbClr val="8A7E72"/>
                 </a:solidFill>
                 <a:latin typeface="Calibri" pitchFamily="34" charset="0"/>
                 <a:ea typeface="Calibri" pitchFamily="34" charset="-122"/>
@@ -7785,13 +7807,18 @@
             </a:avLst>
           </a:prstGeom>
           <a:solidFill>
-            <a:srgbClr val="13283F"/>
+            <a:srgbClr val="FFFFFF"/>
           </a:solidFill>
-          <a:ln/>
+          <a:ln w="12700">
+            <a:solidFill>
+              <a:srgbClr val="E3D9CC"/>
+            </a:solidFill>
+            <a:prstDash val="solid"/>
+          </a:ln>
           <a:effectLst>
-            <a:outerShdw sx="100000" sy="100000" kx="0" ky="0" algn="bl" rotWithShape="0" blurRad="127000" dist="38100" dir="5400000">
-              <a:srgbClr val="000000">
-                <a:alpha val="28000"/>
+            <a:outerShdw sx="100000" sy="100000" kx="0" ky="0" algn="bl" rotWithShape="0" blurRad="114300" dist="38100" dir="5400000">
+              <a:srgbClr val="7A6A55">
+                <a:alpha val="12000"/>
               </a:srgbClr>
             </a:outerShdw>
           </a:effectLst>
@@ -7812,9 +7839,14 @@
             <a:avLst/>
           </a:prstGeom>
           <a:solidFill>
-            <a:srgbClr val="16314F"/>
+            <a:srgbClr val="EADFD0"/>
           </a:solidFill>
-          <a:ln/>
+          <a:ln w="9525">
+            <a:solidFill>
+              <a:srgbClr val="E3D9CC"/>
+            </a:solidFill>
+            <a:prstDash val="solid"/>
+          </a:ln>
         </p:spPr>
       </p:sp>
       <p:pic>
@@ -7868,11 +7900,11 @@
             <a:r>
               <a:rPr lang="en-US" sz="1700" b="1" dirty="0">
                 <a:solidFill>
-                  <a:srgbClr val="EAF1FA"/>
-                </a:solidFill>
-                <a:latin typeface="Bookman Old Style" pitchFamily="34" charset="0"/>
-                <a:ea typeface="Bookman Old Style" pitchFamily="34" charset="-122"/>
-                <a:cs typeface="Bookman Old Style" pitchFamily="34" charset="-120"/>
+                  <a:srgbClr val="33302B"/>
+                </a:solidFill>
+                <a:latin typeface="Georgia" pitchFamily="34" charset="0"/>
+                <a:ea typeface="Georgia" pitchFamily="34" charset="-122"/>
+                <a:cs typeface="Georgia" pitchFamily="34" charset="-120"/>
               </a:rPr>
               <a:t>Vendes valor</a:t>
             </a:r>
@@ -7907,7 +7939,7 @@
             <a:r>
               <a:rPr lang="en-US" sz="1300" dirty="0">
                 <a:solidFill>
-                  <a:srgbClr val="9FB2C9"/>
+                  <a:srgbClr val="8A7E72"/>
                 </a:solidFill>
                 <a:latin typeface="Calibri" pitchFamily="34" charset="0"/>
                 <a:ea typeface="Calibri" pitchFamily="34" charset="-122"/>
@@ -7960,13 +7992,18 @@
             </a:avLst>
           </a:prstGeom>
           <a:solidFill>
-            <a:srgbClr val="13283F"/>
+            <a:srgbClr val="FFFFFF"/>
           </a:solidFill>
-          <a:ln/>
+          <a:ln w="12700">
+            <a:solidFill>
+              <a:srgbClr val="E3D9CC"/>
+            </a:solidFill>
+            <a:prstDash val="solid"/>
+          </a:ln>
           <a:effectLst>
-            <a:outerShdw sx="100000" sy="100000" kx="0" ky="0" algn="bl" rotWithShape="0" blurRad="127000" dist="38100" dir="5400000">
-              <a:srgbClr val="000000">
-                <a:alpha val="28000"/>
+            <a:outerShdw sx="100000" sy="100000" kx="0" ky="0" algn="bl" rotWithShape="0" blurRad="114300" dist="38100" dir="5400000">
+              <a:srgbClr val="7A6A55">
+                <a:alpha val="12000"/>
               </a:srgbClr>
             </a:outerShdw>
           </a:effectLst>
@@ -7987,9 +8024,14 @@
             <a:avLst/>
           </a:prstGeom>
           <a:solidFill>
-            <a:srgbClr val="16314F"/>
+            <a:srgbClr val="EADFD0"/>
           </a:solidFill>
-          <a:ln/>
+          <a:ln w="9525">
+            <a:solidFill>
+              <a:srgbClr val="E3D9CC"/>
+            </a:solidFill>
+            <a:prstDash val="solid"/>
+          </a:ln>
         </p:spPr>
       </p:sp>
       <p:pic>
@@ -8043,11 +8085,11 @@
             <a:r>
               <a:rPr lang="en-US" sz="1700" b="1" dirty="0">
                 <a:solidFill>
-                  <a:srgbClr val="EAF1FA"/>
-                </a:solidFill>
-                <a:latin typeface="Bookman Old Style" pitchFamily="34" charset="0"/>
-                <a:ea typeface="Bookman Old Style" pitchFamily="34" charset="-122"/>
-                <a:cs typeface="Bookman Old Style" pitchFamily="34" charset="-120"/>
+                  <a:srgbClr val="33302B"/>
+                </a:solidFill>
+                <a:latin typeface="Georgia" pitchFamily="34" charset="0"/>
+                <a:ea typeface="Georgia" pitchFamily="34" charset="-122"/>
+                <a:cs typeface="Georgia" pitchFamily="34" charset="-120"/>
               </a:rPr>
               <a:t>Cobras mais</a:t>
             </a:r>
@@ -8082,7 +8124,7 @@
             <a:r>
               <a:rPr lang="en-US" sz="1300" dirty="0">
                 <a:solidFill>
-                  <a:srgbClr val="9FB2C9"/>
+                  <a:srgbClr val="8A7E72"/>
                 </a:solidFill>
                 <a:latin typeface="Calibri" pitchFamily="34" charset="0"/>
                 <a:ea typeface="Calibri" pitchFamily="34" charset="-122"/>
@@ -8121,7 +8163,7 @@
             <a:r>
               <a:rPr lang="en-US" sz="1600" i="1" dirty="0">
                 <a:solidFill>
-                  <a:srgbClr val="C9A961"/>
+                  <a:srgbClr val="B1937E"/>
                 </a:solidFill>
                 <a:latin typeface="Calibri" pitchFamily="34" charset="0"/>
                 <a:ea typeface="Calibri" pitchFamily="34" charset="-122"/>
@@ -8150,7 +8192,7 @@
           <a:noFill/>
           <a:ln w="9525">
             <a:solidFill>
-              <a:srgbClr val="5C708A">
+              <a:srgbClr val="A89A86">
                 <a:alpha val="60000"/>
               </a:srgbClr>
             </a:solidFill>
@@ -8185,7 +8227,7 @@
             <a:r>
               <a:rPr lang="en-US" sz="900" dirty="0">
                 <a:solidFill>
-                  <a:srgbClr val="5C708A"/>
+                  <a:srgbClr val="A89A86"/>
                 </a:solidFill>
                 <a:latin typeface="Calibri" pitchFamily="34" charset="0"/>
                 <a:ea typeface="Calibri" pitchFamily="34" charset="-122"/>
@@ -8224,7 +8266,7 @@
             <a:r>
               <a:rPr lang="en-US" sz="900" dirty="0">
                 <a:solidFill>
-                  <a:srgbClr val="5C708A"/>
+                  <a:srgbClr val="A89A86"/>
                 </a:solidFill>
                 <a:latin typeface="Calibri" pitchFamily="34" charset="0"/>
                 <a:ea typeface="Calibri" pitchFamily="34" charset="-122"/>
@@ -8250,7 +8292,7 @@
     <p:bg>
       <p:bgPr>
         <a:solidFill>
-          <a:srgbClr val="0B1D33"/>
+          <a:srgbClr val="F8F6F3"/>
         </a:solidFill>
       </p:bgPr>
     </p:bg>
@@ -8295,7 +8337,7 @@
             <a:r>
               <a:rPr lang="en-US" sz="1200" b="1" spc="300" kern="0" dirty="0">
                 <a:solidFill>
-                  <a:srgbClr val="4A9EFF"/>
+                  <a:srgbClr val="9A7B66"/>
                 </a:solidFill>
                 <a:latin typeface="Calibri" pitchFamily="34" charset="0"/>
                 <a:ea typeface="Calibri" pitchFamily="34" charset="-122"/>
@@ -8334,11 +8376,11 @@
             <a:r>
               <a:rPr lang="en-US" sz="3200" b="1" dirty="0">
                 <a:solidFill>
-                  <a:srgbClr val="EAF1FA"/>
-                </a:solidFill>
-                <a:latin typeface="Bookman Old Style" pitchFamily="34" charset="0"/>
-                <a:ea typeface="Bookman Old Style" pitchFamily="34" charset="-122"/>
-                <a:cs typeface="Bookman Old Style" pitchFamily="34" charset="-120"/>
+                  <a:srgbClr val="33302B"/>
+                </a:solidFill>
+                <a:latin typeface="Georgia" pitchFamily="34" charset="0"/>
+                <a:ea typeface="Georgia" pitchFamily="34" charset="-122"/>
+                <a:cs typeface="Georgia" pitchFamily="34" charset="-120"/>
               </a:rPr>
               <a:t>Erros comuns de posicionamento</a:t>
             </a:r>
@@ -8363,13 +8405,18 @@
             </a:avLst>
           </a:prstGeom>
           <a:solidFill>
-            <a:srgbClr val="13283F"/>
+            <a:srgbClr val="FFFFFF"/>
           </a:solidFill>
-          <a:ln/>
+          <a:ln w="12700">
+            <a:solidFill>
+              <a:srgbClr val="E3D9CC"/>
+            </a:solidFill>
+            <a:prstDash val="solid"/>
+          </a:ln>
           <a:effectLst>
-            <a:outerShdw sx="100000" sy="100000" kx="0" ky="0" algn="bl" rotWithShape="0" blurRad="127000" dist="38100" dir="5400000">
-              <a:srgbClr val="000000">
-                <a:alpha val="28000"/>
+            <a:outerShdw sx="100000" sy="100000" kx="0" ky="0" algn="bl" rotWithShape="0" blurRad="114300" dist="38100" dir="5400000">
+              <a:srgbClr val="7A6A55">
+                <a:alpha val="12000"/>
               </a:srgbClr>
             </a:outerShdw>
           </a:effectLst>
@@ -8390,9 +8437,14 @@
             <a:avLst/>
           </a:prstGeom>
           <a:solidFill>
-            <a:srgbClr val="16314F"/>
+            <a:srgbClr val="EADFD0"/>
           </a:solidFill>
-          <a:ln/>
+          <a:ln w="9525">
+            <a:solidFill>
+              <a:srgbClr val="E3D9CC"/>
+            </a:solidFill>
+            <a:prstDash val="solid"/>
+          </a:ln>
         </p:spPr>
       </p:sp>
       <p:pic>
@@ -8446,11 +8498,11 @@
             <a:r>
               <a:rPr lang="en-US" sz="1800" b="1" dirty="0">
                 <a:solidFill>
-                  <a:srgbClr val="EAF1FA"/>
-                </a:solidFill>
-                <a:latin typeface="Bookman Old Style" pitchFamily="34" charset="0"/>
-                <a:ea typeface="Bookman Old Style" pitchFamily="34" charset="-122"/>
-                <a:cs typeface="Bookman Old Style" pitchFamily="34" charset="-120"/>
+                  <a:srgbClr val="33302B"/>
+                </a:solidFill>
+                <a:latin typeface="Georgia" pitchFamily="34" charset="0"/>
+                <a:ea typeface="Georgia" pitchFamily="34" charset="-122"/>
+                <a:cs typeface="Georgia" pitchFamily="34" charset="-120"/>
               </a:rPr>
               <a:t>Copiar a concorrência</a:t>
             </a:r>
@@ -8485,7 +8537,7 @@
             <a:r>
               <a:rPr lang="en-US" sz="1400" dirty="0">
                 <a:solidFill>
-                  <a:srgbClr val="9FB2C9"/>
+                  <a:srgbClr val="8A7E72"/>
                 </a:solidFill>
                 <a:latin typeface="Calibri" pitchFamily="34" charset="0"/>
                 <a:ea typeface="Calibri" pitchFamily="34" charset="-122"/>
@@ -8514,13 +8566,18 @@
             </a:avLst>
           </a:prstGeom>
           <a:solidFill>
-            <a:srgbClr val="13283F"/>
+            <a:srgbClr val="FFFFFF"/>
           </a:solidFill>
-          <a:ln/>
+          <a:ln w="12700">
+            <a:solidFill>
+              <a:srgbClr val="E3D9CC"/>
+            </a:solidFill>
+            <a:prstDash val="solid"/>
+          </a:ln>
           <a:effectLst>
-            <a:outerShdw sx="100000" sy="100000" kx="0" ky="0" algn="bl" rotWithShape="0" blurRad="127000" dist="38100" dir="5400000">
-              <a:srgbClr val="000000">
-                <a:alpha val="28000"/>
+            <a:outerShdw sx="100000" sy="100000" kx="0" ky="0" algn="bl" rotWithShape="0" blurRad="114300" dist="38100" dir="5400000">
+              <a:srgbClr val="7A6A55">
+                <a:alpha val="12000"/>
               </a:srgbClr>
             </a:outerShdw>
           </a:effectLst>
@@ -8541,9 +8598,14 @@
             <a:avLst/>
           </a:prstGeom>
           <a:solidFill>
-            <a:srgbClr val="16314F"/>
+            <a:srgbClr val="EADFD0"/>
           </a:solidFill>
-          <a:ln/>
+          <a:ln w="9525">
+            <a:solidFill>
+              <a:srgbClr val="E3D9CC"/>
+            </a:solidFill>
+            <a:prstDash val="solid"/>
+          </a:ln>
         </p:spPr>
       </p:sp>
       <p:pic>
@@ -8597,11 +8659,11 @@
             <a:r>
               <a:rPr lang="en-US" sz="1800" b="1" dirty="0">
                 <a:solidFill>
-                  <a:srgbClr val="EAF1FA"/>
-                </a:solidFill>
-                <a:latin typeface="Bookman Old Style" pitchFamily="34" charset="0"/>
-                <a:ea typeface="Bookman Old Style" pitchFamily="34" charset="-122"/>
-                <a:cs typeface="Bookman Old Style" pitchFamily="34" charset="-120"/>
+                  <a:srgbClr val="33302B"/>
+                </a:solidFill>
+                <a:latin typeface="Georgia" pitchFamily="34" charset="0"/>
+                <a:ea typeface="Georgia" pitchFamily="34" charset="-122"/>
+                <a:cs typeface="Georgia" pitchFamily="34" charset="-120"/>
               </a:rPr>
               <a:t>Querer agradar a toda a gente</a:t>
             </a:r>
@@ -8636,7 +8698,7 @@
             <a:r>
               <a:rPr lang="en-US" sz="1400" dirty="0">
                 <a:solidFill>
-                  <a:srgbClr val="9FB2C9"/>
+                  <a:srgbClr val="8A7E72"/>
                 </a:solidFill>
                 <a:latin typeface="Calibri" pitchFamily="34" charset="0"/>
                 <a:ea typeface="Calibri" pitchFamily="34" charset="-122"/>
@@ -8665,13 +8727,18 @@
             </a:avLst>
           </a:prstGeom>
           <a:solidFill>
-            <a:srgbClr val="13283F"/>
+            <a:srgbClr val="FFFFFF"/>
           </a:solidFill>
-          <a:ln/>
+          <a:ln w="12700">
+            <a:solidFill>
+              <a:srgbClr val="E3D9CC"/>
+            </a:solidFill>
+            <a:prstDash val="solid"/>
+          </a:ln>
           <a:effectLst>
-            <a:outerShdw sx="100000" sy="100000" kx="0" ky="0" algn="bl" rotWithShape="0" blurRad="127000" dist="38100" dir="5400000">
-              <a:srgbClr val="000000">
-                <a:alpha val="28000"/>
+            <a:outerShdw sx="100000" sy="100000" kx="0" ky="0" algn="bl" rotWithShape="0" blurRad="114300" dist="38100" dir="5400000">
+              <a:srgbClr val="7A6A55">
+                <a:alpha val="12000"/>
               </a:srgbClr>
             </a:outerShdw>
           </a:effectLst>
@@ -8692,9 +8759,14 @@
             <a:avLst/>
           </a:prstGeom>
           <a:solidFill>
-            <a:srgbClr val="16314F"/>
+            <a:srgbClr val="EADFD0"/>
           </a:solidFill>
-          <a:ln/>
+          <a:ln w="9525">
+            <a:solidFill>
+              <a:srgbClr val="E3D9CC"/>
+            </a:solidFill>
+            <a:prstDash val="solid"/>
+          </a:ln>
         </p:spPr>
       </p:sp>
       <p:pic>
@@ -8748,11 +8820,11 @@
             <a:r>
               <a:rPr lang="en-US" sz="1800" b="1" dirty="0">
                 <a:solidFill>
-                  <a:srgbClr val="EAF1FA"/>
-                </a:solidFill>
-                <a:latin typeface="Bookman Old Style" pitchFamily="34" charset="0"/>
-                <a:ea typeface="Bookman Old Style" pitchFamily="34" charset="-122"/>
-                <a:cs typeface="Bookman Old Style" pitchFamily="34" charset="-120"/>
+                  <a:srgbClr val="33302B"/>
+                </a:solidFill>
+                <a:latin typeface="Georgia" pitchFamily="34" charset="0"/>
+                <a:ea typeface="Georgia" pitchFamily="34" charset="-122"/>
+                <a:cs typeface="Georgia" pitchFamily="34" charset="-120"/>
               </a:rPr>
               <a:t>Falar de ti, não do casal</a:t>
             </a:r>
@@ -8787,7 +8859,7 @@
             <a:r>
               <a:rPr lang="en-US" sz="1400" dirty="0">
                 <a:solidFill>
-                  <a:srgbClr val="9FB2C9"/>
+                  <a:srgbClr val="8A7E72"/>
                 </a:solidFill>
                 <a:latin typeface="Calibri" pitchFamily="34" charset="0"/>
                 <a:ea typeface="Calibri" pitchFamily="34" charset="-122"/>
@@ -8816,13 +8888,18 @@
             </a:avLst>
           </a:prstGeom>
           <a:solidFill>
-            <a:srgbClr val="13283F"/>
+            <a:srgbClr val="FFFFFF"/>
           </a:solidFill>
-          <a:ln/>
+          <a:ln w="12700">
+            <a:solidFill>
+              <a:srgbClr val="E3D9CC"/>
+            </a:solidFill>
+            <a:prstDash val="solid"/>
+          </a:ln>
           <a:effectLst>
-            <a:outerShdw sx="100000" sy="100000" kx="0" ky="0" algn="bl" rotWithShape="0" blurRad="127000" dist="38100" dir="5400000">
-              <a:srgbClr val="000000">
-                <a:alpha val="28000"/>
+            <a:outerShdw sx="100000" sy="100000" kx="0" ky="0" algn="bl" rotWithShape="0" blurRad="114300" dist="38100" dir="5400000">
+              <a:srgbClr val="7A6A55">
+                <a:alpha val="12000"/>
               </a:srgbClr>
             </a:outerShdw>
           </a:effectLst>
@@ -8843,9 +8920,14 @@
             <a:avLst/>
           </a:prstGeom>
           <a:solidFill>
-            <a:srgbClr val="16314F"/>
+            <a:srgbClr val="EADFD0"/>
           </a:solidFill>
-          <a:ln/>
+          <a:ln w="9525">
+            <a:solidFill>
+              <a:srgbClr val="E3D9CC"/>
+            </a:solidFill>
+            <a:prstDash val="solid"/>
+          </a:ln>
         </p:spPr>
       </p:sp>
       <p:pic>
@@ -8899,11 +8981,11 @@
             <a:r>
               <a:rPr lang="en-US" sz="1800" b="1" dirty="0">
                 <a:solidFill>
-                  <a:srgbClr val="EAF1FA"/>
-                </a:solidFill>
-                <a:latin typeface="Bookman Old Style" pitchFamily="34" charset="0"/>
-                <a:ea typeface="Bookman Old Style" pitchFamily="34" charset="-122"/>
-                <a:cs typeface="Bookman Old Style" pitchFamily="34" charset="-120"/>
+                  <a:srgbClr val="33302B"/>
+                </a:solidFill>
+                <a:latin typeface="Georgia" pitchFamily="34" charset="0"/>
+                <a:ea typeface="Georgia" pitchFamily="34" charset="-122"/>
+                <a:cs typeface="Georgia" pitchFamily="34" charset="-120"/>
               </a:rPr>
               <a:t>Listar serviços, não emoções</a:t>
             </a:r>
@@ -8938,7 +9020,7 @@
             <a:r>
               <a:rPr lang="en-US" sz="1400" dirty="0">
                 <a:solidFill>
-                  <a:srgbClr val="9FB2C9"/>
+                  <a:srgbClr val="8A7E72"/>
                 </a:solidFill>
                 <a:latin typeface="Calibri" pitchFamily="34" charset="0"/>
                 <a:ea typeface="Calibri" pitchFamily="34" charset="-122"/>
@@ -8967,7 +9049,7 @@
           <a:noFill/>
           <a:ln w="9525">
             <a:solidFill>
-              <a:srgbClr val="5C708A">
+              <a:srgbClr val="A89A86">
                 <a:alpha val="60000"/>
               </a:srgbClr>
             </a:solidFill>
@@ -9002,7 +9084,7 @@
             <a:r>
               <a:rPr lang="en-US" sz="900" dirty="0">
                 <a:solidFill>
-                  <a:srgbClr val="5C708A"/>
+                  <a:srgbClr val="A89A86"/>
                 </a:solidFill>
                 <a:latin typeface="Calibri" pitchFamily="34" charset="0"/>
                 <a:ea typeface="Calibri" pitchFamily="34" charset="-122"/>
@@ -9041,7 +9123,7 @@
             <a:r>
               <a:rPr lang="en-US" sz="900" dirty="0">
                 <a:solidFill>
-                  <a:srgbClr val="5C708A"/>
+                  <a:srgbClr val="A89A86"/>
                 </a:solidFill>
                 <a:latin typeface="Calibri" pitchFamily="34" charset="0"/>
                 <a:ea typeface="Calibri" pitchFamily="34" charset="-122"/>
@@ -9067,7 +9149,7 @@
     <p:bg>
       <p:bgPr>
         <a:solidFill>
-          <a:srgbClr val="0B1D33"/>
+          <a:srgbClr val="F8F6F3"/>
         </a:solidFill>
       </p:bgPr>
     </p:bg>
@@ -9087,51 +9169,7 @@
       </p:grpSpPr>
       <p:sp>
         <p:nvSpPr>
-          <p:cNvPr id="2" name="Shape 0"/>
-          <p:cNvSpPr/>
-          <p:nvPr/>
-        </p:nvSpPr>
-        <p:spPr>
-          <a:xfrm>
-            <a:off x="7772400" y="-1371600"/>
-            <a:ext cx="5486400" cy="5486400"/>
-          </a:xfrm>
-          <a:prstGeom prst="ellipse">
-            <a:avLst/>
-          </a:prstGeom>
-          <a:solidFill>
-            <a:srgbClr val="4A9EFF">
-              <a:alpha val="10000"/>
-            </a:srgbClr>
-          </a:solidFill>
-          <a:ln/>
-        </p:spPr>
-      </p:sp>
-      <p:sp>
-        <p:nvSpPr>
-          <p:cNvPr id="3" name="Shape 1"/>
-          <p:cNvSpPr/>
-          <p:nvPr/>
-        </p:nvSpPr>
-        <p:spPr>
-          <a:xfrm>
-            <a:off x="-1371600" y="4114800"/>
-            <a:ext cx="4572000" cy="4572000"/>
-          </a:xfrm>
-          <a:prstGeom prst="ellipse">
-            <a:avLst/>
-          </a:prstGeom>
-          <a:solidFill>
-            <a:srgbClr val="C9A961">
-              <a:alpha val="8000"/>
-            </a:srgbClr>
-          </a:solidFill>
-          <a:ln/>
-        </p:spPr>
-      </p:sp>
-      <p:sp>
-        <p:nvSpPr>
-          <p:cNvPr id="4" name="Text 2"/>
+          <p:cNvPr id="2" name="Text 0"/>
           <p:cNvSpPr/>
           <p:nvPr/>
         </p:nvSpPr>
@@ -9156,11 +9194,11 @@
             <a:r>
               <a:rPr lang="en-US" sz="15000" b="1" dirty="0">
                 <a:solidFill>
-                  <a:srgbClr val="16314F"/>
-                </a:solidFill>
-                <a:latin typeface="Bookman Old Style" pitchFamily="34" charset="0"/>
-                <a:ea typeface="Bookman Old Style" pitchFamily="34" charset="-122"/>
-                <a:cs typeface="Bookman Old Style" pitchFamily="34" charset="-120"/>
+                  <a:srgbClr val="EADFD0"/>
+                </a:solidFill>
+                <a:latin typeface="Georgia" pitchFamily="34" charset="0"/>
+                <a:ea typeface="Georgia" pitchFamily="34" charset="-122"/>
+                <a:cs typeface="Georgia" pitchFamily="34" charset="-120"/>
               </a:rPr>
               <a:t>C</a:t>
             </a:r>
@@ -9170,7 +9208,7 @@
       </p:sp>
       <p:sp>
         <p:nvSpPr>
-          <p:cNvPr id="5" name="Text 3"/>
+          <p:cNvPr id="3" name="Text 1"/>
           <p:cNvSpPr/>
           <p:nvPr/>
         </p:nvSpPr>
@@ -9195,7 +9233,7 @@
             <a:r>
               <a:rPr lang="en-US" sz="1300" b="1" spc="400" kern="0" dirty="0">
                 <a:solidFill>
-                  <a:srgbClr val="C9A961"/>
+                  <a:srgbClr val="B1937E"/>
                 </a:solidFill>
                 <a:latin typeface="Calibri" pitchFamily="34" charset="0"/>
                 <a:ea typeface="Calibri" pitchFamily="34" charset="-122"/>
@@ -9209,7 +9247,7 @@
       </p:sp>
       <p:sp>
         <p:nvSpPr>
-          <p:cNvPr id="6" name="Text 4"/>
+          <p:cNvPr id="4" name="Text 2"/>
           <p:cNvSpPr/>
           <p:nvPr/>
         </p:nvSpPr>
@@ -9232,23 +9270,23 @@
               <a:buNone/>
             </a:pPr>
             <a:r>
-              <a:rPr lang="en-US" sz="4600" b="1" dirty="0">
-                <a:solidFill>
-                  <a:srgbClr val="EAF1FA"/>
-                </a:solidFill>
-                <a:latin typeface="Bookman Old Style" pitchFamily="34" charset="0"/>
-                <a:ea typeface="Bookman Old Style" pitchFamily="34" charset="-122"/>
-                <a:cs typeface="Bookman Old Style" pitchFamily="34" charset="-120"/>
+              <a:rPr lang="en-US" sz="4000" b="1" dirty="0">
+                <a:solidFill>
+                  <a:srgbClr val="33302B"/>
+                </a:solidFill>
+                <a:latin typeface="Georgia" pitchFamily="34" charset="0"/>
+                <a:ea typeface="Georgia" pitchFamily="34" charset="-122"/>
+                <a:cs typeface="Georgia" pitchFamily="34" charset="-120"/>
               </a:rPr>
               <a:t>O Trabalho desta Semana</a:t>
             </a:r>
-            <a:endParaRPr lang="en-US" sz="4600" dirty="0"/>
-          </a:p>
-        </p:txBody>
-      </p:sp>
-      <p:sp>
-        <p:nvSpPr>
-          <p:cNvPr id="7" name="Text 5"/>
+            <a:endParaRPr lang="en-US" sz="4000" dirty="0"/>
+          </a:p>
+        </p:txBody>
+      </p:sp>
+      <p:sp>
+        <p:nvSpPr>
+          <p:cNvPr id="5" name="Text 3"/>
           <p:cNvSpPr/>
           <p:nvPr/>
         </p:nvSpPr>
@@ -9273,7 +9311,7 @@
             <a:r>
               <a:rPr lang="en-US" sz="1600" dirty="0">
                 <a:solidFill>
-                  <a:srgbClr val="9FB2C9"/>
+                  <a:srgbClr val="8A7E72"/>
                 </a:solidFill>
                 <a:latin typeface="Calibri" pitchFamily="34" charset="0"/>
                 <a:ea typeface="Calibri" pitchFamily="34" charset="-122"/>
@@ -9287,7 +9325,7 @@
       </p:sp>
       <p:sp>
         <p:nvSpPr>
-          <p:cNvPr id="8" name="Shape 6"/>
+          <p:cNvPr id="6" name="Shape 4"/>
           <p:cNvSpPr/>
           <p:nvPr/>
         </p:nvSpPr>
@@ -9302,7 +9340,7 @@
           <a:noFill/>
           <a:ln w="9525">
             <a:solidFill>
-              <a:srgbClr val="5C708A">
+              <a:srgbClr val="A89A86">
                 <a:alpha val="60000"/>
               </a:srgbClr>
             </a:solidFill>
@@ -9312,7 +9350,7 @@
       </p:sp>
       <p:sp>
         <p:nvSpPr>
-          <p:cNvPr id="9" name="Text 7"/>
+          <p:cNvPr id="7" name="Text 5"/>
           <p:cNvSpPr/>
           <p:nvPr/>
         </p:nvSpPr>
@@ -9337,7 +9375,7 @@
             <a:r>
               <a:rPr lang="en-US" sz="900" dirty="0">
                 <a:solidFill>
-                  <a:srgbClr val="5C708A"/>
+                  <a:srgbClr val="A89A86"/>
                 </a:solidFill>
                 <a:latin typeface="Calibri" pitchFamily="34" charset="0"/>
                 <a:ea typeface="Calibri" pitchFamily="34" charset="-122"/>
@@ -9351,7 +9389,7 @@
       </p:sp>
       <p:sp>
         <p:nvSpPr>
-          <p:cNvPr id="10" name="Text 8"/>
+          <p:cNvPr id="8" name="Text 6"/>
           <p:cNvSpPr/>
           <p:nvPr/>
         </p:nvSpPr>
@@ -9376,7 +9414,7 @@
             <a:r>
               <a:rPr lang="en-US" sz="900" dirty="0">
                 <a:solidFill>
-                  <a:srgbClr val="5C708A"/>
+                  <a:srgbClr val="A89A86"/>
                 </a:solidFill>
                 <a:latin typeface="Calibri" pitchFamily="34" charset="0"/>
                 <a:ea typeface="Calibri" pitchFamily="34" charset="-122"/>
@@ -9402,7 +9440,7 @@
     <p:bg>
       <p:bgPr>
         <a:solidFill>
-          <a:srgbClr val="0B1D33"/>
+          <a:srgbClr val="F8F6F3"/>
         </a:solidFill>
       </p:bgPr>
     </p:bg>
@@ -9447,7 +9485,7 @@
             <a:r>
               <a:rPr lang="en-US" sz="1200" b="1" spc="300" kern="0" dirty="0">
                 <a:solidFill>
-                  <a:srgbClr val="4A9EFF"/>
+                  <a:srgbClr val="9A7B66"/>
                 </a:solidFill>
                 <a:latin typeface="Calibri" pitchFamily="34" charset="0"/>
                 <a:ea typeface="Calibri" pitchFamily="34" charset="-122"/>
@@ -9486,11 +9524,11 @@
             <a:r>
               <a:rPr lang="en-US" sz="3600" b="1" dirty="0">
                 <a:solidFill>
-                  <a:srgbClr val="EAF1FA"/>
-                </a:solidFill>
-                <a:latin typeface="Bookman Old Style" pitchFamily="34" charset="0"/>
-                <a:ea typeface="Bookman Old Style" pitchFamily="34" charset="-122"/>
-                <a:cs typeface="Bookman Old Style" pitchFamily="34" charset="-120"/>
+                  <a:srgbClr val="33302B"/>
+                </a:solidFill>
+                <a:latin typeface="Georgia" pitchFamily="34" charset="0"/>
+                <a:ea typeface="Georgia" pitchFamily="34" charset="-122"/>
+                <a:cs typeface="Georgia" pitchFamily="34" charset="-120"/>
               </a:rPr>
               <a:t>Antes da estratégia, a clareza</a:t>
             </a:r>
@@ -9515,13 +9553,18 @@
             </a:avLst>
           </a:prstGeom>
           <a:solidFill>
-            <a:srgbClr val="13283F"/>
+            <a:srgbClr val="FFFFFF"/>
           </a:solidFill>
-          <a:ln/>
+          <a:ln w="12700">
+            <a:solidFill>
+              <a:srgbClr val="E3D9CC"/>
+            </a:solidFill>
+            <a:prstDash val="solid"/>
+          </a:ln>
           <a:effectLst>
-            <a:outerShdw sx="100000" sy="100000" kx="0" ky="0" algn="bl" rotWithShape="0" blurRad="127000" dist="38100" dir="5400000">
-              <a:srgbClr val="000000">
-                <a:alpha val="28000"/>
+            <a:outerShdw sx="100000" sy="100000" kx="0" ky="0" algn="bl" rotWithShape="0" blurRad="114300" dist="38100" dir="5400000">
+              <a:srgbClr val="7A6A55">
+                <a:alpha val="12000"/>
               </a:srgbClr>
             </a:outerShdw>
           </a:effectLst>
@@ -9542,9 +9585,14 @@
             <a:avLst/>
           </a:prstGeom>
           <a:solidFill>
-            <a:srgbClr val="16314F"/>
+            <a:srgbClr val="EADFD0"/>
           </a:solidFill>
-          <a:ln/>
+          <a:ln w="9525">
+            <a:solidFill>
+              <a:srgbClr val="E3D9CC"/>
+            </a:solidFill>
+            <a:prstDash val="solid"/>
+          </a:ln>
         </p:spPr>
       </p:sp>
       <p:pic>
@@ -9598,11 +9646,11 @@
             <a:r>
               <a:rPr lang="en-US" sz="3000" b="1" dirty="0">
                 <a:solidFill>
-                  <a:srgbClr val="C9A961"/>
-                </a:solidFill>
-                <a:latin typeface="Bookman Old Style" pitchFamily="34" charset="0"/>
-                <a:ea typeface="Bookman Old Style" pitchFamily="34" charset="-122"/>
-                <a:cs typeface="Bookman Old Style" pitchFamily="34" charset="-120"/>
+                  <a:srgbClr val="B1937E"/>
+                </a:solidFill>
+                <a:latin typeface="Georgia" pitchFamily="34" charset="0"/>
+                <a:ea typeface="Georgia" pitchFamily="34" charset="-122"/>
+                <a:cs typeface="Georgia" pitchFamily="34" charset="-120"/>
               </a:rPr>
               <a:t>01</a:t>
             </a:r>
@@ -9637,7 +9685,7 @@
             <a:r>
               <a:rPr lang="en-US" sz="1900" b="1" dirty="0">
                 <a:solidFill>
-                  <a:srgbClr val="EAF1FA"/>
+                  <a:srgbClr val="33302B"/>
                 </a:solidFill>
                 <a:latin typeface="Calibri" pitchFamily="34" charset="0"/>
                 <a:ea typeface="Calibri" pitchFamily="34" charset="-122"/>
@@ -9676,7 +9724,7 @@
             <a:r>
               <a:rPr lang="en-US" sz="1350" dirty="0">
                 <a:solidFill>
-                  <a:srgbClr val="9FB2C9"/>
+                  <a:srgbClr val="8A7E72"/>
                 </a:solidFill>
                 <a:latin typeface="Calibri" pitchFamily="34" charset="0"/>
                 <a:ea typeface="Calibri" pitchFamily="34" charset="-122"/>
@@ -9705,13 +9753,18 @@
             </a:avLst>
           </a:prstGeom>
           <a:solidFill>
-            <a:srgbClr val="13283F"/>
+            <a:srgbClr val="FFFFFF"/>
           </a:solidFill>
-          <a:ln/>
+          <a:ln w="12700">
+            <a:solidFill>
+              <a:srgbClr val="E3D9CC"/>
+            </a:solidFill>
+            <a:prstDash val="solid"/>
+          </a:ln>
           <a:effectLst>
-            <a:outerShdw sx="100000" sy="100000" kx="0" ky="0" algn="bl" rotWithShape="0" blurRad="127000" dist="38100" dir="5400000">
-              <a:srgbClr val="000000">
-                <a:alpha val="28000"/>
+            <a:outerShdw sx="100000" sy="100000" kx="0" ky="0" algn="bl" rotWithShape="0" blurRad="114300" dist="38100" dir="5400000">
+              <a:srgbClr val="7A6A55">
+                <a:alpha val="12000"/>
               </a:srgbClr>
             </a:outerShdw>
           </a:effectLst>
@@ -9732,9 +9785,14 @@
             <a:avLst/>
           </a:prstGeom>
           <a:solidFill>
-            <a:srgbClr val="16314F"/>
+            <a:srgbClr val="EADFD0"/>
           </a:solidFill>
-          <a:ln/>
+          <a:ln w="9525">
+            <a:solidFill>
+              <a:srgbClr val="E3D9CC"/>
+            </a:solidFill>
+            <a:prstDash val="solid"/>
+          </a:ln>
         </p:spPr>
       </p:sp>
       <p:pic>
@@ -9788,11 +9846,11 @@
             <a:r>
               <a:rPr lang="en-US" sz="3000" b="1" dirty="0">
                 <a:solidFill>
-                  <a:srgbClr val="C9A961"/>
-                </a:solidFill>
-                <a:latin typeface="Bookman Old Style" pitchFamily="34" charset="0"/>
-                <a:ea typeface="Bookman Old Style" pitchFamily="34" charset="-122"/>
-                <a:cs typeface="Bookman Old Style" pitchFamily="34" charset="-120"/>
+                  <a:srgbClr val="B1937E"/>
+                </a:solidFill>
+                <a:latin typeface="Georgia" pitchFamily="34" charset="0"/>
+                <a:ea typeface="Georgia" pitchFamily="34" charset="-122"/>
+                <a:cs typeface="Georgia" pitchFamily="34" charset="-120"/>
               </a:rPr>
               <a:t>02</a:t>
             </a:r>
@@ -9827,7 +9885,7 @@
             <a:r>
               <a:rPr lang="en-US" sz="1900" b="1" dirty="0">
                 <a:solidFill>
-                  <a:srgbClr val="EAF1FA"/>
+                  <a:srgbClr val="33302B"/>
                 </a:solidFill>
                 <a:latin typeface="Calibri" pitchFamily="34" charset="0"/>
                 <a:ea typeface="Calibri" pitchFamily="34" charset="-122"/>
@@ -9866,7 +9924,7 @@
             <a:r>
               <a:rPr lang="en-US" sz="1350" dirty="0">
                 <a:solidFill>
-                  <a:srgbClr val="9FB2C9"/>
+                  <a:srgbClr val="8A7E72"/>
                 </a:solidFill>
                 <a:latin typeface="Calibri" pitchFamily="34" charset="0"/>
                 <a:ea typeface="Calibri" pitchFamily="34" charset="-122"/>
@@ -9895,13 +9953,18 @@
             </a:avLst>
           </a:prstGeom>
           <a:solidFill>
-            <a:srgbClr val="13283F"/>
+            <a:srgbClr val="FFFFFF"/>
           </a:solidFill>
-          <a:ln/>
+          <a:ln w="12700">
+            <a:solidFill>
+              <a:srgbClr val="E3D9CC"/>
+            </a:solidFill>
+            <a:prstDash val="solid"/>
+          </a:ln>
           <a:effectLst>
-            <a:outerShdw sx="100000" sy="100000" kx="0" ky="0" algn="bl" rotWithShape="0" blurRad="127000" dist="38100" dir="5400000">
-              <a:srgbClr val="000000">
-                <a:alpha val="28000"/>
+            <a:outerShdw sx="100000" sy="100000" kx="0" ky="0" algn="bl" rotWithShape="0" blurRad="114300" dist="38100" dir="5400000">
+              <a:srgbClr val="7A6A55">
+                <a:alpha val="12000"/>
               </a:srgbClr>
             </a:outerShdw>
           </a:effectLst>
@@ -9922,9 +9985,14 @@
             <a:avLst/>
           </a:prstGeom>
           <a:solidFill>
-            <a:srgbClr val="16314F"/>
+            <a:srgbClr val="EADFD0"/>
           </a:solidFill>
-          <a:ln/>
+          <a:ln w="9525">
+            <a:solidFill>
+              <a:srgbClr val="E3D9CC"/>
+            </a:solidFill>
+            <a:prstDash val="solid"/>
+          </a:ln>
         </p:spPr>
       </p:sp>
       <p:pic>
@@ -9978,11 +10046,11 @@
             <a:r>
               <a:rPr lang="en-US" sz="3000" b="1" dirty="0">
                 <a:solidFill>
-                  <a:srgbClr val="C9A961"/>
-                </a:solidFill>
-                <a:latin typeface="Bookman Old Style" pitchFamily="34" charset="0"/>
-                <a:ea typeface="Bookman Old Style" pitchFamily="34" charset="-122"/>
-                <a:cs typeface="Bookman Old Style" pitchFamily="34" charset="-120"/>
+                  <a:srgbClr val="B1937E"/>
+                </a:solidFill>
+                <a:latin typeface="Georgia" pitchFamily="34" charset="0"/>
+                <a:ea typeface="Georgia" pitchFamily="34" charset="-122"/>
+                <a:cs typeface="Georgia" pitchFamily="34" charset="-120"/>
               </a:rPr>
               <a:t>03</a:t>
             </a:r>
@@ -10017,7 +10085,7 @@
             <a:r>
               <a:rPr lang="en-US" sz="1900" b="1" dirty="0">
                 <a:solidFill>
-                  <a:srgbClr val="EAF1FA"/>
+                  <a:srgbClr val="33302B"/>
                 </a:solidFill>
                 <a:latin typeface="Calibri" pitchFamily="34" charset="0"/>
                 <a:ea typeface="Calibri" pitchFamily="34" charset="-122"/>
@@ -10056,7 +10124,7 @@
             <a:r>
               <a:rPr lang="en-US" sz="1350" dirty="0">
                 <a:solidFill>
-                  <a:srgbClr val="9FB2C9"/>
+                  <a:srgbClr val="8A7E72"/>
                 </a:solidFill>
                 <a:latin typeface="Calibri" pitchFamily="34" charset="0"/>
                 <a:ea typeface="Calibri" pitchFamily="34" charset="-122"/>
@@ -10085,13 +10153,18 @@
             </a:avLst>
           </a:prstGeom>
           <a:solidFill>
-            <a:srgbClr val="13283F"/>
+            <a:srgbClr val="FFFFFF"/>
           </a:solidFill>
-          <a:ln/>
+          <a:ln w="12700">
+            <a:solidFill>
+              <a:srgbClr val="E3D9CC"/>
+            </a:solidFill>
+            <a:prstDash val="solid"/>
+          </a:ln>
           <a:effectLst>
-            <a:outerShdw sx="100000" sy="100000" kx="0" ky="0" algn="bl" rotWithShape="0" blurRad="127000" dist="38100" dir="5400000">
-              <a:srgbClr val="000000">
-                <a:alpha val="28000"/>
+            <a:outerShdw sx="100000" sy="100000" kx="0" ky="0" algn="bl" rotWithShape="0" blurRad="114300" dist="38100" dir="5400000">
+              <a:srgbClr val="7A6A55">
+                <a:alpha val="12000"/>
               </a:srgbClr>
             </a:outerShdw>
           </a:effectLst>
@@ -10112,9 +10185,14 @@
             <a:avLst/>
           </a:prstGeom>
           <a:solidFill>
-            <a:srgbClr val="16314F"/>
+            <a:srgbClr val="EADFD0"/>
           </a:solidFill>
-          <a:ln/>
+          <a:ln w="9525">
+            <a:solidFill>
+              <a:srgbClr val="E3D9CC"/>
+            </a:solidFill>
+            <a:prstDash val="solid"/>
+          </a:ln>
         </p:spPr>
       </p:sp>
       <p:pic>
@@ -10168,11 +10246,11 @@
             <a:r>
               <a:rPr lang="en-US" sz="3000" b="1" dirty="0">
                 <a:solidFill>
-                  <a:srgbClr val="C9A961"/>
-                </a:solidFill>
-                <a:latin typeface="Bookman Old Style" pitchFamily="34" charset="0"/>
-                <a:ea typeface="Bookman Old Style" pitchFamily="34" charset="-122"/>
-                <a:cs typeface="Bookman Old Style" pitchFamily="34" charset="-120"/>
+                  <a:srgbClr val="B1937E"/>
+                </a:solidFill>
+                <a:latin typeface="Georgia" pitchFamily="34" charset="0"/>
+                <a:ea typeface="Georgia" pitchFamily="34" charset="-122"/>
+                <a:cs typeface="Georgia" pitchFamily="34" charset="-120"/>
               </a:rPr>
               <a:t>04</a:t>
             </a:r>
@@ -10207,7 +10285,7 @@
             <a:r>
               <a:rPr lang="en-US" sz="1900" b="1" dirty="0">
                 <a:solidFill>
-                  <a:srgbClr val="EAF1FA"/>
+                  <a:srgbClr val="33302B"/>
                 </a:solidFill>
                 <a:latin typeface="Calibri" pitchFamily="34" charset="0"/>
                 <a:ea typeface="Calibri" pitchFamily="34" charset="-122"/>
@@ -10246,7 +10324,7 @@
             <a:r>
               <a:rPr lang="en-US" sz="1350" dirty="0">
                 <a:solidFill>
-                  <a:srgbClr val="9FB2C9"/>
+                  <a:srgbClr val="8A7E72"/>
                 </a:solidFill>
                 <a:latin typeface="Calibri" pitchFamily="34" charset="0"/>
                 <a:ea typeface="Calibri" pitchFamily="34" charset="-122"/>
@@ -10275,7 +10353,7 @@
           <a:noFill/>
           <a:ln w="9525">
             <a:solidFill>
-              <a:srgbClr val="5C708A">
+              <a:srgbClr val="A89A86">
                 <a:alpha val="60000"/>
               </a:srgbClr>
             </a:solidFill>
@@ -10310,7 +10388,7 @@
             <a:r>
               <a:rPr lang="en-US" sz="900" dirty="0">
                 <a:solidFill>
-                  <a:srgbClr val="5C708A"/>
+                  <a:srgbClr val="A89A86"/>
                 </a:solidFill>
                 <a:latin typeface="Calibri" pitchFamily="34" charset="0"/>
                 <a:ea typeface="Calibri" pitchFamily="34" charset="-122"/>
@@ -10349,7 +10427,7 @@
             <a:r>
               <a:rPr lang="en-US" sz="900" dirty="0">
                 <a:solidFill>
-                  <a:srgbClr val="5C708A"/>
+                  <a:srgbClr val="A89A86"/>
                 </a:solidFill>
                 <a:latin typeface="Calibri" pitchFamily="34" charset="0"/>
                 <a:ea typeface="Calibri" pitchFamily="34" charset="-122"/>
@@ -10375,7 +10453,7 @@
     <p:bg>
       <p:bgPr>
         <a:solidFill>
-          <a:srgbClr val="0B1D33"/>
+          <a:srgbClr val="F8F6F3"/>
         </a:solidFill>
       </p:bgPr>
     </p:bg>
@@ -10420,7 +10498,7 @@
             <a:r>
               <a:rPr lang="en-US" sz="1200" b="1" spc="300" kern="0" dirty="0">
                 <a:solidFill>
-                  <a:srgbClr val="4A9EFF"/>
+                  <a:srgbClr val="9A7B66"/>
                 </a:solidFill>
                 <a:latin typeface="Calibri" pitchFamily="34" charset="0"/>
                 <a:ea typeface="Calibri" pitchFamily="34" charset="-122"/>
@@ -10459,11 +10537,11 @@
             <a:r>
               <a:rPr lang="en-US" sz="3400" b="1" dirty="0">
                 <a:solidFill>
-                  <a:srgbClr val="EAF1FA"/>
-                </a:solidFill>
-                <a:latin typeface="Bookman Old Style" pitchFamily="34" charset="0"/>
-                <a:ea typeface="Bookman Old Style" pitchFamily="34" charset="-122"/>
-                <a:cs typeface="Bookman Old Style" pitchFamily="34" charset="-120"/>
+                  <a:srgbClr val="33302B"/>
+                </a:solidFill>
+                <a:latin typeface="Georgia" pitchFamily="34" charset="0"/>
+                <a:ea typeface="Georgia" pitchFamily="34" charset="-122"/>
+                <a:cs typeface="Georgia" pitchFamily="34" charset="-120"/>
               </a:rPr>
               <a:t>Três tarefas, um objetivo</a:t>
             </a:r>
@@ -10488,13 +10566,18 @@
             </a:avLst>
           </a:prstGeom>
           <a:solidFill>
-            <a:srgbClr val="13283F"/>
+            <a:srgbClr val="FFFFFF"/>
           </a:solidFill>
-          <a:ln/>
+          <a:ln w="12700">
+            <a:solidFill>
+              <a:srgbClr val="E3D9CC"/>
+            </a:solidFill>
+            <a:prstDash val="solid"/>
+          </a:ln>
           <a:effectLst>
-            <a:outerShdw sx="100000" sy="100000" kx="0" ky="0" algn="bl" rotWithShape="0" blurRad="127000" dist="38100" dir="5400000">
-              <a:srgbClr val="000000">
-                <a:alpha val="28000"/>
+            <a:outerShdw sx="100000" sy="100000" kx="0" ky="0" algn="bl" rotWithShape="0" blurRad="114300" dist="38100" dir="5400000">
+              <a:srgbClr val="7A6A55">
+                <a:alpha val="12000"/>
               </a:srgbClr>
             </a:outerShdw>
           </a:effectLst>
@@ -10527,11 +10610,11 @@
             <a:r>
               <a:rPr lang="en-US" sz="3800" b="1" dirty="0">
                 <a:solidFill>
-                  <a:srgbClr val="C9A961"/>
-                </a:solidFill>
-                <a:latin typeface="Bookman Old Style" pitchFamily="34" charset="0"/>
-                <a:ea typeface="Bookman Old Style" pitchFamily="34" charset="-122"/>
-                <a:cs typeface="Bookman Old Style" pitchFamily="34" charset="-120"/>
+                  <a:srgbClr val="B1937E"/>
+                </a:solidFill>
+                <a:latin typeface="Georgia" pitchFamily="34" charset="0"/>
+                <a:ea typeface="Georgia" pitchFamily="34" charset="-122"/>
+                <a:cs typeface="Georgia" pitchFamily="34" charset="-120"/>
               </a:rPr>
               <a:t>01</a:t>
             </a:r>
@@ -10554,9 +10637,14 @@
             <a:avLst/>
           </a:prstGeom>
           <a:solidFill>
-            <a:srgbClr val="16314F"/>
+            <a:srgbClr val="EADFD0"/>
           </a:solidFill>
-          <a:ln/>
+          <a:ln w="9525">
+            <a:solidFill>
+              <a:srgbClr val="E3D9CC"/>
+            </a:solidFill>
+            <a:prstDash val="solid"/>
+          </a:ln>
         </p:spPr>
       </p:sp>
       <p:pic>
@@ -10610,11 +10698,11 @@
             <a:r>
               <a:rPr lang="en-US" sz="1900" b="1" dirty="0">
                 <a:solidFill>
-                  <a:srgbClr val="EAF1FA"/>
-                </a:solidFill>
-                <a:latin typeface="Bookman Old Style" pitchFamily="34" charset="0"/>
-                <a:ea typeface="Bookman Old Style" pitchFamily="34" charset="-122"/>
-                <a:cs typeface="Bookman Old Style" pitchFamily="34" charset="-120"/>
+                  <a:srgbClr val="33302B"/>
+                </a:solidFill>
+                <a:latin typeface="Georgia" pitchFamily="34" charset="0"/>
+                <a:ea typeface="Georgia" pitchFamily="34" charset="-122"/>
+                <a:cs typeface="Georgia" pitchFamily="34" charset="-120"/>
               </a:rPr>
               <a:t>Escolhe a tua linha</a:t>
             </a:r>
@@ -10649,7 +10737,7 @@
             <a:r>
               <a:rPr lang="en-US" sz="1350" dirty="0">
                 <a:solidFill>
-                  <a:srgbClr val="9FB2C9"/>
+                  <a:srgbClr val="8A7E72"/>
                 </a:solidFill>
                 <a:latin typeface="Calibri" pitchFamily="34" charset="0"/>
                 <a:ea typeface="Calibri" pitchFamily="34" charset="-122"/>
@@ -10678,13 +10766,18 @@
             </a:avLst>
           </a:prstGeom>
           <a:solidFill>
-            <a:srgbClr val="13283F"/>
+            <a:srgbClr val="FFFFFF"/>
           </a:solidFill>
-          <a:ln/>
+          <a:ln w="12700">
+            <a:solidFill>
+              <a:srgbClr val="E3D9CC"/>
+            </a:solidFill>
+            <a:prstDash val="solid"/>
+          </a:ln>
           <a:effectLst>
-            <a:outerShdw sx="100000" sy="100000" kx="0" ky="0" algn="bl" rotWithShape="0" blurRad="127000" dist="38100" dir="5400000">
-              <a:srgbClr val="000000">
-                <a:alpha val="28000"/>
+            <a:outerShdw sx="100000" sy="100000" kx="0" ky="0" algn="bl" rotWithShape="0" blurRad="114300" dist="38100" dir="5400000">
+              <a:srgbClr val="7A6A55">
+                <a:alpha val="12000"/>
               </a:srgbClr>
             </a:outerShdw>
           </a:effectLst>
@@ -10717,11 +10810,11 @@
             <a:r>
               <a:rPr lang="en-US" sz="3800" b="1" dirty="0">
                 <a:solidFill>
-                  <a:srgbClr val="C9A961"/>
-                </a:solidFill>
-                <a:latin typeface="Bookman Old Style" pitchFamily="34" charset="0"/>
-                <a:ea typeface="Bookman Old Style" pitchFamily="34" charset="-122"/>
-                <a:cs typeface="Bookman Old Style" pitchFamily="34" charset="-120"/>
+                  <a:srgbClr val="B1937E"/>
+                </a:solidFill>
+                <a:latin typeface="Georgia" pitchFamily="34" charset="0"/>
+                <a:ea typeface="Georgia" pitchFamily="34" charset="-122"/>
+                <a:cs typeface="Georgia" pitchFamily="34" charset="-120"/>
               </a:rPr>
               <a:t>02</a:t>
             </a:r>
@@ -10744,9 +10837,14 @@
             <a:avLst/>
           </a:prstGeom>
           <a:solidFill>
-            <a:srgbClr val="16314F"/>
+            <a:srgbClr val="EADFD0"/>
           </a:solidFill>
-          <a:ln/>
+          <a:ln w="9525">
+            <a:solidFill>
+              <a:srgbClr val="E3D9CC"/>
+            </a:solidFill>
+            <a:prstDash val="solid"/>
+          </a:ln>
         </p:spPr>
       </p:sp>
       <p:pic>
@@ -10800,11 +10898,11 @@
             <a:r>
               <a:rPr lang="en-US" sz="1900" b="1" dirty="0">
                 <a:solidFill>
-                  <a:srgbClr val="EAF1FA"/>
-                </a:solidFill>
-                <a:latin typeface="Bookman Old Style" pitchFamily="34" charset="0"/>
-                <a:ea typeface="Bookman Old Style" pitchFamily="34" charset="-122"/>
-                <a:cs typeface="Bookman Old Style" pitchFamily="34" charset="-120"/>
+                  <a:srgbClr val="33302B"/>
+                </a:solidFill>
+                <a:latin typeface="Georgia" pitchFamily="34" charset="0"/>
+                <a:ea typeface="Georgia" pitchFamily="34" charset="-122"/>
+                <a:cs typeface="Georgia" pitchFamily="34" charset="-120"/>
               </a:rPr>
               <a:t>Retrata o teu casal ideal</a:t>
             </a:r>
@@ -10839,7 +10937,7 @@
             <a:r>
               <a:rPr lang="en-US" sz="1350" dirty="0">
                 <a:solidFill>
-                  <a:srgbClr val="9FB2C9"/>
+                  <a:srgbClr val="8A7E72"/>
                 </a:solidFill>
                 <a:latin typeface="Calibri" pitchFamily="34" charset="0"/>
                 <a:ea typeface="Calibri" pitchFamily="34" charset="-122"/>
@@ -10868,13 +10966,18 @@
             </a:avLst>
           </a:prstGeom>
           <a:solidFill>
-            <a:srgbClr val="13283F"/>
+            <a:srgbClr val="FFFFFF"/>
           </a:solidFill>
-          <a:ln/>
+          <a:ln w="12700">
+            <a:solidFill>
+              <a:srgbClr val="E3D9CC"/>
+            </a:solidFill>
+            <a:prstDash val="solid"/>
+          </a:ln>
           <a:effectLst>
-            <a:outerShdw sx="100000" sy="100000" kx="0" ky="0" algn="bl" rotWithShape="0" blurRad="127000" dist="38100" dir="5400000">
-              <a:srgbClr val="000000">
-                <a:alpha val="28000"/>
+            <a:outerShdw sx="100000" sy="100000" kx="0" ky="0" algn="bl" rotWithShape="0" blurRad="114300" dist="38100" dir="5400000">
+              <a:srgbClr val="7A6A55">
+                <a:alpha val="12000"/>
               </a:srgbClr>
             </a:outerShdw>
           </a:effectLst>
@@ -10907,11 +11010,11 @@
             <a:r>
               <a:rPr lang="en-US" sz="3800" b="1" dirty="0">
                 <a:solidFill>
-                  <a:srgbClr val="C9A961"/>
-                </a:solidFill>
-                <a:latin typeface="Bookman Old Style" pitchFamily="34" charset="0"/>
-                <a:ea typeface="Bookman Old Style" pitchFamily="34" charset="-122"/>
-                <a:cs typeface="Bookman Old Style" pitchFamily="34" charset="-120"/>
+                  <a:srgbClr val="B1937E"/>
+                </a:solidFill>
+                <a:latin typeface="Georgia" pitchFamily="34" charset="0"/>
+                <a:ea typeface="Georgia" pitchFamily="34" charset="-122"/>
+                <a:cs typeface="Georgia" pitchFamily="34" charset="-120"/>
               </a:rPr>
               <a:t>03</a:t>
             </a:r>
@@ -10934,9 +11037,14 @@
             <a:avLst/>
           </a:prstGeom>
           <a:solidFill>
-            <a:srgbClr val="16314F"/>
+            <a:srgbClr val="EADFD0"/>
           </a:solidFill>
-          <a:ln/>
+          <a:ln w="9525">
+            <a:solidFill>
+              <a:srgbClr val="E3D9CC"/>
+            </a:solidFill>
+            <a:prstDash val="solid"/>
+          </a:ln>
         </p:spPr>
       </p:sp>
       <p:pic>
@@ -10990,11 +11098,11 @@
             <a:r>
               <a:rPr lang="en-US" sz="1900" b="1" dirty="0">
                 <a:solidFill>
-                  <a:srgbClr val="EAF1FA"/>
-                </a:solidFill>
-                <a:latin typeface="Bookman Old Style" pitchFamily="34" charset="0"/>
-                <a:ea typeface="Bookman Old Style" pitchFamily="34" charset="-122"/>
-                <a:cs typeface="Bookman Old Style" pitchFamily="34" charset="-120"/>
+                  <a:srgbClr val="33302B"/>
+                </a:solidFill>
+                <a:latin typeface="Georgia" pitchFamily="34" charset="0"/>
+                <a:ea typeface="Georgia" pitchFamily="34" charset="-122"/>
+                <a:cs typeface="Georgia" pitchFamily="34" charset="-120"/>
               </a:rPr>
               <a:t>Escreve a tua frase</a:t>
             </a:r>
@@ -11029,7 +11137,7 @@
             <a:r>
               <a:rPr lang="en-US" sz="1350" dirty="0">
                 <a:solidFill>
-                  <a:srgbClr val="9FB2C9"/>
+                  <a:srgbClr val="8A7E72"/>
                 </a:solidFill>
                 <a:latin typeface="Calibri" pitchFamily="34" charset="0"/>
                 <a:ea typeface="Calibri" pitchFamily="34" charset="-122"/>
@@ -11058,7 +11166,7 @@
           <a:noFill/>
           <a:ln w="9525">
             <a:solidFill>
-              <a:srgbClr val="5C708A">
+              <a:srgbClr val="A89A86">
                 <a:alpha val="60000"/>
               </a:srgbClr>
             </a:solidFill>
@@ -11093,7 +11201,7 @@
             <a:r>
               <a:rPr lang="en-US" sz="900" dirty="0">
                 <a:solidFill>
-                  <a:srgbClr val="5C708A"/>
+                  <a:srgbClr val="A89A86"/>
                 </a:solidFill>
                 <a:latin typeface="Calibri" pitchFamily="34" charset="0"/>
                 <a:ea typeface="Calibri" pitchFamily="34" charset="-122"/>
@@ -11132,7 +11240,7 @@
             <a:r>
               <a:rPr lang="en-US" sz="900" dirty="0">
                 <a:solidFill>
-                  <a:srgbClr val="5C708A"/>
+                  <a:srgbClr val="A89A86"/>
                 </a:solidFill>
                 <a:latin typeface="Calibri" pitchFamily="34" charset="0"/>
                 <a:ea typeface="Calibri" pitchFamily="34" charset="-122"/>
@@ -11158,7 +11266,7 @@
     <p:bg>
       <p:bgPr>
         <a:solidFill>
-          <a:srgbClr val="102844"/>
+          <a:srgbClr val="EFE7DE"/>
         </a:solidFill>
       </p:bgPr>
     </p:bg>
@@ -11203,7 +11311,7 @@
             <a:r>
               <a:rPr lang="en-US" sz="1200" b="1" spc="300" kern="0" dirty="0">
                 <a:solidFill>
-                  <a:srgbClr val="C9A961"/>
+                  <a:srgbClr val="B1937E"/>
                 </a:solidFill>
                 <a:latin typeface="Calibri" pitchFamily="34" charset="0"/>
                 <a:ea typeface="Calibri" pitchFamily="34" charset="-122"/>
@@ -11242,11 +11350,11 @@
             <a:r>
               <a:rPr lang="en-US" sz="3200" b="1" dirty="0">
                 <a:solidFill>
-                  <a:srgbClr val="EAF1FA"/>
-                </a:solidFill>
-                <a:latin typeface="Bookman Old Style" pitchFamily="34" charset="0"/>
-                <a:ea typeface="Bookman Old Style" pitchFamily="34" charset="-122"/>
-                <a:cs typeface="Bookman Old Style" pitchFamily="34" charset="-120"/>
+                  <a:srgbClr val="33302B"/>
+                </a:solidFill>
+                <a:latin typeface="Georgia" pitchFamily="34" charset="0"/>
+                <a:ea typeface="Georgia" pitchFamily="34" charset="-122"/>
+                <a:cs typeface="Georgia" pitchFamily="34" charset="-120"/>
               </a:rPr>
               <a:t>O que trazes à próxima sessão</a:t>
             </a:r>
@@ -11271,18 +11379,18 @@
             </a:avLst>
           </a:prstGeom>
           <a:solidFill>
-            <a:srgbClr val="13283F"/>
+            <a:srgbClr val="FFFFFF"/>
           </a:solidFill>
           <a:ln w="19050">
             <a:solidFill>
-              <a:srgbClr val="C9A961"/>
+              <a:srgbClr val="B1937E"/>
             </a:solidFill>
             <a:prstDash val="solid"/>
           </a:ln>
           <a:effectLst>
-            <a:outerShdw sx="100000" sy="100000" kx="0" ky="0" algn="bl" rotWithShape="0" blurRad="127000" dist="38100" dir="5400000">
-              <a:srgbClr val="000000">
-                <a:alpha val="28000"/>
+            <a:outerShdw sx="100000" sy="100000" kx="0" ky="0" algn="bl" rotWithShape="0" blurRad="114300" dist="38100" dir="5400000">
+              <a:srgbClr val="7A6A55">
+                <a:alpha val="12000"/>
               </a:srgbClr>
             </a:outerShdw>
           </a:effectLst>
@@ -11315,11 +11423,11 @@
             <a:r>
               <a:rPr lang="en-US" sz="2400" b="1" dirty="0">
                 <a:solidFill>
-                  <a:srgbClr val="C9A961"/>
-                </a:solidFill>
-                <a:latin typeface="Bookman Old Style" pitchFamily="34" charset="0"/>
-                <a:ea typeface="Bookman Old Style" pitchFamily="34" charset="-122"/>
-                <a:cs typeface="Bookman Old Style" pitchFamily="34" charset="-120"/>
+                  <a:srgbClr val="B1937E"/>
+                </a:solidFill>
+                <a:latin typeface="Georgia" pitchFamily="34" charset="0"/>
+                <a:ea typeface="Georgia" pitchFamily="34" charset="-122"/>
+                <a:cs typeface="Georgia" pitchFamily="34" charset="-120"/>
               </a:rPr>
               <a:t>Documento de Posicionamento</a:t>
             </a:r>
@@ -11378,7 +11486,7 @@
             <a:r>
               <a:rPr lang="en-US" sz="1600" dirty="0">
                 <a:solidFill>
-                  <a:srgbClr val="EAF1FA"/>
+                  <a:srgbClr val="33302B"/>
                 </a:solidFill>
                 <a:latin typeface="Calibri" pitchFamily="34" charset="0"/>
                 <a:ea typeface="Calibri" pitchFamily="34" charset="-122"/>
@@ -11441,7 +11549,7 @@
             <a:r>
               <a:rPr lang="en-US" sz="1600" dirty="0">
                 <a:solidFill>
-                  <a:srgbClr val="EAF1FA"/>
+                  <a:srgbClr val="33302B"/>
                 </a:solidFill>
                 <a:latin typeface="Calibri" pitchFamily="34" charset="0"/>
                 <a:ea typeface="Calibri" pitchFamily="34" charset="-122"/>
@@ -11504,7 +11612,7 @@
             <a:r>
               <a:rPr lang="en-US" sz="1600" dirty="0">
                 <a:solidFill>
-                  <a:srgbClr val="EAF1FA"/>
+                  <a:srgbClr val="33302B"/>
                 </a:solidFill>
                 <a:latin typeface="Calibri" pitchFamily="34" charset="0"/>
                 <a:ea typeface="Calibri" pitchFamily="34" charset="-122"/>
@@ -11543,7 +11651,7 @@
             <a:r>
               <a:rPr lang="en-US" sz="1500" i="1" dirty="0">
                 <a:solidFill>
-                  <a:srgbClr val="9FB2C9"/>
+                  <a:srgbClr val="8A7E72"/>
                 </a:solidFill>
                 <a:latin typeface="Calibri" pitchFamily="34" charset="0"/>
                 <a:ea typeface="Calibri" pitchFamily="34" charset="-122"/>
@@ -11572,7 +11680,7 @@
           <a:noFill/>
           <a:ln w="9525">
             <a:solidFill>
-              <a:srgbClr val="5C708A">
+              <a:srgbClr val="A89A86">
                 <a:alpha val="60000"/>
               </a:srgbClr>
             </a:solidFill>
@@ -11607,7 +11715,7 @@
             <a:r>
               <a:rPr lang="en-US" sz="900" dirty="0">
                 <a:solidFill>
-                  <a:srgbClr val="5C708A"/>
+                  <a:srgbClr val="A89A86"/>
                 </a:solidFill>
                 <a:latin typeface="Calibri" pitchFamily="34" charset="0"/>
                 <a:ea typeface="Calibri" pitchFamily="34" charset="-122"/>
@@ -11646,7 +11754,7 @@
             <a:r>
               <a:rPr lang="en-US" sz="900" dirty="0">
                 <a:solidFill>
-                  <a:srgbClr val="5C708A"/>
+                  <a:srgbClr val="A89A86"/>
                 </a:solidFill>
                 <a:latin typeface="Calibri" pitchFamily="34" charset="0"/>
                 <a:ea typeface="Calibri" pitchFamily="34" charset="-122"/>
@@ -11672,7 +11780,7 @@
     <p:bg>
       <p:bgPr>
         <a:solidFill>
-          <a:srgbClr val="0B1D33"/>
+          <a:srgbClr val="F8F6F3"/>
         </a:solidFill>
       </p:bgPr>
     </p:bg>
@@ -11692,51 +11800,7 @@
       </p:grpSpPr>
       <p:sp>
         <p:nvSpPr>
-          <p:cNvPr id="2" name="Shape 0"/>
-          <p:cNvSpPr/>
-          <p:nvPr/>
-        </p:nvSpPr>
-        <p:spPr>
-          <a:xfrm>
-            <a:off x="8046720" y="-1645920"/>
-            <a:ext cx="5943600" cy="5943600"/>
-          </a:xfrm>
-          <a:prstGeom prst="ellipse">
-            <a:avLst/>
-          </a:prstGeom>
-          <a:solidFill>
-            <a:srgbClr val="4A9EFF">
-              <a:alpha val="14000"/>
-            </a:srgbClr>
-          </a:solidFill>
-          <a:ln/>
-        </p:spPr>
-      </p:sp>
-      <p:sp>
-        <p:nvSpPr>
-          <p:cNvPr id="3" name="Shape 1"/>
-          <p:cNvSpPr/>
-          <p:nvPr/>
-        </p:nvSpPr>
-        <p:spPr>
-          <a:xfrm>
-            <a:off x="-1828800" y="4389120"/>
-            <a:ext cx="5029200" cy="5029200"/>
-          </a:xfrm>
-          <a:prstGeom prst="ellipse">
-            <a:avLst/>
-          </a:prstGeom>
-          <a:solidFill>
-            <a:srgbClr val="C9A961">
-              <a:alpha val="10000"/>
-            </a:srgbClr>
-          </a:solidFill>
-          <a:ln/>
-        </p:spPr>
-      </p:sp>
-      <p:sp>
-        <p:nvSpPr>
-          <p:cNvPr id="4" name="Text 2"/>
+          <p:cNvPr id="2" name="Text 0"/>
           <p:cNvSpPr/>
           <p:nvPr/>
         </p:nvSpPr>
@@ -11761,7 +11825,7 @@
             <a:r>
               <a:rPr lang="en-US" sz="1400" b="1" spc="500" kern="0" dirty="0">
                 <a:solidFill>
-                  <a:srgbClr val="C9A961"/>
+                  <a:srgbClr val="B1937E"/>
                 </a:solidFill>
                 <a:latin typeface="Calibri" pitchFamily="34" charset="0"/>
                 <a:ea typeface="Calibri" pitchFamily="34" charset="-122"/>
@@ -11775,7 +11839,7 @@
       </p:sp>
       <p:sp>
         <p:nvSpPr>
-          <p:cNvPr id="5" name="Text 3"/>
+          <p:cNvPr id="3" name="Text 1"/>
           <p:cNvSpPr/>
           <p:nvPr/>
         </p:nvSpPr>
@@ -11803,11 +11867,11 @@
             <a:r>
               <a:rPr lang="en-US" sz="4400" b="1" dirty="0">
                 <a:solidFill>
-                  <a:srgbClr val="EAF1FA"/>
-                </a:solidFill>
-                <a:latin typeface="Bookman Old Style" pitchFamily="34" charset="0"/>
-                <a:ea typeface="Bookman Old Style" pitchFamily="34" charset="-122"/>
-                <a:cs typeface="Bookman Old Style" pitchFamily="34" charset="-120"/>
+                  <a:srgbClr val="33302B"/>
+                </a:solidFill>
+                <a:latin typeface="Georgia" pitchFamily="34" charset="0"/>
+                <a:ea typeface="Georgia" pitchFamily="34" charset="-122"/>
+                <a:cs typeface="Georgia" pitchFamily="34" charset="-120"/>
               </a:rPr>
               <a:t>Sessão 02: Como</a:t>
             </a:r>
@@ -11823,11 +11887,11 @@
             <a:r>
               <a:rPr lang="en-US" sz="4400" b="1" dirty="0">
                 <a:solidFill>
-                  <a:srgbClr val="EAF1FA"/>
-                </a:solidFill>
-                <a:latin typeface="Bookman Old Style" pitchFamily="34" charset="0"/>
-                <a:ea typeface="Bookman Old Style" pitchFamily="34" charset="-122"/>
-                <a:cs typeface="Bookman Old Style" pitchFamily="34" charset="-120"/>
+                  <a:srgbClr val="33302B"/>
+                </a:solidFill>
+                <a:latin typeface="Georgia" pitchFamily="34" charset="0"/>
+                <a:ea typeface="Georgia" pitchFamily="34" charset="-122"/>
+                <a:cs typeface="Georgia" pitchFamily="34" charset="-120"/>
               </a:rPr>
               <a:t>Chegar ao Cliente</a:t>
             </a:r>
@@ -11837,7 +11901,7 @@
       </p:sp>
       <p:sp>
         <p:nvSpPr>
-          <p:cNvPr id="6" name="Text 4"/>
+          <p:cNvPr id="4" name="Text 2"/>
           <p:cNvSpPr/>
           <p:nvPr/>
         </p:nvSpPr>
@@ -11862,7 +11926,7 @@
             <a:r>
               <a:rPr lang="en-US" sz="1700" dirty="0">
                 <a:solidFill>
-                  <a:srgbClr val="9FB2C9"/>
+                  <a:srgbClr val="8A7E72"/>
                 </a:solidFill>
                 <a:latin typeface="Calibri" pitchFamily="34" charset="0"/>
                 <a:ea typeface="Calibri" pitchFamily="34" charset="-122"/>
@@ -11876,7 +11940,7 @@
       </p:sp>
       <p:sp>
         <p:nvSpPr>
-          <p:cNvPr id="7" name="Shape 5"/>
+          <p:cNvPr id="5" name="Shape 3"/>
           <p:cNvSpPr/>
           <p:nvPr/>
         </p:nvSpPr>
@@ -11891,51 +11955,36 @@
           <a:noFill/>
           <a:ln w="31750">
             <a:solidFill>
-              <a:srgbClr val="C9A961"/>
+              <a:srgbClr val="B1937E"/>
             </a:solidFill>
             <a:prstDash val="solid"/>
           </a:ln>
         </p:spPr>
       </p:sp>
-      <p:sp>
-        <p:nvSpPr>
-          <p:cNvPr id="8" name="Text 6"/>
-          <p:cNvSpPr/>
-          <p:nvPr/>
-        </p:nvSpPr>
-        <p:spPr>
-          <a:xfrm>
-            <a:off x="640080" y="5943600"/>
-            <a:ext cx="7315200" cy="365760"/>
-          </a:xfrm>
-          <a:prstGeom prst="rect">
-            <a:avLst/>
-          </a:prstGeom>
-          <a:noFill/>
-          <a:ln/>
-        </p:spPr>
-        <p:txBody>
-          <a:bodyPr wrap="square" lIns="0" tIns="0" rIns="0" bIns="0" rtlCol="0" anchor="ctr"/>
-          <a:lstStyle/>
-          <a:p>
-            <a:pPr indent="0" marL="0">
-              <a:buNone/>
-            </a:pPr>
-            <a:r>
-              <a:rPr lang="en-US" sz="1200" spc="400" kern="0" dirty="0">
-                <a:solidFill>
-                  <a:srgbClr val="5C708A"/>
-                </a:solidFill>
-                <a:latin typeface="Calibri" pitchFamily="34" charset="0"/>
-                <a:ea typeface="Calibri" pitchFamily="34" charset="-122"/>
-                <a:cs typeface="Calibri" pitchFamily="34" charset="-120"/>
-              </a:rPr>
-              <a:t>MENTORIA · RL</a:t>
-            </a:r>
-            <a:endParaRPr lang="en-US" sz="1200" dirty="0"/>
-          </a:p>
-        </p:txBody>
-      </p:sp>
+      <p:pic>
+        <p:nvPicPr>
+          <p:cNvPr id="6" name="Image 0" descr="preencoded.png">    </p:cNvPr>
+          <p:cNvPicPr>
+            <a:picLocks noChangeAspect="1"/>
+          </p:cNvPicPr>
+          <p:nvPr/>
+        </p:nvPicPr>
+        <p:blipFill>
+          <a:blip r:embed="rId1"/>
+          <a:stretch>
+            <a:fillRect/>
+          </a:stretch>
+        </p:blipFill>
+        <p:spPr>
+          <a:xfrm>
+            <a:off x="640080" y="502920"/>
+            <a:ext cx="1280160" cy="1320800"/>
+          </a:xfrm>
+          <a:prstGeom prst="rect">
+            <a:avLst/>
+          </a:prstGeom>
+        </p:spPr>
+      </p:pic>
     </p:spTree>
   </p:cSld>
   <p:clrMapOvr>
@@ -11950,7 +11999,7 @@
     <p:bg>
       <p:bgPr>
         <a:solidFill>
-          <a:srgbClr val="0B1D33"/>
+          <a:srgbClr val="F8F6F3"/>
         </a:solidFill>
       </p:bgPr>
     </p:bg>
@@ -11970,51 +12019,7 @@
       </p:grpSpPr>
       <p:sp>
         <p:nvSpPr>
-          <p:cNvPr id="2" name="Shape 0"/>
-          <p:cNvSpPr/>
-          <p:nvPr/>
-        </p:nvSpPr>
-        <p:spPr>
-          <a:xfrm>
-            <a:off x="7772400" y="-1371600"/>
-            <a:ext cx="5486400" cy="5486400"/>
-          </a:xfrm>
-          <a:prstGeom prst="ellipse">
-            <a:avLst/>
-          </a:prstGeom>
-          <a:solidFill>
-            <a:srgbClr val="4A9EFF">
-              <a:alpha val="10000"/>
-            </a:srgbClr>
-          </a:solidFill>
-          <a:ln/>
-        </p:spPr>
-      </p:sp>
-      <p:sp>
-        <p:nvSpPr>
-          <p:cNvPr id="3" name="Shape 1"/>
-          <p:cNvSpPr/>
-          <p:nvPr/>
-        </p:nvSpPr>
-        <p:spPr>
-          <a:xfrm>
-            <a:off x="-1371600" y="4114800"/>
-            <a:ext cx="4572000" cy="4572000"/>
-          </a:xfrm>
-          <a:prstGeom prst="ellipse">
-            <a:avLst/>
-          </a:prstGeom>
-          <a:solidFill>
-            <a:srgbClr val="C9A961">
-              <a:alpha val="8000"/>
-            </a:srgbClr>
-          </a:solidFill>
-          <a:ln/>
-        </p:spPr>
-      </p:sp>
-      <p:sp>
-        <p:nvSpPr>
-          <p:cNvPr id="4" name="Text 2"/>
+          <p:cNvPr id="2" name="Text 0"/>
           <p:cNvSpPr/>
           <p:nvPr/>
         </p:nvSpPr>
@@ -12039,11 +12044,11 @@
             <a:r>
               <a:rPr lang="en-US" sz="15000" b="1" dirty="0">
                 <a:solidFill>
-                  <a:srgbClr val="16314F"/>
-                </a:solidFill>
-                <a:latin typeface="Bookman Old Style" pitchFamily="34" charset="0"/>
-                <a:ea typeface="Bookman Old Style" pitchFamily="34" charset="-122"/>
-                <a:cs typeface="Bookman Old Style" pitchFamily="34" charset="-120"/>
+                  <a:srgbClr val="EADFD0"/>
+                </a:solidFill>
+                <a:latin typeface="Georgia" pitchFamily="34" charset="0"/>
+                <a:ea typeface="Georgia" pitchFamily="34" charset="-122"/>
+                <a:cs typeface="Georgia" pitchFamily="34" charset="-120"/>
               </a:rPr>
               <a:t>A</a:t>
             </a:r>
@@ -12053,7 +12058,7 @@
       </p:sp>
       <p:sp>
         <p:nvSpPr>
-          <p:cNvPr id="5" name="Text 3"/>
+          <p:cNvPr id="3" name="Text 1"/>
           <p:cNvSpPr/>
           <p:nvPr/>
         </p:nvSpPr>
@@ -12078,7 +12083,7 @@
             <a:r>
               <a:rPr lang="en-US" sz="1300" b="1" spc="400" kern="0" dirty="0">
                 <a:solidFill>
-                  <a:srgbClr val="C9A961"/>
+                  <a:srgbClr val="B1937E"/>
                 </a:solidFill>
                 <a:latin typeface="Calibri" pitchFamily="34" charset="0"/>
                 <a:ea typeface="Calibri" pitchFamily="34" charset="-122"/>
@@ -12092,7 +12097,7 @@
       </p:sp>
       <p:sp>
         <p:nvSpPr>
-          <p:cNvPr id="6" name="Text 4"/>
+          <p:cNvPr id="4" name="Text 2"/>
           <p:cNvSpPr/>
           <p:nvPr/>
         </p:nvSpPr>
@@ -12115,23 +12120,23 @@
               <a:buNone/>
             </a:pPr>
             <a:r>
-              <a:rPr lang="en-US" sz="4600" b="1" dirty="0">
-                <a:solidFill>
-                  <a:srgbClr val="EAF1FA"/>
-                </a:solidFill>
-                <a:latin typeface="Bookman Old Style" pitchFamily="34" charset="0"/>
-                <a:ea typeface="Bookman Old Style" pitchFamily="34" charset="-122"/>
-                <a:cs typeface="Bookman Old Style" pitchFamily="34" charset="-120"/>
+              <a:rPr lang="en-US" sz="4000" b="1" dirty="0">
+                <a:solidFill>
+                  <a:srgbClr val="33302B"/>
+                </a:solidFill>
+                <a:latin typeface="Georgia" pitchFamily="34" charset="0"/>
+                <a:ea typeface="Georgia" pitchFamily="34" charset="-122"/>
+                <a:cs typeface="Georgia" pitchFamily="34" charset="-120"/>
               </a:rPr>
               <a:t>A Matemática dos 100K</a:t>
             </a:r>
-            <a:endParaRPr lang="en-US" sz="4600" dirty="0"/>
-          </a:p>
-        </p:txBody>
-      </p:sp>
-      <p:sp>
-        <p:nvSpPr>
-          <p:cNvPr id="7" name="Text 5"/>
+            <a:endParaRPr lang="en-US" sz="4000" dirty="0"/>
+          </a:p>
+        </p:txBody>
+      </p:sp>
+      <p:sp>
+        <p:nvSpPr>
+          <p:cNvPr id="5" name="Text 3"/>
           <p:cNvSpPr/>
           <p:nvPr/>
         </p:nvSpPr>
@@ -12156,7 +12161,7 @@
             <a:r>
               <a:rPr lang="en-US" sz="1600" dirty="0">
                 <a:solidFill>
-                  <a:srgbClr val="9FB2C9"/>
+                  <a:srgbClr val="8A7E72"/>
                 </a:solidFill>
                 <a:latin typeface="Calibri" pitchFamily="34" charset="0"/>
                 <a:ea typeface="Calibri" pitchFamily="34" charset="-122"/>
@@ -12170,7 +12175,7 @@
       </p:sp>
       <p:sp>
         <p:nvSpPr>
-          <p:cNvPr id="8" name="Shape 6"/>
+          <p:cNvPr id="6" name="Shape 4"/>
           <p:cNvSpPr/>
           <p:nvPr/>
         </p:nvSpPr>
@@ -12185,7 +12190,7 @@
           <a:noFill/>
           <a:ln w="9525">
             <a:solidFill>
-              <a:srgbClr val="5C708A">
+              <a:srgbClr val="A89A86">
                 <a:alpha val="60000"/>
               </a:srgbClr>
             </a:solidFill>
@@ -12195,7 +12200,7 @@
       </p:sp>
       <p:sp>
         <p:nvSpPr>
-          <p:cNvPr id="9" name="Text 7"/>
+          <p:cNvPr id="7" name="Text 5"/>
           <p:cNvSpPr/>
           <p:nvPr/>
         </p:nvSpPr>
@@ -12220,7 +12225,7 @@
             <a:r>
               <a:rPr lang="en-US" sz="900" dirty="0">
                 <a:solidFill>
-                  <a:srgbClr val="5C708A"/>
+                  <a:srgbClr val="A89A86"/>
                 </a:solidFill>
                 <a:latin typeface="Calibri" pitchFamily="34" charset="0"/>
                 <a:ea typeface="Calibri" pitchFamily="34" charset="-122"/>
@@ -12234,7 +12239,7 @@
       </p:sp>
       <p:sp>
         <p:nvSpPr>
-          <p:cNvPr id="10" name="Text 8"/>
+          <p:cNvPr id="8" name="Text 6"/>
           <p:cNvSpPr/>
           <p:nvPr/>
         </p:nvSpPr>
@@ -12259,7 +12264,7 @@
             <a:r>
               <a:rPr lang="en-US" sz="900" dirty="0">
                 <a:solidFill>
-                  <a:srgbClr val="5C708A"/>
+                  <a:srgbClr val="A89A86"/>
                 </a:solidFill>
                 <a:latin typeface="Calibri" pitchFamily="34" charset="0"/>
                 <a:ea typeface="Calibri" pitchFamily="34" charset="-122"/>
@@ -12285,7 +12290,7 @@
     <p:bg>
       <p:bgPr>
         <a:solidFill>
-          <a:srgbClr val="0B1D33"/>
+          <a:srgbClr val="F8F6F3"/>
         </a:solidFill>
       </p:bgPr>
     </p:bg>
@@ -12330,7 +12335,7 @@
             <a:r>
               <a:rPr lang="en-US" sz="1200" b="1" spc="300" kern="0" dirty="0">
                 <a:solidFill>
-                  <a:srgbClr val="4A9EFF"/>
+                  <a:srgbClr val="9A7B66"/>
                 </a:solidFill>
                 <a:latin typeface="Calibri" pitchFamily="34" charset="0"/>
                 <a:ea typeface="Calibri" pitchFamily="34" charset="-122"/>
@@ -12369,11 +12374,11 @@
             <a:r>
               <a:rPr lang="en-US" sz="3400" b="1" dirty="0">
                 <a:solidFill>
-                  <a:srgbClr val="EAF1FA"/>
-                </a:solidFill>
-                <a:latin typeface="Bookman Old Style" pitchFamily="34" charset="0"/>
-                <a:ea typeface="Bookman Old Style" pitchFamily="34" charset="-122"/>
-                <a:cs typeface="Bookman Old Style" pitchFamily="34" charset="-120"/>
+                  <a:srgbClr val="33302B"/>
+                </a:solidFill>
+                <a:latin typeface="Georgia" pitchFamily="34" charset="0"/>
+                <a:ea typeface="Georgia" pitchFamily="34" charset="-122"/>
+                <a:cs typeface="Georgia" pitchFamily="34" charset="-120"/>
               </a:rPr>
               <a:t>Tudo começa por uma equação simples</a:t>
             </a:r>
@@ -12398,20 +12403,20 @@
             </a:avLst>
           </a:prstGeom>
           <a:solidFill>
-            <a:srgbClr val="13283F"/>
+            <a:srgbClr val="FFFFFF"/>
           </a:solidFill>
           <a:ln w="9525">
             <a:solidFill>
-              <a:srgbClr val="4A9EFF">
+              <a:srgbClr val="9A7B66">
                 <a:alpha val="50000"/>
               </a:srgbClr>
             </a:solidFill>
             <a:prstDash val="solid"/>
           </a:ln>
           <a:effectLst>
-            <a:outerShdw sx="100000" sy="100000" kx="0" ky="0" algn="bl" rotWithShape="0" blurRad="127000" dist="38100" dir="5400000">
-              <a:srgbClr val="000000">
-                <a:alpha val="28000"/>
+            <a:outerShdw sx="100000" sy="100000" kx="0" ky="0" algn="bl" rotWithShape="0" blurRad="114300" dist="38100" dir="5400000">
+              <a:srgbClr val="7A6A55">
+                <a:alpha val="12000"/>
               </a:srgbClr>
             </a:outerShdw>
           </a:effectLst>
@@ -12444,11 +12449,11 @@
             <a:r>
               <a:rPr lang="en-US" sz="2200" b="1" dirty="0">
                 <a:solidFill>
-                  <a:srgbClr val="4A9EFF"/>
-                </a:solidFill>
-                <a:latin typeface="Bookman Old Style" pitchFamily="34" charset="0"/>
-                <a:ea typeface="Bookman Old Style" pitchFamily="34" charset="-122"/>
-                <a:cs typeface="Bookman Old Style" pitchFamily="34" charset="-120"/>
+                  <a:srgbClr val="9A7B66"/>
+                </a:solidFill>
+                <a:latin typeface="Georgia" pitchFamily="34" charset="0"/>
+                <a:ea typeface="Georgia" pitchFamily="34" charset="-122"/>
+                <a:cs typeface="Georgia" pitchFamily="34" charset="-120"/>
               </a:rPr>
               <a:t>Nº de casamentos</a:t>
             </a:r>
@@ -12483,7 +12488,7 @@
             <a:r>
               <a:rPr lang="en-US" sz="1400" dirty="0">
                 <a:solidFill>
-                  <a:srgbClr val="9FB2C9"/>
+                  <a:srgbClr val="8A7E72"/>
                 </a:solidFill>
                 <a:latin typeface="Calibri" pitchFamily="34" charset="0"/>
                 <a:ea typeface="Calibri" pitchFamily="34" charset="-122"/>
@@ -12512,20 +12517,20 @@
             </a:avLst>
           </a:prstGeom>
           <a:solidFill>
-            <a:srgbClr val="13283F"/>
+            <a:srgbClr val="FFFFFF"/>
           </a:solidFill>
           <a:ln w="9525">
             <a:solidFill>
-              <a:srgbClr val="4A9EFF">
+              <a:srgbClr val="9A7B66">
                 <a:alpha val="50000"/>
               </a:srgbClr>
             </a:solidFill>
             <a:prstDash val="solid"/>
           </a:ln>
           <a:effectLst>
-            <a:outerShdw sx="100000" sy="100000" kx="0" ky="0" algn="bl" rotWithShape="0" blurRad="127000" dist="38100" dir="5400000">
-              <a:srgbClr val="000000">
-                <a:alpha val="28000"/>
+            <a:outerShdw sx="100000" sy="100000" kx="0" ky="0" algn="bl" rotWithShape="0" blurRad="114300" dist="38100" dir="5400000">
+              <a:srgbClr val="7A6A55">
+                <a:alpha val="12000"/>
               </a:srgbClr>
             </a:outerShdw>
           </a:effectLst>
@@ -12558,11 +12563,11 @@
             <a:r>
               <a:rPr lang="en-US" sz="2200" b="1" dirty="0">
                 <a:solidFill>
-                  <a:srgbClr val="4A9EFF"/>
-                </a:solidFill>
-                <a:latin typeface="Bookman Old Style" pitchFamily="34" charset="0"/>
-                <a:ea typeface="Bookman Old Style" pitchFamily="34" charset="-122"/>
-                <a:cs typeface="Bookman Old Style" pitchFamily="34" charset="-120"/>
+                  <a:srgbClr val="9A7B66"/>
+                </a:solidFill>
+                <a:latin typeface="Georgia" pitchFamily="34" charset="0"/>
+                <a:ea typeface="Georgia" pitchFamily="34" charset="-122"/>
+                <a:cs typeface="Georgia" pitchFamily="34" charset="-120"/>
               </a:rPr>
               <a:t>Ticket médio</a:t>
             </a:r>
@@ -12597,7 +12602,7 @@
             <a:r>
               <a:rPr lang="en-US" sz="1400" dirty="0">
                 <a:solidFill>
-                  <a:srgbClr val="9FB2C9"/>
+                  <a:srgbClr val="8A7E72"/>
                 </a:solidFill>
                 <a:latin typeface="Calibri" pitchFamily="34" charset="0"/>
                 <a:ea typeface="Calibri" pitchFamily="34" charset="-122"/>
@@ -12626,18 +12631,18 @@
             </a:avLst>
           </a:prstGeom>
           <a:solidFill>
-            <a:srgbClr val="102844"/>
+            <a:srgbClr val="EFE7DE"/>
           </a:solidFill>
           <a:ln w="19050">
             <a:solidFill>
-              <a:srgbClr val="C9A961"/>
+              <a:srgbClr val="B1937E"/>
             </a:solidFill>
             <a:prstDash val="solid"/>
           </a:ln>
           <a:effectLst>
-            <a:outerShdw sx="100000" sy="100000" kx="0" ky="0" algn="bl" rotWithShape="0" blurRad="127000" dist="38100" dir="5400000">
-              <a:srgbClr val="000000">
-                <a:alpha val="28000"/>
+            <a:outerShdw sx="100000" sy="100000" kx="0" ky="0" algn="bl" rotWithShape="0" blurRad="114300" dist="38100" dir="5400000">
+              <a:srgbClr val="7A6A55">
+                <a:alpha val="12000"/>
               </a:srgbClr>
             </a:outerShdw>
           </a:effectLst>
@@ -12670,11 +12675,11 @@
             <a:r>
               <a:rPr lang="en-US" sz="3400" b="1" dirty="0">
                 <a:solidFill>
-                  <a:srgbClr val="C9A961"/>
-                </a:solidFill>
-                <a:latin typeface="Bookman Old Style" pitchFamily="34" charset="0"/>
-                <a:ea typeface="Bookman Old Style" pitchFamily="34" charset="-122"/>
-                <a:cs typeface="Bookman Old Style" pitchFamily="34" charset="-120"/>
+                  <a:srgbClr val="B1937E"/>
+                </a:solidFill>
+                <a:latin typeface="Georgia" pitchFamily="34" charset="0"/>
+                <a:ea typeface="Georgia" pitchFamily="34" charset="-122"/>
+                <a:cs typeface="Georgia" pitchFamily="34" charset="-120"/>
               </a:rPr>
               <a:t>100.000€</a:t>
             </a:r>
@@ -12709,7 +12714,7 @@
             <a:r>
               <a:rPr lang="en-US" sz="1400" dirty="0">
                 <a:solidFill>
-                  <a:srgbClr val="9FB2C9"/>
+                  <a:srgbClr val="8A7E72"/>
                 </a:solidFill>
                 <a:latin typeface="Calibri" pitchFamily="34" charset="0"/>
                 <a:ea typeface="Calibri" pitchFamily="34" charset="-122"/>
@@ -12748,7 +12753,7 @@
             <a:r>
               <a:rPr lang="en-US" sz="4400" b="1" dirty="0">
                 <a:solidFill>
-                  <a:srgbClr val="C9A961"/>
+                  <a:srgbClr val="B1937E"/>
                 </a:solidFill>
                 <a:latin typeface="Calibri" pitchFamily="34" charset="0"/>
                 <a:ea typeface="Calibri" pitchFamily="34" charset="-122"/>
@@ -12787,7 +12792,7 @@
             <a:r>
               <a:rPr lang="en-US" sz="4400" b="1" dirty="0">
                 <a:solidFill>
-                  <a:srgbClr val="C9A961"/>
+                  <a:srgbClr val="B1937E"/>
                 </a:solidFill>
                 <a:latin typeface="Calibri" pitchFamily="34" charset="0"/>
                 <a:ea typeface="Calibri" pitchFamily="34" charset="-122"/>
@@ -12826,7 +12831,7 @@
             <a:r>
               <a:rPr lang="en-US" sz="1600" i="1" dirty="0">
                 <a:solidFill>
-                  <a:srgbClr val="9FB2C9"/>
+                  <a:srgbClr val="8A7E72"/>
                 </a:solidFill>
                 <a:latin typeface="Calibri" pitchFamily="34" charset="0"/>
                 <a:ea typeface="Calibri" pitchFamily="34" charset="-122"/>
@@ -12855,7 +12860,7 @@
           <a:noFill/>
           <a:ln w="9525">
             <a:solidFill>
-              <a:srgbClr val="5C708A">
+              <a:srgbClr val="A89A86">
                 <a:alpha val="60000"/>
               </a:srgbClr>
             </a:solidFill>
@@ -12890,7 +12895,7 @@
             <a:r>
               <a:rPr lang="en-US" sz="900" dirty="0">
                 <a:solidFill>
-                  <a:srgbClr val="5C708A"/>
+                  <a:srgbClr val="A89A86"/>
                 </a:solidFill>
                 <a:latin typeface="Calibri" pitchFamily="34" charset="0"/>
                 <a:ea typeface="Calibri" pitchFamily="34" charset="-122"/>
@@ -12929,7 +12934,7 @@
             <a:r>
               <a:rPr lang="en-US" sz="900" dirty="0">
                 <a:solidFill>
-                  <a:srgbClr val="5C708A"/>
+                  <a:srgbClr val="A89A86"/>
                 </a:solidFill>
                 <a:latin typeface="Calibri" pitchFamily="34" charset="0"/>
                 <a:ea typeface="Calibri" pitchFamily="34" charset="-122"/>
@@ -12955,7 +12960,7 @@
     <p:bg>
       <p:bgPr>
         <a:solidFill>
-          <a:srgbClr val="0B1D33"/>
+          <a:srgbClr val="F8F6F3"/>
         </a:solidFill>
       </p:bgPr>
     </p:bg>
@@ -13000,7 +13005,7 @@
             <a:r>
               <a:rPr lang="en-US" sz="1200" b="1" spc="300" kern="0" dirty="0">
                 <a:solidFill>
-                  <a:srgbClr val="4A9EFF"/>
+                  <a:srgbClr val="9A7B66"/>
                 </a:solidFill>
                 <a:latin typeface="Calibri" pitchFamily="34" charset="0"/>
                 <a:ea typeface="Calibri" pitchFamily="34" charset="-122"/>
@@ -13039,11 +13044,11 @@
             <a:r>
               <a:rPr lang="en-US" sz="3200" b="1" dirty="0">
                 <a:solidFill>
-                  <a:srgbClr val="EAF1FA"/>
-                </a:solidFill>
-                <a:latin typeface="Bookman Old Style" pitchFamily="34" charset="0"/>
-                <a:ea typeface="Bookman Old Style" pitchFamily="34" charset="-122"/>
-                <a:cs typeface="Bookman Old Style" pitchFamily="34" charset="-120"/>
+                  <a:srgbClr val="33302B"/>
+                </a:solidFill>
+                <a:latin typeface="Georgia" pitchFamily="34" charset="0"/>
+                <a:ea typeface="Georgia" pitchFamily="34" charset="-122"/>
+                <a:cs typeface="Georgia" pitchFamily="34" charset="-120"/>
               </a:rPr>
               <a:t>Há mais do que uma forma de chegar lá</a:t>
             </a:r>
@@ -13068,20 +13073,20 @@
             </a:avLst>
           </a:prstGeom>
           <a:solidFill>
-            <a:srgbClr val="13283F"/>
+            <a:srgbClr val="FFFFFF"/>
           </a:solidFill>
           <a:ln w="12700">
             <a:solidFill>
-              <a:srgbClr val="9FB2C9">
+              <a:srgbClr val="8A7E72">
                 <a:alpha val="65000"/>
               </a:srgbClr>
             </a:solidFill>
             <a:prstDash val="solid"/>
           </a:ln>
           <a:effectLst>
-            <a:outerShdw sx="100000" sy="100000" kx="0" ky="0" algn="bl" rotWithShape="0" blurRad="127000" dist="38100" dir="5400000">
-              <a:srgbClr val="000000">
-                <a:alpha val="28000"/>
+            <a:outerShdw sx="100000" sy="100000" kx="0" ky="0" algn="bl" rotWithShape="0" blurRad="114300" dist="38100" dir="5400000">
+              <a:srgbClr val="7A6A55">
+                <a:alpha val="12000"/>
               </a:srgbClr>
             </a:outerShdw>
           </a:effectLst>
@@ -13114,7 +13119,7 @@
             <a:r>
               <a:rPr lang="en-US" sz="1200" spc="200" kern="0" dirty="0">
                 <a:solidFill>
-                  <a:srgbClr val="5C708A"/>
+                  <a:srgbClr val="A89A86"/>
                 </a:solidFill>
                 <a:latin typeface="Calibri" pitchFamily="34" charset="0"/>
                 <a:ea typeface="Calibri" pitchFamily="34" charset="-122"/>
@@ -13153,11 +13158,11 @@
             <a:r>
               <a:rPr lang="en-US" sz="6400" b="1" dirty="0">
                 <a:solidFill>
-                  <a:srgbClr val="9FB2C9"/>
-                </a:solidFill>
-                <a:latin typeface="Bookman Old Style" pitchFamily="34" charset="0"/>
-                <a:ea typeface="Bookman Old Style" pitchFamily="34" charset="-122"/>
-                <a:cs typeface="Bookman Old Style" pitchFamily="34" charset="-120"/>
+                  <a:srgbClr val="8A7E72"/>
+                </a:solidFill>
+                <a:latin typeface="Georgia" pitchFamily="34" charset="0"/>
+                <a:ea typeface="Georgia" pitchFamily="34" charset="-122"/>
+                <a:cs typeface="Georgia" pitchFamily="34" charset="-120"/>
               </a:rPr>
               <a:t>33</a:t>
             </a:r>
@@ -13192,7 +13197,7 @@
             <a:r>
               <a:rPr lang="en-US" sz="1200" dirty="0">
                 <a:solidFill>
-                  <a:srgbClr val="9FB2C9"/>
+                  <a:srgbClr val="8A7E72"/>
                 </a:solidFill>
                 <a:latin typeface="Calibri" pitchFamily="34" charset="0"/>
                 <a:ea typeface="Calibri" pitchFamily="34" charset="-122"/>
@@ -13231,11 +13236,11 @@
             <a:r>
               <a:rPr lang="en-US" sz="2400" b="1" dirty="0">
                 <a:solidFill>
-                  <a:srgbClr val="EAF1FA"/>
-                </a:solidFill>
-                <a:latin typeface="Bookman Old Style" pitchFamily="34" charset="0"/>
-                <a:ea typeface="Bookman Old Style" pitchFamily="34" charset="-122"/>
-                <a:cs typeface="Bookman Old Style" pitchFamily="34" charset="-120"/>
+                  <a:srgbClr val="33302B"/>
+                </a:solidFill>
+                <a:latin typeface="Georgia" pitchFamily="34" charset="0"/>
+                <a:ea typeface="Georgia" pitchFamily="34" charset="-122"/>
+                <a:cs typeface="Georgia" pitchFamily="34" charset="-120"/>
               </a:rPr>
               <a:t>× 3.000€</a:t>
             </a:r>
@@ -13260,7 +13265,7 @@
           <a:noFill/>
           <a:ln w="9525">
             <a:solidFill>
-              <a:srgbClr val="5C708A">
+              <a:srgbClr val="A89A86">
                 <a:alpha val="60000"/>
               </a:srgbClr>
             </a:solidFill>
@@ -13295,7 +13300,7 @@
             <a:r>
               <a:rPr lang="en-US" sz="1500" b="1" dirty="0">
                 <a:solidFill>
-                  <a:srgbClr val="9FB2C9"/>
+                  <a:srgbClr val="8A7E72"/>
                 </a:solidFill>
                 <a:latin typeface="Calibri" pitchFamily="34" charset="0"/>
                 <a:ea typeface="Calibri" pitchFamily="34" charset="-122"/>
@@ -13334,7 +13339,7 @@
             <a:r>
               <a:rPr lang="en-US" sz="1250" dirty="0">
                 <a:solidFill>
-                  <a:srgbClr val="9FB2C9"/>
+                  <a:srgbClr val="8A7E72"/>
                 </a:solidFill>
                 <a:latin typeface="Calibri" pitchFamily="34" charset="0"/>
                 <a:ea typeface="Calibri" pitchFamily="34" charset="-122"/>
@@ -13363,20 +13368,20 @@
             </a:avLst>
           </a:prstGeom>
           <a:solidFill>
-            <a:srgbClr val="13283F"/>
+            <a:srgbClr val="FFFFFF"/>
           </a:solidFill>
           <a:ln w="12700">
             <a:solidFill>
-              <a:srgbClr val="4A9EFF">
+              <a:srgbClr val="9A7B66">
                 <a:alpha val="65000"/>
               </a:srgbClr>
             </a:solidFill>
             <a:prstDash val="solid"/>
           </a:ln>
           <a:effectLst>
-            <a:outerShdw sx="100000" sy="100000" kx="0" ky="0" algn="bl" rotWithShape="0" blurRad="127000" dist="38100" dir="5400000">
-              <a:srgbClr val="000000">
-                <a:alpha val="28000"/>
+            <a:outerShdw sx="100000" sy="100000" kx="0" ky="0" algn="bl" rotWithShape="0" blurRad="114300" dist="38100" dir="5400000">
+              <a:srgbClr val="7A6A55">
+                <a:alpha val="12000"/>
               </a:srgbClr>
             </a:outerShdw>
           </a:effectLst>
@@ -13409,7 +13414,7 @@
             <a:r>
               <a:rPr lang="en-US" sz="1200" spc="200" kern="0" dirty="0">
                 <a:solidFill>
-                  <a:srgbClr val="5C708A"/>
+                  <a:srgbClr val="A89A86"/>
                 </a:solidFill>
                 <a:latin typeface="Calibri" pitchFamily="34" charset="0"/>
                 <a:ea typeface="Calibri" pitchFamily="34" charset="-122"/>
@@ -13448,11 +13453,11 @@
             <a:r>
               <a:rPr lang="en-US" sz="6400" b="1" dirty="0">
                 <a:solidFill>
-                  <a:srgbClr val="4A9EFF"/>
-                </a:solidFill>
-                <a:latin typeface="Bookman Old Style" pitchFamily="34" charset="0"/>
-                <a:ea typeface="Bookman Old Style" pitchFamily="34" charset="-122"/>
-                <a:cs typeface="Bookman Old Style" pitchFamily="34" charset="-120"/>
+                  <a:srgbClr val="9A7B66"/>
+                </a:solidFill>
+                <a:latin typeface="Georgia" pitchFamily="34" charset="0"/>
+                <a:ea typeface="Georgia" pitchFamily="34" charset="-122"/>
+                <a:cs typeface="Georgia" pitchFamily="34" charset="-120"/>
               </a:rPr>
               <a:t>25</a:t>
             </a:r>
@@ -13487,7 +13492,7 @@
             <a:r>
               <a:rPr lang="en-US" sz="1200" dirty="0">
                 <a:solidFill>
-                  <a:srgbClr val="9FB2C9"/>
+                  <a:srgbClr val="8A7E72"/>
                 </a:solidFill>
                 <a:latin typeface="Calibri" pitchFamily="34" charset="0"/>
                 <a:ea typeface="Calibri" pitchFamily="34" charset="-122"/>
@@ -13526,11 +13531,11 @@
             <a:r>
               <a:rPr lang="en-US" sz="2400" b="1" dirty="0">
                 <a:solidFill>
-                  <a:srgbClr val="EAF1FA"/>
-                </a:solidFill>
-                <a:latin typeface="Bookman Old Style" pitchFamily="34" charset="0"/>
-                <a:ea typeface="Bookman Old Style" pitchFamily="34" charset="-122"/>
-                <a:cs typeface="Bookman Old Style" pitchFamily="34" charset="-120"/>
+                  <a:srgbClr val="33302B"/>
+                </a:solidFill>
+                <a:latin typeface="Georgia" pitchFamily="34" charset="0"/>
+                <a:ea typeface="Georgia" pitchFamily="34" charset="-122"/>
+                <a:cs typeface="Georgia" pitchFamily="34" charset="-120"/>
               </a:rPr>
               <a:t>× 4.000€</a:t>
             </a:r>
@@ -13555,7 +13560,7 @@
           <a:noFill/>
           <a:ln w="9525">
             <a:solidFill>
-              <a:srgbClr val="5C708A">
+              <a:srgbClr val="A89A86">
                 <a:alpha val="60000"/>
               </a:srgbClr>
             </a:solidFill>
@@ -13590,7 +13595,7 @@
             <a:r>
               <a:rPr lang="en-US" sz="1500" b="1" dirty="0">
                 <a:solidFill>
-                  <a:srgbClr val="4A9EFF"/>
+                  <a:srgbClr val="9A7B66"/>
                 </a:solidFill>
                 <a:latin typeface="Calibri" pitchFamily="34" charset="0"/>
                 <a:ea typeface="Calibri" pitchFamily="34" charset="-122"/>
@@ -13629,7 +13634,7 @@
             <a:r>
               <a:rPr lang="en-US" sz="1250" dirty="0">
                 <a:solidFill>
-                  <a:srgbClr val="9FB2C9"/>
+                  <a:srgbClr val="8A7E72"/>
                 </a:solidFill>
                 <a:latin typeface="Calibri" pitchFamily="34" charset="0"/>
                 <a:ea typeface="Calibri" pitchFamily="34" charset="-122"/>
@@ -13658,20 +13663,20 @@
             </a:avLst>
           </a:prstGeom>
           <a:solidFill>
-            <a:srgbClr val="13283F"/>
+            <a:srgbClr val="FFFFFF"/>
           </a:solidFill>
           <a:ln w="12700">
             <a:solidFill>
-              <a:srgbClr val="4A9EFF">
+              <a:srgbClr val="9A7B66">
                 <a:alpha val="65000"/>
               </a:srgbClr>
             </a:solidFill>
             <a:prstDash val="solid"/>
           </a:ln>
           <a:effectLst>
-            <a:outerShdw sx="100000" sy="100000" kx="0" ky="0" algn="bl" rotWithShape="0" blurRad="127000" dist="38100" dir="5400000">
-              <a:srgbClr val="000000">
-                <a:alpha val="28000"/>
+            <a:outerShdw sx="100000" sy="100000" kx="0" ky="0" algn="bl" rotWithShape="0" blurRad="114300" dist="38100" dir="5400000">
+              <a:srgbClr val="7A6A55">
+                <a:alpha val="12000"/>
               </a:srgbClr>
             </a:outerShdw>
           </a:effectLst>
@@ -13704,7 +13709,7 @@
             <a:r>
               <a:rPr lang="en-US" sz="1200" spc="200" kern="0" dirty="0">
                 <a:solidFill>
-                  <a:srgbClr val="5C708A"/>
+                  <a:srgbClr val="A89A86"/>
                 </a:solidFill>
                 <a:latin typeface="Calibri" pitchFamily="34" charset="0"/>
                 <a:ea typeface="Calibri" pitchFamily="34" charset="-122"/>
@@ -13743,11 +13748,11 @@
             <a:r>
               <a:rPr lang="en-US" sz="6400" b="1" dirty="0">
                 <a:solidFill>
-                  <a:srgbClr val="4A9EFF"/>
-                </a:solidFill>
-                <a:latin typeface="Bookman Old Style" pitchFamily="34" charset="0"/>
-                <a:ea typeface="Bookman Old Style" pitchFamily="34" charset="-122"/>
-                <a:cs typeface="Bookman Old Style" pitchFamily="34" charset="-120"/>
+                  <a:srgbClr val="9A7B66"/>
+                </a:solidFill>
+                <a:latin typeface="Georgia" pitchFamily="34" charset="0"/>
+                <a:ea typeface="Georgia" pitchFamily="34" charset="-122"/>
+                <a:cs typeface="Georgia" pitchFamily="34" charset="-120"/>
               </a:rPr>
               <a:t>20</a:t>
             </a:r>
@@ -13782,7 +13787,7 @@
             <a:r>
               <a:rPr lang="en-US" sz="1200" dirty="0">
                 <a:solidFill>
-                  <a:srgbClr val="9FB2C9"/>
+                  <a:srgbClr val="8A7E72"/>
                 </a:solidFill>
                 <a:latin typeface="Calibri" pitchFamily="34" charset="0"/>
                 <a:ea typeface="Calibri" pitchFamily="34" charset="-122"/>
@@ -13821,11 +13826,11 @@
             <a:r>
               <a:rPr lang="en-US" sz="2400" b="1" dirty="0">
                 <a:solidFill>
-                  <a:srgbClr val="EAF1FA"/>
-                </a:solidFill>
-                <a:latin typeface="Bookman Old Style" pitchFamily="34" charset="0"/>
-                <a:ea typeface="Bookman Old Style" pitchFamily="34" charset="-122"/>
-                <a:cs typeface="Bookman Old Style" pitchFamily="34" charset="-120"/>
+                  <a:srgbClr val="33302B"/>
+                </a:solidFill>
+                <a:latin typeface="Georgia" pitchFamily="34" charset="0"/>
+                <a:ea typeface="Georgia" pitchFamily="34" charset="-122"/>
+                <a:cs typeface="Georgia" pitchFamily="34" charset="-120"/>
               </a:rPr>
               <a:t>× 5.000€</a:t>
             </a:r>
@@ -13850,7 +13855,7 @@
           <a:noFill/>
           <a:ln w="9525">
             <a:solidFill>
-              <a:srgbClr val="5C708A">
+              <a:srgbClr val="A89A86">
                 <a:alpha val="60000"/>
               </a:srgbClr>
             </a:solidFill>
@@ -13885,7 +13890,7 @@
             <a:r>
               <a:rPr lang="en-US" sz="1500" b="1" dirty="0">
                 <a:solidFill>
-                  <a:srgbClr val="4A9EFF"/>
+                  <a:srgbClr val="9A7B66"/>
                 </a:solidFill>
                 <a:latin typeface="Calibri" pitchFamily="34" charset="0"/>
                 <a:ea typeface="Calibri" pitchFamily="34" charset="-122"/>
@@ -13924,7 +13929,7 @@
             <a:r>
               <a:rPr lang="en-US" sz="1250" dirty="0">
                 <a:solidFill>
-                  <a:srgbClr val="9FB2C9"/>
+                  <a:srgbClr val="8A7E72"/>
                 </a:solidFill>
                 <a:latin typeface="Calibri" pitchFamily="34" charset="0"/>
                 <a:ea typeface="Calibri" pitchFamily="34" charset="-122"/>
@@ -13953,20 +13958,20 @@
             </a:avLst>
           </a:prstGeom>
           <a:solidFill>
-            <a:srgbClr val="13283F"/>
+            <a:srgbClr val="FFFFFF"/>
           </a:solidFill>
           <a:ln w="12700">
             <a:solidFill>
-              <a:srgbClr val="C9A961">
+              <a:srgbClr val="B1937E">
                 <a:alpha val="65000"/>
               </a:srgbClr>
             </a:solidFill>
             <a:prstDash val="solid"/>
           </a:ln>
           <a:effectLst>
-            <a:outerShdw sx="100000" sy="100000" kx="0" ky="0" algn="bl" rotWithShape="0" blurRad="127000" dist="38100" dir="5400000">
-              <a:srgbClr val="000000">
-                <a:alpha val="28000"/>
+            <a:outerShdw sx="100000" sy="100000" kx="0" ky="0" algn="bl" rotWithShape="0" blurRad="114300" dist="38100" dir="5400000">
+              <a:srgbClr val="7A6A55">
+                <a:alpha val="12000"/>
               </a:srgbClr>
             </a:outerShdw>
           </a:effectLst>
@@ -13999,7 +14004,7 @@
             <a:r>
               <a:rPr lang="en-US" sz="1200" spc="200" kern="0" dirty="0">
                 <a:solidFill>
-                  <a:srgbClr val="5C708A"/>
+                  <a:srgbClr val="A89A86"/>
                 </a:solidFill>
                 <a:latin typeface="Calibri" pitchFamily="34" charset="0"/>
                 <a:ea typeface="Calibri" pitchFamily="34" charset="-122"/>
@@ -14038,11 +14043,11 @@
             <a:r>
               <a:rPr lang="en-US" sz="6400" b="1" dirty="0">
                 <a:solidFill>
-                  <a:srgbClr val="C9A961"/>
-                </a:solidFill>
-                <a:latin typeface="Bookman Old Style" pitchFamily="34" charset="0"/>
-                <a:ea typeface="Bookman Old Style" pitchFamily="34" charset="-122"/>
-                <a:cs typeface="Bookman Old Style" pitchFamily="34" charset="-120"/>
+                  <a:srgbClr val="B1937E"/>
+                </a:solidFill>
+                <a:latin typeface="Georgia" pitchFamily="34" charset="0"/>
+                <a:ea typeface="Georgia" pitchFamily="34" charset="-122"/>
+                <a:cs typeface="Georgia" pitchFamily="34" charset="-120"/>
               </a:rPr>
               <a:t>14</a:t>
             </a:r>
@@ -14077,7 +14082,7 @@
             <a:r>
               <a:rPr lang="en-US" sz="1200" dirty="0">
                 <a:solidFill>
-                  <a:srgbClr val="9FB2C9"/>
+                  <a:srgbClr val="8A7E72"/>
                 </a:solidFill>
                 <a:latin typeface="Calibri" pitchFamily="34" charset="0"/>
                 <a:ea typeface="Calibri" pitchFamily="34" charset="-122"/>
@@ -14116,11 +14121,11 @@
             <a:r>
               <a:rPr lang="en-US" sz="2400" b="1" dirty="0">
                 <a:solidFill>
-                  <a:srgbClr val="EAF1FA"/>
-                </a:solidFill>
-                <a:latin typeface="Bookman Old Style" pitchFamily="34" charset="0"/>
-                <a:ea typeface="Bookman Old Style" pitchFamily="34" charset="-122"/>
-                <a:cs typeface="Bookman Old Style" pitchFamily="34" charset="-120"/>
+                  <a:srgbClr val="33302B"/>
+                </a:solidFill>
+                <a:latin typeface="Georgia" pitchFamily="34" charset="0"/>
+                <a:ea typeface="Georgia" pitchFamily="34" charset="-122"/>
+                <a:cs typeface="Georgia" pitchFamily="34" charset="-120"/>
               </a:rPr>
               <a:t>× 7.000€</a:t>
             </a:r>
@@ -14145,7 +14150,7 @@
           <a:noFill/>
           <a:ln w="9525">
             <a:solidFill>
-              <a:srgbClr val="5C708A">
+              <a:srgbClr val="A89A86">
                 <a:alpha val="60000"/>
               </a:srgbClr>
             </a:solidFill>
@@ -14180,7 +14185,7 @@
             <a:r>
               <a:rPr lang="en-US" sz="1500" b="1" dirty="0">
                 <a:solidFill>
-                  <a:srgbClr val="C9A961"/>
+                  <a:srgbClr val="B1937E"/>
                 </a:solidFill>
                 <a:latin typeface="Calibri" pitchFamily="34" charset="0"/>
                 <a:ea typeface="Calibri" pitchFamily="34" charset="-122"/>
@@ -14219,7 +14224,7 @@
             <a:r>
               <a:rPr lang="en-US" sz="1250" dirty="0">
                 <a:solidFill>
-                  <a:srgbClr val="9FB2C9"/>
+                  <a:srgbClr val="8A7E72"/>
                 </a:solidFill>
                 <a:latin typeface="Calibri" pitchFamily="34" charset="0"/>
                 <a:ea typeface="Calibri" pitchFamily="34" charset="-122"/>
@@ -14258,7 +14263,7 @@
             <a:r>
               <a:rPr lang="en-US" sz="1500" i="1" dirty="0">
                 <a:solidFill>
-                  <a:srgbClr val="9FB2C9"/>
+                  <a:srgbClr val="8A7E72"/>
                 </a:solidFill>
                 <a:latin typeface="Calibri" pitchFamily="34" charset="0"/>
                 <a:ea typeface="Calibri" pitchFamily="34" charset="-122"/>
@@ -14287,7 +14292,7 @@
           <a:noFill/>
           <a:ln w="9525">
             <a:solidFill>
-              <a:srgbClr val="5C708A">
+              <a:srgbClr val="A89A86">
                 <a:alpha val="60000"/>
               </a:srgbClr>
             </a:solidFill>
@@ -14322,7 +14327,7 @@
             <a:r>
               <a:rPr lang="en-US" sz="900" dirty="0">
                 <a:solidFill>
-                  <a:srgbClr val="5C708A"/>
+                  <a:srgbClr val="A89A86"/>
                 </a:solidFill>
                 <a:latin typeface="Calibri" pitchFamily="34" charset="0"/>
                 <a:ea typeface="Calibri" pitchFamily="34" charset="-122"/>
@@ -14361,7 +14366,7 @@
             <a:r>
               <a:rPr lang="en-US" sz="900" dirty="0">
                 <a:solidFill>
-                  <a:srgbClr val="5C708A"/>
+                  <a:srgbClr val="A89A86"/>
                 </a:solidFill>
                 <a:latin typeface="Calibri" pitchFamily="34" charset="0"/>
                 <a:ea typeface="Calibri" pitchFamily="34" charset="-122"/>
@@ -14387,7 +14392,7 @@
     <p:bg>
       <p:bgPr>
         <a:solidFill>
-          <a:srgbClr val="0B1D33"/>
+          <a:srgbClr val="F8F6F3"/>
         </a:solidFill>
       </p:bgPr>
     </p:bg>
@@ -14432,7 +14437,7 @@
             <a:r>
               <a:rPr lang="en-US" sz="1200" b="1" spc="300" kern="0" dirty="0">
                 <a:solidFill>
-                  <a:srgbClr val="4A9EFF"/>
+                  <a:srgbClr val="9A7B66"/>
                 </a:solidFill>
                 <a:latin typeface="Calibri" pitchFamily="34" charset="0"/>
                 <a:ea typeface="Calibri" pitchFamily="34" charset="-122"/>
@@ -14471,11 +14476,11 @@
             <a:r>
               <a:rPr lang="en-US" sz="3200" b="1" dirty="0">
                 <a:solidFill>
-                  <a:srgbClr val="EAF1FA"/>
-                </a:solidFill>
-                <a:latin typeface="Bookman Old Style" pitchFamily="34" charset="0"/>
-                <a:ea typeface="Bookman Old Style" pitchFamily="34" charset="-122"/>
-                <a:cs typeface="Bookman Old Style" pitchFamily="34" charset="-120"/>
+                  <a:srgbClr val="33302B"/>
+                </a:solidFill>
+                <a:latin typeface="Georgia" pitchFamily="34" charset="0"/>
+                <a:ea typeface="Georgia" pitchFamily="34" charset="-122"/>
+                <a:cs typeface="Georgia" pitchFamily="34" charset="-120"/>
               </a:rPr>
               <a:t>O total é igual. O preço pessoal não.</a:t>
             </a:r>
@@ -14500,13 +14505,18 @@
             </a:avLst>
           </a:prstGeom>
           <a:solidFill>
-            <a:srgbClr val="13283F"/>
+            <a:srgbClr val="FFFFFF"/>
           </a:solidFill>
-          <a:ln/>
+          <a:ln w="12700">
+            <a:solidFill>
+              <a:srgbClr val="E3D9CC"/>
+            </a:solidFill>
+            <a:prstDash val="solid"/>
+          </a:ln>
           <a:effectLst>
-            <a:outerShdw sx="100000" sy="100000" kx="0" ky="0" algn="bl" rotWithShape="0" blurRad="127000" dist="38100" dir="5400000">
-              <a:srgbClr val="000000">
-                <a:alpha val="28000"/>
+            <a:outerShdw sx="100000" sy="100000" kx="0" ky="0" algn="bl" rotWithShape="0" blurRad="114300" dist="38100" dir="5400000">
+              <a:srgbClr val="7A6A55">
+                <a:alpha val="12000"/>
               </a:srgbClr>
             </a:outerShdw>
           </a:effectLst>
@@ -14527,9 +14537,14 @@
             <a:avLst/>
           </a:prstGeom>
           <a:solidFill>
-            <a:srgbClr val="16314F"/>
+            <a:srgbClr val="EADFD0"/>
           </a:solidFill>
-          <a:ln/>
+          <a:ln w="9525">
+            <a:solidFill>
+              <a:srgbClr val="E3D9CC"/>
+            </a:solidFill>
+            <a:prstDash val="solid"/>
+          </a:ln>
         </p:spPr>
       </p:sp>
       <p:pic>
@@ -14583,11 +14598,11 @@
             <a:r>
               <a:rPr lang="en-US" sz="1900" b="1" dirty="0">
                 <a:solidFill>
-                  <a:srgbClr val="C9A961"/>
-                </a:solidFill>
-                <a:latin typeface="Bookman Old Style" pitchFamily="34" charset="0"/>
-                <a:ea typeface="Bookman Old Style" pitchFamily="34" charset="-122"/>
-                <a:cs typeface="Bookman Old Style" pitchFamily="34" charset="-120"/>
+                  <a:srgbClr val="B1937E"/>
+                </a:solidFill>
+                <a:latin typeface="Georgia" pitchFamily="34" charset="0"/>
+                <a:ea typeface="Georgia" pitchFamily="34" charset="-122"/>
+                <a:cs typeface="Georgia" pitchFamily="34" charset="-120"/>
               </a:rPr>
               <a:t>Tempo</a:t>
             </a:r>
@@ -14622,7 +14637,7 @@
             <a:r>
               <a:rPr lang="en-US" sz="1400" dirty="0">
                 <a:solidFill>
-                  <a:srgbClr val="9FB2C9"/>
+                  <a:srgbClr val="8A7E72"/>
                 </a:solidFill>
                 <a:latin typeface="Calibri" pitchFamily="34" charset="0"/>
                 <a:ea typeface="Calibri" pitchFamily="34" charset="-122"/>
@@ -14651,13 +14666,18 @@
             </a:avLst>
           </a:prstGeom>
           <a:solidFill>
-            <a:srgbClr val="13283F"/>
+            <a:srgbClr val="FFFFFF"/>
           </a:solidFill>
-          <a:ln/>
+          <a:ln w="12700">
+            <a:solidFill>
+              <a:srgbClr val="E3D9CC"/>
+            </a:solidFill>
+            <a:prstDash val="solid"/>
+          </a:ln>
           <a:effectLst>
-            <a:outerShdw sx="100000" sy="100000" kx="0" ky="0" algn="bl" rotWithShape="0" blurRad="127000" dist="38100" dir="5400000">
-              <a:srgbClr val="000000">
-                <a:alpha val="28000"/>
+            <a:outerShdw sx="100000" sy="100000" kx="0" ky="0" algn="bl" rotWithShape="0" blurRad="114300" dist="38100" dir="5400000">
+              <a:srgbClr val="7A6A55">
+                <a:alpha val="12000"/>
               </a:srgbClr>
             </a:outerShdw>
           </a:effectLst>
@@ -14678,9 +14698,14 @@
             <a:avLst/>
           </a:prstGeom>
           <a:solidFill>
-            <a:srgbClr val="16314F"/>
+            <a:srgbClr val="EADFD0"/>
           </a:solidFill>
-          <a:ln/>
+          <a:ln w="9525">
+            <a:solidFill>
+              <a:srgbClr val="E3D9CC"/>
+            </a:solidFill>
+            <a:prstDash val="solid"/>
+          </a:ln>
         </p:spPr>
       </p:sp>
       <p:pic>
@@ -14734,11 +14759,11 @@
             <a:r>
               <a:rPr lang="en-US" sz="1900" b="1" dirty="0">
                 <a:solidFill>
-                  <a:srgbClr val="C9A961"/>
-                </a:solidFill>
-                <a:latin typeface="Bookman Old Style" pitchFamily="34" charset="0"/>
-                <a:ea typeface="Bookman Old Style" pitchFamily="34" charset="-122"/>
-                <a:cs typeface="Bookman Old Style" pitchFamily="34" charset="-120"/>
+                  <a:srgbClr val="B1937E"/>
+                </a:solidFill>
+                <a:latin typeface="Georgia" pitchFamily="34" charset="0"/>
+                <a:ea typeface="Georgia" pitchFamily="34" charset="-122"/>
+                <a:cs typeface="Georgia" pitchFamily="34" charset="-120"/>
               </a:rPr>
               <a:t>Energia</a:t>
             </a:r>
@@ -14773,7 +14798,7 @@
             <a:r>
               <a:rPr lang="en-US" sz="1400" dirty="0">
                 <a:solidFill>
-                  <a:srgbClr val="9FB2C9"/>
+                  <a:srgbClr val="8A7E72"/>
                 </a:solidFill>
                 <a:latin typeface="Calibri" pitchFamily="34" charset="0"/>
                 <a:ea typeface="Calibri" pitchFamily="34" charset="-122"/>
@@ -14802,13 +14827,18 @@
             </a:avLst>
           </a:prstGeom>
           <a:solidFill>
-            <a:srgbClr val="13283F"/>
+            <a:srgbClr val="FFFFFF"/>
           </a:solidFill>
-          <a:ln/>
+          <a:ln w="12700">
+            <a:solidFill>
+              <a:srgbClr val="E3D9CC"/>
+            </a:solidFill>
+            <a:prstDash val="solid"/>
+          </a:ln>
           <a:effectLst>
-            <a:outerShdw sx="100000" sy="100000" kx="0" ky="0" algn="bl" rotWithShape="0" blurRad="127000" dist="38100" dir="5400000">
-              <a:srgbClr val="000000">
-                <a:alpha val="28000"/>
+            <a:outerShdw sx="100000" sy="100000" kx="0" ky="0" algn="bl" rotWithShape="0" blurRad="114300" dist="38100" dir="5400000">
+              <a:srgbClr val="7A6A55">
+                <a:alpha val="12000"/>
               </a:srgbClr>
             </a:outerShdw>
           </a:effectLst>
@@ -14829,9 +14859,14 @@
             <a:avLst/>
           </a:prstGeom>
           <a:solidFill>
-            <a:srgbClr val="16314F"/>
+            <a:srgbClr val="EADFD0"/>
           </a:solidFill>
-          <a:ln/>
+          <a:ln w="9525">
+            <a:solidFill>
+              <a:srgbClr val="E3D9CC"/>
+            </a:solidFill>
+            <a:prstDash val="solid"/>
+          </a:ln>
         </p:spPr>
       </p:sp>
       <p:pic>
@@ -14885,11 +14920,11 @@
             <a:r>
               <a:rPr lang="en-US" sz="1900" b="1" dirty="0">
                 <a:solidFill>
-                  <a:srgbClr val="C9A961"/>
-                </a:solidFill>
-                <a:latin typeface="Bookman Old Style" pitchFamily="34" charset="0"/>
-                <a:ea typeface="Bookman Old Style" pitchFamily="34" charset="-122"/>
-                <a:cs typeface="Bookman Old Style" pitchFamily="34" charset="-120"/>
+                  <a:srgbClr val="B1937E"/>
+                </a:solidFill>
+                <a:latin typeface="Georgia" pitchFamily="34" charset="0"/>
+                <a:ea typeface="Georgia" pitchFamily="34" charset="-122"/>
+                <a:cs typeface="Georgia" pitchFamily="34" charset="-120"/>
               </a:rPr>
               <a:t>Posicionamento</a:t>
             </a:r>
@@ -14924,7 +14959,7 @@
             <a:r>
               <a:rPr lang="en-US" sz="1400" dirty="0">
                 <a:solidFill>
-                  <a:srgbClr val="9FB2C9"/>
+                  <a:srgbClr val="8A7E72"/>
                 </a:solidFill>
                 <a:latin typeface="Calibri" pitchFamily="34" charset="0"/>
                 <a:ea typeface="Calibri" pitchFamily="34" charset="-122"/>
@@ -14953,7 +14988,7 @@
           <a:noFill/>
           <a:ln w="9525">
             <a:solidFill>
-              <a:srgbClr val="5C708A">
+              <a:srgbClr val="A89A86">
                 <a:alpha val="60000"/>
               </a:srgbClr>
             </a:solidFill>
@@ -14988,7 +15023,7 @@
             <a:r>
               <a:rPr lang="en-US" sz="900" dirty="0">
                 <a:solidFill>
-                  <a:srgbClr val="5C708A"/>
+                  <a:srgbClr val="A89A86"/>
                 </a:solidFill>
                 <a:latin typeface="Calibri" pitchFamily="34" charset="0"/>
                 <a:ea typeface="Calibri" pitchFamily="34" charset="-122"/>
@@ -15027,7 +15062,7 @@
             <a:r>
               <a:rPr lang="en-US" sz="900" dirty="0">
                 <a:solidFill>
-                  <a:srgbClr val="5C708A"/>
+                  <a:srgbClr val="A89A86"/>
                 </a:solidFill>
                 <a:latin typeface="Calibri" pitchFamily="34" charset="0"/>
                 <a:ea typeface="Calibri" pitchFamily="34" charset="-122"/>
@@ -15053,7 +15088,7 @@
     <p:bg>
       <p:bgPr>
         <a:solidFill>
-          <a:srgbClr val="0B1D33"/>
+          <a:srgbClr val="F8F6F3"/>
         </a:solidFill>
       </p:bgPr>
     </p:bg>
@@ -15098,7 +15133,7 @@
             <a:r>
               <a:rPr lang="en-US" sz="1200" b="1" spc="300" kern="0" dirty="0">
                 <a:solidFill>
-                  <a:srgbClr val="4A9EFF"/>
+                  <a:srgbClr val="9A7B66"/>
                 </a:solidFill>
                 <a:latin typeface="Calibri" pitchFamily="34" charset="0"/>
                 <a:ea typeface="Calibri" pitchFamily="34" charset="-122"/>
@@ -15137,11 +15172,11 @@
             <a:r>
               <a:rPr lang="en-US" sz="3600" b="1" dirty="0">
                 <a:solidFill>
-                  <a:srgbClr val="EAF1FA"/>
-                </a:solidFill>
-                <a:latin typeface="Bookman Old Style" pitchFamily="34" charset="0"/>
-                <a:ea typeface="Bookman Old Style" pitchFamily="34" charset="-122"/>
-                <a:cs typeface="Bookman Old Style" pitchFamily="34" charset="-120"/>
+                  <a:srgbClr val="33302B"/>
+                </a:solidFill>
+                <a:latin typeface="Georgia" pitchFamily="34" charset="0"/>
+                <a:ea typeface="Georgia" pitchFamily="34" charset="-122"/>
+                <a:cs typeface="Georgia" pitchFamily="34" charset="-120"/>
               </a:rPr>
               <a:t>Volume ou Preço?</a:t>
             </a:r>
@@ -15166,20 +15201,20 @@
             </a:avLst>
           </a:prstGeom>
           <a:solidFill>
-            <a:srgbClr val="13283F"/>
+            <a:srgbClr val="FFFFFF"/>
           </a:solidFill>
           <a:ln w="9525">
             <a:solidFill>
-              <a:srgbClr val="9FB2C9">
+              <a:srgbClr val="8A7E72">
                 <a:alpha val="55000"/>
               </a:srgbClr>
             </a:solidFill>
             <a:prstDash val="solid"/>
           </a:ln>
           <a:effectLst>
-            <a:outerShdw sx="100000" sy="100000" kx="0" ky="0" algn="bl" rotWithShape="0" blurRad="127000" dist="38100" dir="5400000">
-              <a:srgbClr val="000000">
-                <a:alpha val="28000"/>
+            <a:outerShdw sx="100000" sy="100000" kx="0" ky="0" algn="bl" rotWithShape="0" blurRad="114300" dist="38100" dir="5400000">
+              <a:srgbClr val="7A6A55">
+                <a:alpha val="12000"/>
               </a:srgbClr>
             </a:outerShdw>
           </a:effectLst>
@@ -15212,11 +15247,11 @@
             <a:r>
               <a:rPr lang="en-US" sz="2000" b="1" dirty="0">
                 <a:solidFill>
-                  <a:srgbClr val="9FB2C9"/>
-                </a:solidFill>
-                <a:latin typeface="Bookman Old Style" pitchFamily="34" charset="0"/>
-                <a:ea typeface="Bookman Old Style" pitchFamily="34" charset="-122"/>
-                <a:cs typeface="Bookman Old Style" pitchFamily="34" charset="-120"/>
+                  <a:srgbClr val="8A7E72"/>
+                </a:solidFill>
+                <a:latin typeface="Georgia" pitchFamily="34" charset="0"/>
+                <a:ea typeface="Georgia" pitchFamily="34" charset="-122"/>
+                <a:cs typeface="Georgia" pitchFamily="34" charset="-120"/>
               </a:rPr>
               <a:t>O caminho do VOLUME</a:t>
             </a:r>
@@ -15241,7 +15276,7 @@
           <a:noFill/>
           <a:ln w="9525">
             <a:solidFill>
-              <a:srgbClr val="9FB2C9">
+              <a:srgbClr val="8A7E72">
                 <a:alpha val="50000"/>
               </a:srgbClr>
             </a:solidFill>
@@ -15280,7 +15315,7 @@
             <a:r>
               <a:rPr lang="en-US" sz="1450" dirty="0">
                 <a:solidFill>
-                  <a:srgbClr val="EAF1FA"/>
+                  <a:srgbClr val="33302B"/>
                 </a:solidFill>
                 <a:latin typeface="Calibri" pitchFamily="34" charset="0"/>
                 <a:ea typeface="Calibri" pitchFamily="34" charset="-122"/>
@@ -15301,7 +15336,7 @@
             <a:r>
               <a:rPr lang="en-US" sz="1450" dirty="0">
                 <a:solidFill>
-                  <a:srgbClr val="EAF1FA"/>
+                  <a:srgbClr val="33302B"/>
                 </a:solidFill>
                 <a:latin typeface="Calibri" pitchFamily="34" charset="0"/>
                 <a:ea typeface="Calibri" pitchFamily="34" charset="-122"/>
@@ -15322,7 +15357,7 @@
             <a:r>
               <a:rPr lang="en-US" sz="1450" dirty="0">
                 <a:solidFill>
-                  <a:srgbClr val="EAF1FA"/>
+                  <a:srgbClr val="33302B"/>
                 </a:solidFill>
                 <a:latin typeface="Calibri" pitchFamily="34" charset="0"/>
                 <a:ea typeface="Calibri" pitchFamily="34" charset="-122"/>
@@ -15343,7 +15378,7 @@
             <a:r>
               <a:rPr lang="en-US" sz="1450" dirty="0">
                 <a:solidFill>
-                  <a:srgbClr val="EAF1FA"/>
+                  <a:srgbClr val="33302B"/>
                 </a:solidFill>
                 <a:latin typeface="Calibri" pitchFamily="34" charset="0"/>
                 <a:ea typeface="Calibri" pitchFamily="34" charset="-122"/>
@@ -15364,7 +15399,7 @@
             <a:r>
               <a:rPr lang="en-US" sz="1450" dirty="0">
                 <a:solidFill>
-                  <a:srgbClr val="EAF1FA"/>
+                  <a:srgbClr val="33302B"/>
                 </a:solidFill>
                 <a:latin typeface="Calibri" pitchFamily="34" charset="0"/>
                 <a:ea typeface="Calibri" pitchFamily="34" charset="-122"/>
@@ -15393,18 +15428,18 @@
             </a:avLst>
           </a:prstGeom>
           <a:solidFill>
-            <a:srgbClr val="102844"/>
+            <a:srgbClr val="EFE7DE"/>
           </a:solidFill>
           <a:ln w="19050">
             <a:solidFill>
-              <a:srgbClr val="C9A961"/>
+              <a:srgbClr val="B1937E"/>
             </a:solidFill>
             <a:prstDash val="solid"/>
           </a:ln>
           <a:effectLst>
-            <a:outerShdw sx="100000" sy="100000" kx="0" ky="0" algn="bl" rotWithShape="0" blurRad="127000" dist="38100" dir="5400000">
-              <a:srgbClr val="000000">
-                <a:alpha val="28000"/>
+            <a:outerShdw sx="100000" sy="100000" kx="0" ky="0" algn="bl" rotWithShape="0" blurRad="114300" dist="38100" dir="5400000">
+              <a:srgbClr val="7A6A55">
+                <a:alpha val="12000"/>
               </a:srgbClr>
             </a:outerShdw>
           </a:effectLst>
@@ -15437,11 +15472,11 @@
             <a:r>
               <a:rPr lang="en-US" sz="2000" b="1" dirty="0">
                 <a:solidFill>
-                  <a:srgbClr val="C9A961"/>
-                </a:solidFill>
-                <a:latin typeface="Bookman Old Style" pitchFamily="34" charset="0"/>
-                <a:ea typeface="Bookman Old Style" pitchFamily="34" charset="-122"/>
-                <a:cs typeface="Bookman Old Style" pitchFamily="34" charset="-120"/>
+                  <a:srgbClr val="B1937E"/>
+                </a:solidFill>
+                <a:latin typeface="Georgia" pitchFamily="34" charset="0"/>
+                <a:ea typeface="Georgia" pitchFamily="34" charset="-122"/>
+                <a:cs typeface="Georgia" pitchFamily="34" charset="-120"/>
               </a:rPr>
               <a:t>O caminho do PREÇO</a:t>
             </a:r>
@@ -15466,7 +15501,7 @@
           <a:noFill/>
           <a:ln w="9525">
             <a:solidFill>
-              <a:srgbClr val="C9A961">
+              <a:srgbClr val="B1937E">
                 <a:alpha val="50000"/>
               </a:srgbClr>
             </a:solidFill>
@@ -15505,7 +15540,7 @@
             <a:r>
               <a:rPr lang="en-US" sz="1450" dirty="0">
                 <a:solidFill>
-                  <a:srgbClr val="EAF1FA"/>
+                  <a:srgbClr val="33302B"/>
                 </a:solidFill>
                 <a:latin typeface="Calibri" pitchFamily="34" charset="0"/>
                 <a:ea typeface="Calibri" pitchFamily="34" charset="-122"/>
@@ -15526,7 +15561,7 @@
             <a:r>
               <a:rPr lang="en-US" sz="1450" dirty="0">
                 <a:solidFill>
-                  <a:srgbClr val="EAF1FA"/>
+                  <a:srgbClr val="33302B"/>
                 </a:solidFill>
                 <a:latin typeface="Calibri" pitchFamily="34" charset="0"/>
                 <a:ea typeface="Calibri" pitchFamily="34" charset="-122"/>
@@ -15547,7 +15582,7 @@
             <a:r>
               <a:rPr lang="en-US" sz="1450" dirty="0">
                 <a:solidFill>
-                  <a:srgbClr val="EAF1FA"/>
+                  <a:srgbClr val="33302B"/>
                 </a:solidFill>
                 <a:latin typeface="Calibri" pitchFamily="34" charset="0"/>
                 <a:ea typeface="Calibri" pitchFamily="34" charset="-122"/>
@@ -15568,7 +15603,7 @@
             <a:r>
               <a:rPr lang="en-US" sz="1450" dirty="0">
                 <a:solidFill>
-                  <a:srgbClr val="EAF1FA"/>
+                  <a:srgbClr val="33302B"/>
                 </a:solidFill>
                 <a:latin typeface="Calibri" pitchFamily="34" charset="0"/>
                 <a:ea typeface="Calibri" pitchFamily="34" charset="-122"/>
@@ -15589,7 +15624,7 @@
             <a:r>
               <a:rPr lang="en-US" sz="1450" dirty="0">
                 <a:solidFill>
-                  <a:srgbClr val="EAF1FA"/>
+                  <a:srgbClr val="33302B"/>
                 </a:solidFill>
                 <a:latin typeface="Calibri" pitchFamily="34" charset="0"/>
                 <a:ea typeface="Calibri" pitchFamily="34" charset="-122"/>
@@ -15618,7 +15653,7 @@
           <a:noFill/>
           <a:ln w="9525">
             <a:solidFill>
-              <a:srgbClr val="5C708A">
+              <a:srgbClr val="A89A86">
                 <a:alpha val="60000"/>
               </a:srgbClr>
             </a:solidFill>
@@ -15653,7 +15688,7 @@
             <a:r>
               <a:rPr lang="en-US" sz="900" dirty="0">
                 <a:solidFill>
-                  <a:srgbClr val="5C708A"/>
+                  <a:srgbClr val="A89A86"/>
                 </a:solidFill>
                 <a:latin typeface="Calibri" pitchFamily="34" charset="0"/>
                 <a:ea typeface="Calibri" pitchFamily="34" charset="-122"/>
@@ -15692,7 +15727,7 @@
             <a:r>
               <a:rPr lang="en-US" sz="900" dirty="0">
                 <a:solidFill>
-                  <a:srgbClr val="5C708A"/>
+                  <a:srgbClr val="A89A86"/>
                 </a:solidFill>
                 <a:latin typeface="Calibri" pitchFamily="34" charset="0"/>
                 <a:ea typeface="Calibri" pitchFamily="34" charset="-122"/>
@@ -15718,7 +15753,7 @@
     <p:bg>
       <p:bgPr>
         <a:solidFill>
-          <a:srgbClr val="0B1D33"/>
+          <a:srgbClr val="F8F6F3"/>
         </a:solidFill>
       </p:bgPr>
     </p:bg>
@@ -15763,7 +15798,7 @@
             <a:r>
               <a:rPr lang="en-US" sz="1200" b="1" spc="300" kern="0" dirty="0">
                 <a:solidFill>
-                  <a:srgbClr val="4A9EFF"/>
+                  <a:srgbClr val="9A7B66"/>
                 </a:solidFill>
                 <a:latin typeface="Calibri" pitchFamily="34" charset="0"/>
                 <a:ea typeface="Calibri" pitchFamily="34" charset="-122"/>
@@ -15802,11 +15837,11 @@
             <a:r>
               <a:rPr lang="en-US" sz="3200" b="1" dirty="0">
                 <a:solidFill>
-                  <a:srgbClr val="EAF1FA"/>
-                </a:solidFill>
-                <a:latin typeface="Bookman Old Style" pitchFamily="34" charset="0"/>
-                <a:ea typeface="Bookman Old Style" pitchFamily="34" charset="-122"/>
-                <a:cs typeface="Bookman Old Style" pitchFamily="34" charset="-120"/>
+                  <a:srgbClr val="33302B"/>
+                </a:solidFill>
+                <a:latin typeface="Georgia" pitchFamily="34" charset="0"/>
+                <a:ea typeface="Georgia" pitchFamily="34" charset="-122"/>
+                <a:cs typeface="Georgia" pitchFamily="34" charset="-120"/>
               </a:rPr>
               <a:t>Porque o preço quase sempre vence</a:t>
             </a:r>
@@ -15831,13 +15866,18 @@
             </a:avLst>
           </a:prstGeom>
           <a:solidFill>
-            <a:srgbClr val="13283F"/>
+            <a:srgbClr val="FFFFFF"/>
           </a:solidFill>
-          <a:ln/>
+          <a:ln w="12700">
+            <a:solidFill>
+              <a:srgbClr val="E3D9CC"/>
+            </a:solidFill>
+            <a:prstDash val="solid"/>
+          </a:ln>
           <a:effectLst>
-            <a:outerShdw sx="100000" sy="100000" kx="0" ky="0" algn="bl" rotWithShape="0" blurRad="127000" dist="38100" dir="5400000">
-              <a:srgbClr val="000000">
-                <a:alpha val="28000"/>
+            <a:outerShdw sx="100000" sy="100000" kx="0" ky="0" algn="bl" rotWithShape="0" blurRad="114300" dist="38100" dir="5400000">
+              <a:srgbClr val="7A6A55">
+                <a:alpha val="12000"/>
               </a:srgbClr>
             </a:outerShdw>
           </a:effectLst>
@@ -15870,11 +15910,11 @@
             <a:r>
               <a:rPr lang="en-US" sz="5000" b="1" dirty="0">
                 <a:solidFill>
-                  <a:srgbClr val="C9A961"/>
-                </a:solidFill>
-                <a:latin typeface="Bookman Old Style" pitchFamily="34" charset="0"/>
-                <a:ea typeface="Bookman Old Style" pitchFamily="34" charset="-122"/>
-                <a:cs typeface="Bookman Old Style" pitchFamily="34" charset="-120"/>
+                  <a:srgbClr val="B1937E"/>
+                </a:solidFill>
+                <a:latin typeface="Georgia" pitchFamily="34" charset="0"/>
+                <a:ea typeface="Georgia" pitchFamily="34" charset="-122"/>
+                <a:cs typeface="Georgia" pitchFamily="34" charset="-120"/>
               </a:rPr>
               <a:t>+1.000€</a:t>
             </a:r>
@@ -15909,7 +15949,7 @@
             <a:r>
               <a:rPr lang="en-US" sz="1500" b="1" dirty="0">
                 <a:solidFill>
-                  <a:srgbClr val="EAF1FA"/>
+                  <a:srgbClr val="33302B"/>
                 </a:solidFill>
                 <a:latin typeface="Calibri" pitchFamily="34" charset="0"/>
                 <a:ea typeface="Calibri" pitchFamily="34" charset="-122"/>
@@ -15938,7 +15978,7 @@
           <a:noFill/>
           <a:ln w="9525">
             <a:solidFill>
-              <a:srgbClr val="5C708A">
+              <a:srgbClr val="A89A86">
                 <a:alpha val="60000"/>
               </a:srgbClr>
             </a:solidFill>
@@ -15973,7 +16013,7 @@
             <a:r>
               <a:rPr lang="en-US" sz="1350" dirty="0">
                 <a:solidFill>
-                  <a:srgbClr val="9FB2C9"/>
+                  <a:srgbClr val="8A7E72"/>
                 </a:solidFill>
                 <a:latin typeface="Calibri" pitchFamily="34" charset="0"/>
                 <a:ea typeface="Calibri" pitchFamily="34" charset="-122"/>
@@ -16002,13 +16042,18 @@
             </a:avLst>
           </a:prstGeom>
           <a:solidFill>
-            <a:srgbClr val="13283F"/>
+            <a:srgbClr val="FFFFFF"/>
           </a:solidFill>
-          <a:ln/>
+          <a:ln w="12700">
+            <a:solidFill>
+              <a:srgbClr val="E3D9CC"/>
+            </a:solidFill>
+            <a:prstDash val="solid"/>
+          </a:ln>
           <a:effectLst>
-            <a:outerShdw sx="100000" sy="100000" kx="0" ky="0" algn="bl" rotWithShape="0" blurRad="127000" dist="38100" dir="5400000">
-              <a:srgbClr val="000000">
-                <a:alpha val="28000"/>
+            <a:outerShdw sx="100000" sy="100000" kx="0" ky="0" algn="bl" rotWithShape="0" blurRad="114300" dist="38100" dir="5400000">
+              <a:srgbClr val="7A6A55">
+                <a:alpha val="12000"/>
               </a:srgbClr>
             </a:outerShdw>
           </a:effectLst>
@@ -16041,11 +16086,11 @@
             <a:r>
               <a:rPr lang="en-US" sz="5000" b="1" dirty="0">
                 <a:solidFill>
-                  <a:srgbClr val="4A9EFF"/>
-                </a:solidFill>
-                <a:latin typeface="Bookman Old Style" pitchFamily="34" charset="0"/>
-                <a:ea typeface="Bookman Old Style" pitchFamily="34" charset="-122"/>
-                <a:cs typeface="Bookman Old Style" pitchFamily="34" charset="-120"/>
+                  <a:srgbClr val="9A7B66"/>
+                </a:solidFill>
+                <a:latin typeface="Georgia" pitchFamily="34" charset="0"/>
+                <a:ea typeface="Georgia" pitchFamily="34" charset="-122"/>
+                <a:cs typeface="Georgia" pitchFamily="34" charset="-120"/>
               </a:rPr>
               <a:t>52</a:t>
             </a:r>
@@ -16080,7 +16125,7 @@
             <a:r>
               <a:rPr lang="en-US" sz="1500" b="1" dirty="0">
                 <a:solidFill>
-                  <a:srgbClr val="EAF1FA"/>
+                  <a:srgbClr val="33302B"/>
                 </a:solidFill>
                 <a:latin typeface="Calibri" pitchFamily="34" charset="0"/>
                 <a:ea typeface="Calibri" pitchFamily="34" charset="-122"/>
@@ -16109,7 +16154,7 @@
           <a:noFill/>
           <a:ln w="9525">
             <a:solidFill>
-              <a:srgbClr val="5C708A">
+              <a:srgbClr val="A89A86">
                 <a:alpha val="60000"/>
               </a:srgbClr>
             </a:solidFill>
@@ -16144,7 +16189,7 @@
             <a:r>
               <a:rPr lang="en-US" sz="1350" dirty="0">
                 <a:solidFill>
-                  <a:srgbClr val="9FB2C9"/>
+                  <a:srgbClr val="8A7E72"/>
                 </a:solidFill>
                 <a:latin typeface="Calibri" pitchFamily="34" charset="0"/>
                 <a:ea typeface="Calibri" pitchFamily="34" charset="-122"/>
@@ -16173,13 +16218,18 @@
             </a:avLst>
           </a:prstGeom>
           <a:solidFill>
-            <a:srgbClr val="13283F"/>
+            <a:srgbClr val="FFFFFF"/>
           </a:solidFill>
-          <a:ln/>
+          <a:ln w="12700">
+            <a:solidFill>
+              <a:srgbClr val="E3D9CC"/>
+            </a:solidFill>
+            <a:prstDash val="solid"/>
+          </a:ln>
           <a:effectLst>
-            <a:outerShdw sx="100000" sy="100000" kx="0" ky="0" algn="bl" rotWithShape="0" blurRad="127000" dist="38100" dir="5400000">
-              <a:srgbClr val="000000">
-                <a:alpha val="28000"/>
+            <a:outerShdw sx="100000" sy="100000" kx="0" ky="0" algn="bl" rotWithShape="0" blurRad="114300" dist="38100" dir="5400000">
+              <a:srgbClr val="7A6A55">
+                <a:alpha val="12000"/>
               </a:srgbClr>
             </a:outerShdw>
           </a:effectLst>
@@ -16212,11 +16262,11 @@
             <a:r>
               <a:rPr lang="en-US" sz="5000" b="1" dirty="0">
                 <a:solidFill>
-                  <a:srgbClr val="4A9EFF"/>
-                </a:solidFill>
-                <a:latin typeface="Bookman Old Style" pitchFamily="34" charset="0"/>
-                <a:ea typeface="Bookman Old Style" pitchFamily="34" charset="-122"/>
-                <a:cs typeface="Bookman Old Style" pitchFamily="34" charset="-120"/>
+                  <a:srgbClr val="9A7B66"/>
+                </a:solidFill>
+                <a:latin typeface="Georgia" pitchFamily="34" charset="0"/>
+                <a:ea typeface="Georgia" pitchFamily="34" charset="-122"/>
+                <a:cs typeface="Georgia" pitchFamily="34" charset="-120"/>
               </a:rPr>
               <a:t>1×</a:t>
             </a:r>
@@ -16251,7 +16301,7 @@
             <a:r>
               <a:rPr lang="en-US" sz="1500" b="1" dirty="0">
                 <a:solidFill>
-                  <a:srgbClr val="EAF1FA"/>
+                  <a:srgbClr val="33302B"/>
                 </a:solidFill>
                 <a:latin typeface="Calibri" pitchFamily="34" charset="0"/>
                 <a:ea typeface="Calibri" pitchFamily="34" charset="-122"/>
@@ -16280,7 +16330,7 @@
           <a:noFill/>
           <a:ln w="9525">
             <a:solidFill>
-              <a:srgbClr val="5C708A">
+              <a:srgbClr val="A89A86">
                 <a:alpha val="60000"/>
               </a:srgbClr>
             </a:solidFill>
@@ -16315,7 +16365,7 @@
             <a:r>
               <a:rPr lang="en-US" sz="1350" dirty="0">
                 <a:solidFill>
-                  <a:srgbClr val="9FB2C9"/>
+                  <a:srgbClr val="8A7E72"/>
                 </a:solidFill>
                 <a:latin typeface="Calibri" pitchFamily="34" charset="0"/>
                 <a:ea typeface="Calibri" pitchFamily="34" charset="-122"/>
@@ -16354,7 +16404,7 @@
             <a:r>
               <a:rPr lang="en-US" sz="1500" i="1" dirty="0">
                 <a:solidFill>
-                  <a:srgbClr val="C9A961"/>
+                  <a:srgbClr val="B1937E"/>
                 </a:solidFill>
                 <a:latin typeface="Calibri" pitchFamily="34" charset="0"/>
                 <a:ea typeface="Calibri" pitchFamily="34" charset="-122"/>
@@ -16383,7 +16433,7 @@
           <a:noFill/>
           <a:ln w="9525">
             <a:solidFill>
-              <a:srgbClr val="5C708A">
+              <a:srgbClr val="A89A86">
                 <a:alpha val="60000"/>
               </a:srgbClr>
             </a:solidFill>
@@ -16418,7 +16468,7 @@
             <a:r>
               <a:rPr lang="en-US" sz="900" dirty="0">
                 <a:solidFill>
-                  <a:srgbClr val="5C708A"/>
+                  <a:srgbClr val="A89A86"/>
                 </a:solidFill>
                 <a:latin typeface="Calibri" pitchFamily="34" charset="0"/>
                 <a:ea typeface="Calibri" pitchFamily="34" charset="-122"/>
@@ -16457,7 +16507,7 @@
             <a:r>
               <a:rPr lang="en-US" sz="900" dirty="0">
                 <a:solidFill>
-                  <a:srgbClr val="5C708A"/>
+                  <a:srgbClr val="A89A86"/>
                 </a:solidFill>
                 <a:latin typeface="Calibri" pitchFamily="34" charset="0"/>
                 <a:ea typeface="Calibri" pitchFamily="34" charset="-122"/>
@@ -16483,7 +16533,7 @@
     <p:bg>
       <p:bgPr>
         <a:solidFill>
-          <a:srgbClr val="102844"/>
+          <a:srgbClr val="EFE7DE"/>
         </a:solidFill>
       </p:bgPr>
     </p:bg>
@@ -16528,7 +16578,7 @@
             <a:r>
               <a:rPr lang="en-US" sz="1200" b="1" spc="300" kern="0" dirty="0">
                 <a:solidFill>
-                  <a:srgbClr val="C9A961"/>
+                  <a:srgbClr val="B1937E"/>
                 </a:solidFill>
                 <a:latin typeface="Calibri" pitchFamily="34" charset="0"/>
                 <a:ea typeface="Calibri" pitchFamily="34" charset="-122"/>
@@ -16567,11 +16617,11 @@
             <a:r>
               <a:rPr lang="en-US" sz="3400" b="1" dirty="0">
                 <a:solidFill>
-                  <a:srgbClr val="EAF1FA"/>
-                </a:solidFill>
-                <a:latin typeface="Bookman Old Style" pitchFamily="34" charset="0"/>
-                <a:ea typeface="Bookman Old Style" pitchFamily="34" charset="-122"/>
-                <a:cs typeface="Bookman Old Style" pitchFamily="34" charset="-120"/>
+                  <a:srgbClr val="33302B"/>
+                </a:solidFill>
+                <a:latin typeface="Georgia" pitchFamily="34" charset="0"/>
+                <a:ea typeface="Georgia" pitchFamily="34" charset="-122"/>
+                <a:cs typeface="Georgia" pitchFamily="34" charset="-120"/>
               </a:rPr>
               <a:t>O caso do João</a:t>
             </a:r>
@@ -16596,20 +16646,20 @@
             </a:avLst>
           </a:prstGeom>
           <a:solidFill>
-            <a:srgbClr val="13283F"/>
+            <a:srgbClr val="FFFFFF"/>
           </a:solidFill>
           <a:ln w="9525">
             <a:solidFill>
-              <a:srgbClr val="9FB2C9">
+              <a:srgbClr val="8A7E72">
                 <a:alpha val="50000"/>
               </a:srgbClr>
             </a:solidFill>
             <a:prstDash val="solid"/>
           </a:ln>
           <a:effectLst>
-            <a:outerShdw sx="100000" sy="100000" kx="0" ky="0" algn="bl" rotWithShape="0" blurRad="127000" dist="38100" dir="5400000">
-              <a:srgbClr val="000000">
-                <a:alpha val="28000"/>
+            <a:outerShdw sx="100000" sy="100000" kx="0" ky="0" algn="bl" rotWithShape="0" blurRad="114300" dist="38100" dir="5400000">
+              <a:srgbClr val="7A6A55">
+                <a:alpha val="12000"/>
               </a:srgbClr>
             </a:outerShdw>
           </a:effectLst>
@@ -16642,7 +16692,7 @@
             <a:r>
               <a:rPr lang="en-US" sz="1300" b="1" spc="300" kern="0" dirty="0">
                 <a:solidFill>
-                  <a:srgbClr val="9FB2C9"/>
+                  <a:srgbClr val="8A7E72"/>
                 </a:solidFill>
                 <a:latin typeface="Calibri" pitchFamily="34" charset="0"/>
                 <a:ea typeface="Calibri" pitchFamily="34" charset="-122"/>
@@ -16684,7 +16734,7 @@
             <a:r>
               <a:rPr lang="en-US" sz="1700" b="1" dirty="0">
                 <a:solidFill>
-                  <a:srgbClr val="EAF1FA"/>
+                  <a:srgbClr val="33302B"/>
                 </a:solidFill>
                 <a:latin typeface="Calibri" pitchFamily="34" charset="0"/>
                 <a:ea typeface="Calibri" pitchFamily="34" charset="-122"/>
@@ -16704,7 +16754,7 @@
             <a:r>
               <a:rPr lang="en-US" sz="1500" dirty="0">
                 <a:solidFill>
-                  <a:srgbClr val="9FB2C9"/>
+                  <a:srgbClr val="8A7E72"/>
                 </a:solidFill>
                 <a:latin typeface="Calibri" pitchFamily="34" charset="0"/>
                 <a:ea typeface="Calibri" pitchFamily="34" charset="-122"/>
@@ -16724,7 +16774,7 @@
             <a:r>
               <a:rPr lang="en-US" sz="1500" dirty="0">
                 <a:solidFill>
-                  <a:srgbClr val="9FB2C9"/>
+                  <a:srgbClr val="8A7E72"/>
                 </a:solidFill>
                 <a:latin typeface="Calibri" pitchFamily="34" charset="0"/>
                 <a:ea typeface="Calibri" pitchFamily="34" charset="-122"/>
@@ -16741,7 +16791,7 @@
             <a:r>
               <a:rPr lang="en-US" sz="1400" i="1" dirty="0">
                 <a:solidFill>
-                  <a:srgbClr val="9FB2C9"/>
+                  <a:srgbClr val="8A7E72"/>
                 </a:solidFill>
                 <a:latin typeface="Calibri" pitchFamily="34" charset="0"/>
                 <a:ea typeface="Calibri" pitchFamily="34" charset="-122"/>
@@ -16770,18 +16820,18 @@
             </a:avLst>
           </a:prstGeom>
           <a:solidFill>
-            <a:srgbClr val="16314F"/>
+            <a:srgbClr val="EADFD0"/>
           </a:solidFill>
           <a:ln w="19050">
             <a:solidFill>
-              <a:srgbClr val="C9A961"/>
+              <a:srgbClr val="B1937E"/>
             </a:solidFill>
             <a:prstDash val="solid"/>
           </a:ln>
           <a:effectLst>
-            <a:outerShdw sx="100000" sy="100000" kx="0" ky="0" algn="bl" rotWithShape="0" blurRad="127000" dist="38100" dir="5400000">
-              <a:srgbClr val="000000">
-                <a:alpha val="28000"/>
+            <a:outerShdw sx="100000" sy="100000" kx="0" ky="0" algn="bl" rotWithShape="0" blurRad="114300" dist="38100" dir="5400000">
+              <a:srgbClr val="7A6A55">
+                <a:alpha val="12000"/>
               </a:srgbClr>
             </a:outerShdw>
           </a:effectLst>
@@ -16814,7 +16864,7 @@
             <a:r>
               <a:rPr lang="en-US" sz="1300" b="1" spc="300" kern="0" dirty="0">
                 <a:solidFill>
-                  <a:srgbClr val="C9A961"/>
+                  <a:srgbClr val="B1937E"/>
                 </a:solidFill>
                 <a:latin typeface="Calibri" pitchFamily="34" charset="0"/>
                 <a:ea typeface="Calibri" pitchFamily="34" charset="-122"/>
@@ -16856,7 +16906,7 @@
             <a:r>
               <a:rPr lang="en-US" sz="1700" b="1" dirty="0">
                 <a:solidFill>
-                  <a:srgbClr val="EAF1FA"/>
+                  <a:srgbClr val="33302B"/>
                 </a:solidFill>
                 <a:latin typeface="Calibri" pitchFamily="34" charset="0"/>
                 <a:ea typeface="Calibri" pitchFamily="34" charset="-122"/>
@@ -16876,7 +16926,7 @@
             <a:r>
               <a:rPr lang="en-US" sz="1500" dirty="0">
                 <a:solidFill>
-                  <a:srgbClr val="EAF1FA"/>
+                  <a:srgbClr val="33302B"/>
                 </a:solidFill>
                 <a:latin typeface="Calibri" pitchFamily="34" charset="0"/>
                 <a:ea typeface="Calibri" pitchFamily="34" charset="-122"/>
@@ -16896,7 +16946,7 @@
             <a:r>
               <a:rPr lang="en-US" sz="1500" b="1" dirty="0">
                 <a:solidFill>
-                  <a:srgbClr val="C9A961"/>
+                  <a:srgbClr val="B1937E"/>
                 </a:solidFill>
                 <a:latin typeface="Calibri" pitchFamily="34" charset="0"/>
                 <a:ea typeface="Calibri" pitchFamily="34" charset="-122"/>
@@ -16913,7 +16963,7 @@
             <a:r>
               <a:rPr lang="en-US" sz="1400" i="1" dirty="0">
                 <a:solidFill>
-                  <a:srgbClr val="EAF1FA"/>
+                  <a:srgbClr val="33302B"/>
                 </a:solidFill>
                 <a:latin typeface="Calibri" pitchFamily="34" charset="0"/>
                 <a:ea typeface="Calibri" pitchFamily="34" charset="-122"/>
@@ -16942,7 +16992,7 @@
           <a:noFill/>
           <a:ln w="9525">
             <a:solidFill>
-              <a:srgbClr val="5C708A">
+              <a:srgbClr val="A89A86">
                 <a:alpha val="60000"/>
               </a:srgbClr>
             </a:solidFill>
@@ -16977,7 +17027,7 @@
             <a:r>
               <a:rPr lang="en-US" sz="900" dirty="0">
                 <a:solidFill>
-                  <a:srgbClr val="5C708A"/>
+                  <a:srgbClr val="A89A86"/>
                 </a:solidFill>
                 <a:latin typeface="Calibri" pitchFamily="34" charset="0"/>
                 <a:ea typeface="Calibri" pitchFamily="34" charset="-122"/>
@@ -17016,7 +17066,7 @@
             <a:r>
               <a:rPr lang="en-US" sz="900" dirty="0">
                 <a:solidFill>
-                  <a:srgbClr val="5C708A"/>
+                  <a:srgbClr val="A89A86"/>
                 </a:solidFill>
                 <a:latin typeface="Calibri" pitchFamily="34" charset="0"/>
                 <a:ea typeface="Calibri" pitchFamily="34" charset="-122"/>
